--- a/MicroCRM_Pitch_Deck.pptx
+++ b/MicroCRM_Pitch_Deck.pptx
@@ -5480,8 +5480,8 @@
         </p:nvSpPr>
         <p:spPr>
           <a:xfrm>
-            <a:off x="960120" y="2560320"/>
-            <a:ext cx="2999232" cy="365760"/>
+            <a:off x="960120" y="2542032"/>
+            <a:ext cx="2999232" cy="320040"/>
           </a:xfrm>
           <a:prstGeom prst="rect">
             <a:avLst/>
@@ -5516,8 +5516,8 @@
         </p:nvSpPr>
         <p:spPr>
           <a:xfrm>
-            <a:off x="960120" y="2926080"/>
-            <a:ext cx="2999232" cy="365760"/>
+            <a:off x="960120" y="2852928"/>
+            <a:ext cx="2999232" cy="320040"/>
           </a:xfrm>
           <a:prstGeom prst="rect">
             <a:avLst/>
@@ -5530,16 +5530,15 @@
           </a:bodyPr>
           <a:lstStyle/>
           <a:p>
-            <a:pPr>
-              <a:defRPr sz="950">
+            <a:r>
+              <a:rPr sz="950" b="1" u="sng">
                 <a:solidFill>
                   <a:srgbClr val="60A5FA"/>
                 </a:solidFill>
                 <a:latin typeface="Segoe UI"/>
-              </a:defRPr>
-            </a:pPr>
-            <a:r>
-              <a:t>Live Portal: app.microcrm.site/book/rashmi-r-makeup</a:t>
+                <a:hlinkClick r:id="rId2"/>
+              </a:rPr>
+              <a:t>🔗 app.microcrm.site/book/rashmi-r-makeup</a:t>
             </a:r>
           </a:p>
         </p:txBody>
@@ -5552,8 +5551,8 @@
         </p:nvSpPr>
         <p:spPr>
           <a:xfrm>
-            <a:off x="960120" y="3383280"/>
-            <a:ext cx="2999232" cy="2377440"/>
+            <a:off x="960120" y="3218688"/>
+            <a:ext cx="2999232" cy="2148840"/>
           </a:xfrm>
           <a:prstGeom prst="rect">
             <a:avLst/>
@@ -5568,9 +5567,9 @@
           <a:p>
             <a:pPr>
               <a:spcAft>
-                <a:spcPts val="800"/>
+                <a:spcPts val="600"/>
               </a:spcAft>
-              <a:defRPr sz="1100">
+              <a:defRPr sz="1050">
                 <a:solidFill>
                   <a:srgbClr val="E2E8F0"/>
                 </a:solidFill>
@@ -5584,9 +5583,9 @@
           <a:p>
             <a:pPr>
               <a:spcAft>
-                <a:spcPts val="800"/>
+                <a:spcPts val="600"/>
               </a:spcAft>
-              <a:defRPr sz="1100">
+              <a:defRPr sz="1050">
                 <a:solidFill>
                   <a:srgbClr val="E2E8F0"/>
                 </a:solidFill>
@@ -5600,9 +5599,9 @@
           <a:p>
             <a:pPr>
               <a:spcAft>
-                <a:spcPts val="800"/>
+                <a:spcPts val="600"/>
               </a:spcAft>
-              <a:defRPr sz="1100">
+              <a:defRPr sz="1050">
                 <a:solidFill>
                   <a:srgbClr val="E2E8F0"/>
                 </a:solidFill>
@@ -5618,6 +5617,61 @@
       <p:sp>
         <p:nvSpPr>
           <p:cNvPr id="11" name="Rounded Rectangle 10"/>
+          <p:cNvSpPr/>
+          <p:nvPr/>
+        </p:nvSpPr>
+        <p:spPr>
+          <a:xfrm>
+            <a:off x="960120" y="5468112"/>
+            <a:ext cx="2999232" cy="384048"/>
+          </a:xfrm>
+          <a:prstGeom prst="roundRect">
+            <a:avLst/>
+          </a:prstGeom>
+          <a:solidFill>
+            <a:srgbClr val="111827"/>
+          </a:solidFill>
+          <a:ln>
+            <a:solidFill>
+              <a:srgbClr val="F472B6"/>
+            </a:solidFill>
+          </a:ln>
+        </p:spPr>
+        <p:style>
+          <a:lnRef idx="1">
+            <a:schemeClr val="accent1"/>
+          </a:lnRef>
+          <a:fillRef idx="3">
+            <a:schemeClr val="accent1"/>
+          </a:fillRef>
+          <a:effectRef idx="2">
+            <a:schemeClr val="accent1"/>
+          </a:effectRef>
+          <a:fontRef idx="minor">
+            <a:schemeClr val="lt1"/>
+          </a:fontRef>
+        </p:style>
+        <p:txBody>
+          <a:bodyPr rtlCol="0" anchor="ctr"/>
+          <a:lstStyle/>
+          <a:p>
+            <a:pPr algn="ctr"/>
+            <a:r>
+              <a:rPr sz="1000" b="1">
+                <a:solidFill>
+                  <a:srgbClr val="F472B6"/>
+                </a:solidFill>
+                <a:latin typeface="Segoe UI"/>
+                <a:hlinkClick r:id="rId2"/>
+              </a:rPr>
+              <a:t>Open Live Client Portal ↗</a:t>
+            </a:r>
+          </a:p>
+        </p:txBody>
+      </p:sp>
+      <p:sp>
+        <p:nvSpPr>
+          <p:cNvPr id="12" name="Rounded Rectangle 11"/>
           <p:cNvSpPr/>
           <p:nvPr/>
         </p:nvSpPr>
@@ -5662,7 +5716,7 @@
       </p:sp>
       <p:sp>
         <p:nvSpPr>
-          <p:cNvPr id="12" name="TextBox 11"/>
+          <p:cNvPr id="13" name="TextBox 12"/>
           <p:cNvSpPr txBox="1"/>
           <p:nvPr/>
         </p:nvSpPr>
@@ -5698,14 +5752,14 @@
       </p:sp>
       <p:sp>
         <p:nvSpPr>
-          <p:cNvPr id="13" name="TextBox 12"/>
+          <p:cNvPr id="14" name="TextBox 13"/>
           <p:cNvSpPr txBox="1"/>
           <p:nvPr/>
         </p:nvSpPr>
         <p:spPr>
           <a:xfrm>
-            <a:off x="4690872" y="2560320"/>
-            <a:ext cx="2999232" cy="365760"/>
+            <a:off x="4690872" y="2542032"/>
+            <a:ext cx="2999232" cy="320040"/>
           </a:xfrm>
           <a:prstGeom prst="rect">
             <a:avLst/>
@@ -5734,14 +5788,14 @@
       </p:sp>
       <p:sp>
         <p:nvSpPr>
-          <p:cNvPr id="14" name="TextBox 13"/>
+          <p:cNvPr id="15" name="TextBox 14"/>
           <p:cNvSpPr txBox="1"/>
           <p:nvPr/>
         </p:nvSpPr>
         <p:spPr>
           <a:xfrm>
-            <a:off x="4690872" y="2926080"/>
-            <a:ext cx="2999232" cy="365760"/>
+            <a:off x="4690872" y="2852928"/>
+            <a:ext cx="2999232" cy="320040"/>
           </a:xfrm>
           <a:prstGeom prst="rect">
             <a:avLst/>
@@ -5754,30 +5808,29 @@
           </a:bodyPr>
           <a:lstStyle/>
           <a:p>
-            <a:pPr>
-              <a:defRPr sz="950">
+            <a:r>
+              <a:rPr sz="950" b="1" u="sng">
                 <a:solidFill>
                   <a:srgbClr val="60A5FA"/>
                 </a:solidFill>
                 <a:latin typeface="Segoe UI"/>
-              </a:defRPr>
-            </a:pPr>
-            <a:r>
-              <a:t>Live Portal: app.microcrm.site/book/shri-ranawat-infotech</a:t>
-            </a:r>
-          </a:p>
-        </p:txBody>
-      </p:sp>
-      <p:sp>
-        <p:nvSpPr>
-          <p:cNvPr id="15" name="TextBox 14"/>
+                <a:hlinkClick r:id="rId3"/>
+              </a:rPr>
+              <a:t>🔗 app.microcrm.site/book/shri-ranawat-infotech</a:t>
+            </a:r>
+          </a:p>
+        </p:txBody>
+      </p:sp>
+      <p:sp>
+        <p:nvSpPr>
+          <p:cNvPr id="16" name="TextBox 15"/>
           <p:cNvSpPr txBox="1"/>
           <p:nvPr/>
         </p:nvSpPr>
         <p:spPr>
           <a:xfrm>
-            <a:off x="4690872" y="3383280"/>
-            <a:ext cx="2999232" cy="2377440"/>
+            <a:off x="4690872" y="3218688"/>
+            <a:ext cx="2999232" cy="2148840"/>
           </a:xfrm>
           <a:prstGeom prst="rect">
             <a:avLst/>
@@ -5792,9 +5845,9 @@
           <a:p>
             <a:pPr>
               <a:spcAft>
-                <a:spcPts val="800"/>
+                <a:spcPts val="600"/>
               </a:spcAft>
-              <a:defRPr sz="1100">
+              <a:defRPr sz="1050">
                 <a:solidFill>
                   <a:srgbClr val="E2E8F0"/>
                 </a:solidFill>
@@ -5808,9 +5861,9 @@
           <a:p>
             <a:pPr>
               <a:spcAft>
-                <a:spcPts val="800"/>
+                <a:spcPts val="600"/>
               </a:spcAft>
-              <a:defRPr sz="1100">
+              <a:defRPr sz="1050">
                 <a:solidFill>
                   <a:srgbClr val="E2E8F0"/>
                 </a:solidFill>
@@ -5824,9 +5877,9 @@
           <a:p>
             <a:pPr>
               <a:spcAft>
-                <a:spcPts val="800"/>
+                <a:spcPts val="600"/>
               </a:spcAft>
-              <a:defRPr sz="1100">
+              <a:defRPr sz="1050">
                 <a:solidFill>
                   <a:srgbClr val="E2E8F0"/>
                 </a:solidFill>
@@ -5841,7 +5894,62 @@
       </p:sp>
       <p:sp>
         <p:nvSpPr>
-          <p:cNvPr id="16" name="Rounded Rectangle 15"/>
+          <p:cNvPr id="17" name="Rounded Rectangle 16"/>
+          <p:cNvSpPr/>
+          <p:nvPr/>
+        </p:nvSpPr>
+        <p:spPr>
+          <a:xfrm>
+            <a:off x="4690872" y="5468112"/>
+            <a:ext cx="2999232" cy="384048"/>
+          </a:xfrm>
+          <a:prstGeom prst="roundRect">
+            <a:avLst/>
+          </a:prstGeom>
+          <a:solidFill>
+            <a:srgbClr val="111827"/>
+          </a:solidFill>
+          <a:ln>
+            <a:solidFill>
+              <a:srgbClr val="60A5FA"/>
+            </a:solidFill>
+          </a:ln>
+        </p:spPr>
+        <p:style>
+          <a:lnRef idx="1">
+            <a:schemeClr val="accent1"/>
+          </a:lnRef>
+          <a:fillRef idx="3">
+            <a:schemeClr val="accent1"/>
+          </a:fillRef>
+          <a:effectRef idx="2">
+            <a:schemeClr val="accent1"/>
+          </a:effectRef>
+          <a:fontRef idx="minor">
+            <a:schemeClr val="lt1"/>
+          </a:fontRef>
+        </p:style>
+        <p:txBody>
+          <a:bodyPr rtlCol="0" anchor="ctr"/>
+          <a:lstStyle/>
+          <a:p>
+            <a:pPr algn="ctr"/>
+            <a:r>
+              <a:rPr sz="1000" b="1">
+                <a:solidFill>
+                  <a:srgbClr val="60A5FA"/>
+                </a:solidFill>
+                <a:latin typeface="Segoe UI"/>
+                <a:hlinkClick r:id="rId3"/>
+              </a:rPr>
+              <a:t>Open Live Client Portal ↗</a:t>
+            </a:r>
+          </a:p>
+        </p:txBody>
+      </p:sp>
+      <p:sp>
+        <p:nvSpPr>
+          <p:cNvPr id="18" name="Rounded Rectangle 17"/>
           <p:cNvSpPr/>
           <p:nvPr/>
         </p:nvSpPr>
@@ -5886,7 +5994,7 @@
       </p:sp>
       <p:sp>
         <p:nvSpPr>
-          <p:cNvPr id="17" name="TextBox 16"/>
+          <p:cNvPr id="19" name="TextBox 18"/>
           <p:cNvSpPr txBox="1"/>
           <p:nvPr/>
         </p:nvSpPr>
@@ -5922,14 +6030,14 @@
       </p:sp>
       <p:sp>
         <p:nvSpPr>
-          <p:cNvPr id="18" name="TextBox 17"/>
+          <p:cNvPr id="20" name="TextBox 19"/>
           <p:cNvSpPr txBox="1"/>
           <p:nvPr/>
         </p:nvSpPr>
         <p:spPr>
           <a:xfrm>
-            <a:off x="8421624" y="2560320"/>
-            <a:ext cx="2999232" cy="365760"/>
+            <a:off x="8421624" y="2542032"/>
+            <a:ext cx="2999232" cy="320040"/>
           </a:xfrm>
           <a:prstGeom prst="rect">
             <a:avLst/>
@@ -5958,14 +6066,14 @@
       </p:sp>
       <p:sp>
         <p:nvSpPr>
-          <p:cNvPr id="19" name="TextBox 18"/>
+          <p:cNvPr id="21" name="TextBox 20"/>
           <p:cNvSpPr txBox="1"/>
           <p:nvPr/>
         </p:nvSpPr>
         <p:spPr>
           <a:xfrm>
-            <a:off x="8421624" y="2926080"/>
-            <a:ext cx="2999232" cy="365760"/>
+            <a:off x="8421624" y="2852928"/>
+            <a:ext cx="2999232" cy="320040"/>
           </a:xfrm>
           <a:prstGeom prst="rect">
             <a:avLst/>
@@ -5978,30 +6086,29 @@
           </a:bodyPr>
           <a:lstStyle/>
           <a:p>
-            <a:pPr>
-              <a:defRPr sz="950">
+            <a:r>
+              <a:rPr sz="950" b="1" u="sng">
                 <a:solidFill>
                   <a:srgbClr val="60A5FA"/>
                 </a:solidFill>
                 <a:latin typeface="Segoe UI"/>
-              </a:defRPr>
-            </a:pPr>
-            <a:r>
-              <a:t>Live Portal: app.microcrm.site/book/bbc</a:t>
-            </a:r>
-          </a:p>
-        </p:txBody>
-      </p:sp>
-      <p:sp>
-        <p:nvSpPr>
-          <p:cNvPr id="20" name="TextBox 19"/>
+                <a:hlinkClick r:id="rId4"/>
+              </a:rPr>
+              <a:t>🔗 app.microcrm.site/book/bbc</a:t>
+            </a:r>
+          </a:p>
+        </p:txBody>
+      </p:sp>
+      <p:sp>
+        <p:nvSpPr>
+          <p:cNvPr id="22" name="TextBox 21"/>
           <p:cNvSpPr txBox="1"/>
           <p:nvPr/>
         </p:nvSpPr>
         <p:spPr>
           <a:xfrm>
-            <a:off x="8421624" y="3383280"/>
-            <a:ext cx="2999232" cy="2377440"/>
+            <a:off x="8421624" y="3218688"/>
+            <a:ext cx="2999232" cy="2148840"/>
           </a:xfrm>
           <a:prstGeom prst="rect">
             <a:avLst/>
@@ -6016,9 +6123,9 @@
           <a:p>
             <a:pPr>
               <a:spcAft>
-                <a:spcPts val="800"/>
+                <a:spcPts val="600"/>
               </a:spcAft>
-              <a:defRPr sz="1100">
+              <a:defRPr sz="1050">
                 <a:solidFill>
                   <a:srgbClr val="E2E8F0"/>
                 </a:solidFill>
@@ -6032,9 +6139,9 @@
           <a:p>
             <a:pPr>
               <a:spcAft>
-                <a:spcPts val="800"/>
+                <a:spcPts val="600"/>
               </a:spcAft>
-              <a:defRPr sz="1100">
+              <a:defRPr sz="1050">
                 <a:solidFill>
                   <a:srgbClr val="E2E8F0"/>
                 </a:solidFill>
@@ -6048,9 +6155,9 @@
           <a:p>
             <a:pPr>
               <a:spcAft>
-                <a:spcPts val="800"/>
+                <a:spcPts val="600"/>
               </a:spcAft>
-              <a:defRPr sz="1100">
+              <a:defRPr sz="1050">
                 <a:solidFill>
                   <a:srgbClr val="E2E8F0"/>
                 </a:solidFill>
@@ -6059,6 +6166,61 @@
             </a:pPr>
             <a:r>
               <a:t>Result: Inbound ad leads get automated brochure in 2 minutes; 392% higher site visit conversion.</a:t>
+            </a:r>
+          </a:p>
+        </p:txBody>
+      </p:sp>
+      <p:sp>
+        <p:nvSpPr>
+          <p:cNvPr id="23" name="Rounded Rectangle 22"/>
+          <p:cNvSpPr/>
+          <p:nvPr/>
+        </p:nvSpPr>
+        <p:spPr>
+          <a:xfrm>
+            <a:off x="8421624" y="5468112"/>
+            <a:ext cx="2999232" cy="384048"/>
+          </a:xfrm>
+          <a:prstGeom prst="roundRect">
+            <a:avLst/>
+          </a:prstGeom>
+          <a:solidFill>
+            <a:srgbClr val="111827"/>
+          </a:solidFill>
+          <a:ln>
+            <a:solidFill>
+              <a:srgbClr val="10B981"/>
+            </a:solidFill>
+          </a:ln>
+        </p:spPr>
+        <p:style>
+          <a:lnRef idx="1">
+            <a:schemeClr val="accent1"/>
+          </a:lnRef>
+          <a:fillRef idx="3">
+            <a:schemeClr val="accent1"/>
+          </a:fillRef>
+          <a:effectRef idx="2">
+            <a:schemeClr val="accent1"/>
+          </a:effectRef>
+          <a:fontRef idx="minor">
+            <a:schemeClr val="lt1"/>
+          </a:fontRef>
+        </p:style>
+        <p:txBody>
+          <a:bodyPr rtlCol="0" anchor="ctr"/>
+          <a:lstStyle/>
+          <a:p>
+            <a:pPr algn="ctr"/>
+            <a:r>
+              <a:rPr sz="1000" b="1">
+                <a:solidFill>
+                  <a:srgbClr val="10B981"/>
+                </a:solidFill>
+                <a:latin typeface="Segoe UI"/>
+                <a:hlinkClick r:id="rId4"/>
+              </a:rPr>
+              <a:t>Open Live Client Portal ↗</a:t>
             </a:r>
           </a:p>
         </p:txBody>

--- a/MicroCRM_Pitch_Deck.pptx
+++ b/MicroCRM_Pitch_Deck.pptx
@@ -13,6 +13,7 @@
     <p:sldId id="261" r:id="rId12"/>
     <p:sldId id="262" r:id="rId13"/>
     <p:sldId id="263" r:id="rId14"/>
+    <p:sldId id="264" r:id="rId15"/>
   </p:sldIdLst>
   <p:sldSz cx="12191695" cy="6858000" type="screen4x3"/>
   <p:notesSz cx="6858000" cy="9144000"/>
@@ -4276,7 +4277,7 @@
               </a:defRPr>
             </a:pPr>
             <a:r>
-              <a:t>THE SOLUTION</a:t>
+              <a:t>LOCAL MARKET DEFENSE</a:t>
             </a:r>
           </a:p>
         </p:txBody>
@@ -4312,7 +4313,7 @@
               </a:defRPr>
             </a:pPr>
             <a:r>
-              <a:t>The 4-in-1 Complete Business Engine</a:t>
+              <a:t>The Anti-Aggregator Mission: Empowering Local Shops</a:t>
             </a:r>
           </a:p>
         </p:txBody>
@@ -4348,7 +4349,7 @@
               </a:defRPr>
             </a:pPr>
             <a:r>
-              <a:t>MicroCRM unites your entire customer journey into one connected, automated ecosystem.</a:t>
+              <a:t>Defending local merchants from 25% commission traps, hidden customer contacts, and algorithmic lock-in.</a:t>
             </a:r>
           </a:p>
         </p:txBody>
@@ -4362,7 +4363,7 @@
         <p:spPr>
           <a:xfrm>
             <a:off x="731520" y="1920240"/>
-            <a:ext cx="2542032" cy="4114800"/>
+            <a:ext cx="5212080" cy="4114800"/>
           </a:xfrm>
           <a:prstGeom prst="roundRect">
             <a:avLst/>
@@ -4372,7 +4373,7 @@
           </a:solidFill>
           <a:ln>
             <a:solidFill>
-              <a:srgbClr val="60A5FA"/>
+              <a:srgbClr val="EF4444"/>
             </a:solidFill>
           </a:ln>
         </p:spPr>
@@ -4406,8 +4407,8 @@
         </p:nvSpPr>
         <p:spPr>
           <a:xfrm>
-            <a:off x="914400" y="2148840"/>
-            <a:ext cx="2176272" cy="457200"/>
+            <a:off x="1005840" y="2148840"/>
+            <a:ext cx="4663440" cy="457200"/>
           </a:xfrm>
           <a:prstGeom prst="rect">
             <a:avLst/>
@@ -4421,12 +4422,15 @@
           <a:lstStyle/>
           <a:p>
             <a:pPr>
-              <a:defRPr sz="2200">
-                <a:latin typeface="Segoe UI"/>
-              </a:defRPr>
-            </a:pPr>
-            <a:r>
-              <a:t>🌐</a:t>
+              <a:defRPr sz="1500" b="1">
+                <a:solidFill>
+                  <a:srgbClr val="F87171"/>
+                </a:solidFill>
+                <a:latin typeface="Segoe UI"/>
+              </a:defRPr>
+            </a:pPr>
+            <a:r>
+              <a:t>⚠️ The Big Aggregator Trap (Urban Co / JustDial)</a:t>
             </a:r>
           </a:p>
         </p:txBody>
@@ -4439,8 +4443,8 @@
         </p:nvSpPr>
         <p:spPr>
           <a:xfrm>
-            <a:off x="914400" y="2697480"/>
-            <a:ext cx="2176272" cy="640080"/>
+            <a:off x="1005840" y="2697480"/>
+            <a:ext cx="4663440" cy="2468880"/>
           </a:xfrm>
           <a:prstGeom prst="rect">
             <a:avLst/>
@@ -4454,127 +4458,170 @@
           <a:lstStyle/>
           <a:p>
             <a:pPr>
-              <a:defRPr sz="1400" b="1">
-                <a:solidFill>
-                  <a:srgbClr val="60A5FA"/>
-                </a:solidFill>
-                <a:latin typeface="Segoe UI"/>
-              </a:defRPr>
-            </a:pPr>
-            <a:r>
-              <a:t>1. Google Search &amp; Local SEO</a:t>
-            </a:r>
-          </a:p>
-        </p:txBody>
-      </p:sp>
-      <p:sp>
-        <p:nvSpPr>
-          <p:cNvPr id="9" name="TextBox 8"/>
-          <p:cNvSpPr txBox="1"/>
-          <p:nvPr/>
-        </p:nvSpPr>
-        <p:spPr>
-          <a:xfrm>
-            <a:off x="914400" y="3429000"/>
-            <a:ext cx="2176272" cy="1188720"/>
-          </a:xfrm>
-          <a:prstGeom prst="rect">
-            <a:avLst/>
-          </a:prstGeom>
-          <a:noFill/>
-        </p:spPr>
-        <p:txBody>
-          <a:bodyPr wrap="square">
-            <a:spAutoFit/>
-          </a:bodyPr>
-          <a:lstStyle/>
-          <a:p>
-            <a:pPr>
-              <a:defRPr sz="1100">
+              <a:spcAft>
+                <a:spcPts val="600"/>
+              </a:spcAft>
+            </a:pPr>
+            <a:r>
+              <a:rPr b="1" sz="1050">
+                <a:solidFill>
+                  <a:srgbClr val="FFFFFF"/>
+                </a:solidFill>
+                <a:latin typeface="Segoe UI"/>
+              </a:rPr>
+              <a:t>• 20% to 30% Commission Cuts: </a:t>
+            </a:r>
+            <a:r>
+              <a:rPr sz="1050">
                 <a:solidFill>
                   <a:srgbClr val="94A3B8"/>
                 </a:solidFill>
                 <a:latin typeface="Segoe UI"/>
-              </a:defRPr>
-            </a:pPr>
-            <a:r>
-              <a:t>Dominate local searches on Google Maps &amp; Search. Direct searchers to your branded booking link instead of generic directory listing competitors.</a:t>
-            </a:r>
-          </a:p>
-        </p:txBody>
-      </p:sp>
-      <p:sp>
-        <p:nvSpPr>
-          <p:cNvPr id="10" name="TextBox 9"/>
-          <p:cNvSpPr txBox="1"/>
-          <p:nvPr/>
-        </p:nvSpPr>
-        <p:spPr>
-          <a:xfrm>
-            <a:off x="914400" y="4709160"/>
-            <a:ext cx="2176272" cy="1097280"/>
-          </a:xfrm>
-          <a:prstGeom prst="rect">
-            <a:avLst/>
-          </a:prstGeom>
-          <a:noFill/>
-        </p:spPr>
-        <p:txBody>
-          <a:bodyPr wrap="square">
-            <a:spAutoFit/>
-          </a:bodyPr>
-          <a:lstStyle/>
-          <a:p>
-            <a:pPr>
-              <a:defRPr sz="1000">
-                <a:solidFill>
-                  <a:srgbClr val="E2E8F0"/>
-                </a:solidFill>
-                <a:latin typeface="Segoe UI"/>
-              </a:defRPr>
-            </a:pPr>
-            <a:r>
-              <a:t>✓ Top Google Maps ranking</a:t>
-            </a:r>
-          </a:p>
-          <a:p>
-            <a:pPr>
-              <a:defRPr sz="1000">
-                <a:solidFill>
-                  <a:srgbClr val="E2E8F0"/>
-                </a:solidFill>
-                <a:latin typeface="Segoe UI"/>
-              </a:defRPr>
-            </a:pPr>
-            <a:r>
-              <a:t>✓ Direct reservation/order link</a:t>
-            </a:r>
-          </a:p>
-          <a:p>
-            <a:pPr>
-              <a:defRPr sz="1000">
-                <a:solidFill>
-                  <a:srgbClr val="E2E8F0"/>
-                </a:solidFill>
-                <a:latin typeface="Segoe UI"/>
-              </a:defRPr>
-            </a:pPr>
-            <a:r>
-              <a:t>✓ Instant verified review booster</a:t>
-            </a:r>
-          </a:p>
-        </p:txBody>
-      </p:sp>
-      <p:sp>
-        <p:nvSpPr>
-          <p:cNvPr id="11" name="Rounded Rectangle 10"/>
+              </a:rPr>
+              <a:t>Aggregators slice away a quarter of every haircut, repair, or retail order you work hard to fulfill.</a:t>
+            </a:r>
+          </a:p>
+          <a:p>
+            <a:pPr>
+              <a:spcAft>
+                <a:spcPts val="600"/>
+              </a:spcAft>
+            </a:pPr>
+            <a:r>
+              <a:rPr b="1" sz="1050">
+                <a:solidFill>
+                  <a:srgbClr val="FFFFFF"/>
+                </a:solidFill>
+                <a:latin typeface="Segoe UI"/>
+              </a:rPr>
+              <a:t>• Customer Contact Masking: </a:t>
+            </a:r>
+            <a:r>
+              <a:rPr sz="1050">
+                <a:solidFill>
+                  <a:srgbClr val="94A3B8"/>
+                </a:solidFill>
+                <a:latin typeface="Segoe UI"/>
+              </a:rPr>
+              <a:t>Buyer phone numbers and data are withheld, making it impossible for you to build repeat direct client relationships.</a:t>
+            </a:r>
+          </a:p>
+          <a:p>
+            <a:pPr>
+              <a:spcAft>
+                <a:spcPts val="600"/>
+              </a:spcAft>
+            </a:pPr>
+            <a:r>
+              <a:rPr b="1" sz="1050">
+                <a:solidFill>
+                  <a:srgbClr val="FFFFFF"/>
+                </a:solidFill>
+                <a:latin typeface="Segoe UI"/>
+              </a:rPr>
+              <a:t>• Cross-Promoting Rivals: </a:t>
+            </a:r>
+            <a:r>
+              <a:rPr sz="1050">
+                <a:solidFill>
+                  <a:srgbClr val="94A3B8"/>
+                </a:solidFill>
+                <a:latin typeface="Segoe UI"/>
+              </a:rPr>
+              <a:t>Aggregators shamelessly showcase competing shops and undercutters on your own listing profile.</a:t>
+            </a:r>
+          </a:p>
+          <a:p>
+            <a:pPr>
+              <a:spcAft>
+                <a:spcPts val="600"/>
+              </a:spcAft>
+            </a:pPr>
+            <a:r>
+              <a:rPr b="1" sz="1050">
+                <a:solidFill>
+                  <a:srgbClr val="FFFFFF"/>
+                </a:solidFill>
+                <a:latin typeface="Segoe UI"/>
+              </a:rPr>
+              <a:t>• Zero Customer Equity: </a:t>
+            </a:r>
+            <a:r>
+              <a:rPr sz="1050">
+                <a:solidFill>
+                  <a:srgbClr val="94A3B8"/>
+                </a:solidFill>
+                <a:latin typeface="Segoe UI"/>
+              </a:rPr>
+              <a:t>If you stop paying exorbitant ad bidding tolls, your customer volume immediately collapses to zero.</a:t>
+            </a:r>
+          </a:p>
+        </p:txBody>
+      </p:sp>
+      <p:sp>
+        <p:nvSpPr>
+          <p:cNvPr id="9" name="Rounded Rectangle 8"/>
           <p:cNvSpPr/>
           <p:nvPr/>
         </p:nvSpPr>
         <p:spPr>
           <a:xfrm>
-            <a:off x="3493008" y="1920240"/>
-            <a:ext cx="2542032" cy="4114800"/>
+            <a:off x="1005840" y="5349240"/>
+            <a:ext cx="4663440" cy="457200"/>
+          </a:xfrm>
+          <a:prstGeom prst="roundRect">
+            <a:avLst/>
+          </a:prstGeom>
+          <a:solidFill>
+            <a:srgbClr val="281218"/>
+          </a:solidFill>
+          <a:ln>
+            <a:solidFill>
+              <a:srgbClr val="EF4444"/>
+            </a:solidFill>
+          </a:ln>
+        </p:spPr>
+        <p:style>
+          <a:lnRef idx="1">
+            <a:schemeClr val="accent1"/>
+          </a:lnRef>
+          <a:fillRef idx="3">
+            <a:schemeClr val="accent1"/>
+          </a:fillRef>
+          <a:effectRef idx="2">
+            <a:schemeClr val="accent1"/>
+          </a:effectRef>
+          <a:fontRef idx="minor">
+            <a:schemeClr val="lt1"/>
+          </a:fontRef>
+        </p:style>
+        <p:txBody>
+          <a:bodyPr rtlCol="0" anchor="ctr"/>
+          <a:lstStyle/>
+          <a:p>
+            <a:pPr algn="ctr"/>
+            <a:r>
+              <a:rPr sz="950" b="1">
+                <a:solidFill>
+                  <a:srgbClr val="F87171"/>
+                </a:solidFill>
+                <a:latin typeface="Segoe UI"/>
+              </a:rPr>
+              <a:t>❌ Result: Local merchants become disposable, low-margin subcontractors</a:t>
+            </a:r>
+          </a:p>
+        </p:txBody>
+      </p:sp>
+      <p:sp>
+        <p:nvSpPr>
+          <p:cNvPr id="10" name="Rounded Rectangle 9"/>
+          <p:cNvSpPr/>
+          <p:nvPr/>
+        </p:nvSpPr>
+        <p:spPr>
+          <a:xfrm>
+            <a:off x="6217920" y="1920240"/>
+            <a:ext cx="5212080" cy="4114800"/>
           </a:xfrm>
           <a:prstGeom prst="roundRect">
             <a:avLst/>
@@ -4612,14 +4659,14 @@
       </p:sp>
       <p:sp>
         <p:nvSpPr>
-          <p:cNvPr id="12" name="TextBox 11"/>
+          <p:cNvPr id="11" name="TextBox 10"/>
           <p:cNvSpPr txBox="1"/>
           <p:nvPr/>
         </p:nvSpPr>
         <p:spPr>
           <a:xfrm>
-            <a:off x="3675888" y="2148840"/>
-            <a:ext cx="2176272" cy="457200"/>
+            <a:off x="6492240" y="2148840"/>
+            <a:ext cx="4663440" cy="457200"/>
           </a:xfrm>
           <a:prstGeom prst="rect">
             <a:avLst/>
@@ -4633,26 +4680,29 @@
           <a:lstStyle/>
           <a:p>
             <a:pPr>
-              <a:defRPr sz="2200">
-                <a:latin typeface="Segoe UI"/>
-              </a:defRPr>
-            </a:pPr>
-            <a:r>
-              <a:t>📱</a:t>
-            </a:r>
-          </a:p>
-        </p:txBody>
-      </p:sp>
-      <p:sp>
-        <p:nvSpPr>
-          <p:cNvPr id="13" name="TextBox 12"/>
+              <a:defRPr sz="1500" b="1">
+                <a:solidFill>
+                  <a:srgbClr val="10B981"/>
+                </a:solidFill>
+                <a:latin typeface="Segoe UI"/>
+              </a:defRPr>
+            </a:pPr>
+            <a:r>
+              <a:t>🛡️ The MicroCRM Direct Local Defense</a:t>
+            </a:r>
+          </a:p>
+        </p:txBody>
+      </p:sp>
+      <p:sp>
+        <p:nvSpPr>
+          <p:cNvPr id="12" name="TextBox 11"/>
           <p:cNvSpPr txBox="1"/>
           <p:nvPr/>
         </p:nvSpPr>
         <p:spPr>
           <a:xfrm>
-            <a:off x="3675888" y="2697480"/>
-            <a:ext cx="2176272" cy="640080"/>
+            <a:off x="6492240" y="2697480"/>
+            <a:ext cx="4663440" cy="2468880"/>
           </a:xfrm>
           <a:prstGeom prst="rect">
             <a:avLst/>
@@ -4666,137 +4716,126 @@
           <a:lstStyle/>
           <a:p>
             <a:pPr>
-              <a:defRPr sz="1400" b="1">
-                <a:solidFill>
-                  <a:srgbClr val="10B981"/>
-                </a:solidFill>
-                <a:latin typeface="Segoe UI"/>
-              </a:defRPr>
-            </a:pPr>
-            <a:r>
-              <a:t>2. Instant Mobile Storefront</a:t>
-            </a:r>
-          </a:p>
-        </p:txBody>
-      </p:sp>
-      <p:sp>
-        <p:nvSpPr>
-          <p:cNvPr id="14" name="TextBox 13"/>
-          <p:cNvSpPr txBox="1"/>
-          <p:nvPr/>
-        </p:nvSpPr>
-        <p:spPr>
-          <a:xfrm>
-            <a:off x="3675888" y="3429000"/>
-            <a:ext cx="2176272" cy="1188720"/>
-          </a:xfrm>
-          <a:prstGeom prst="rect">
-            <a:avLst/>
-          </a:prstGeom>
-          <a:noFill/>
-        </p:spPr>
-        <p:txBody>
-          <a:bodyPr wrap="square">
-            <a:spAutoFit/>
-          </a:bodyPr>
-          <a:lstStyle/>
-          <a:p>
-            <a:pPr>
-              <a:defRPr sz="1100">
+              <a:spcAft>
+                <a:spcPts val="600"/>
+              </a:spcAft>
+            </a:pPr>
+            <a:r>
+              <a:rPr b="1" sz="1050">
+                <a:solidFill>
+                  <a:srgbClr val="FFFFFF"/>
+                </a:solidFill>
+                <a:latin typeface="Segoe UI"/>
+              </a:rPr>
+              <a:t>• Google Maps Discovery: </a:t>
+            </a:r>
+            <a:r>
+              <a:rPr sz="1050">
                 <a:solidFill>
                   <a:srgbClr val="94A3B8"/>
                 </a:solidFill>
                 <a:latin typeface="Segoe UI"/>
-              </a:defRPr>
-            </a:pPr>
-            <a:r>
-              <a:t>Lightning-fast digital catalog at app.microcrm.site/book/{slug}. Zero app downloads. Features interactive layout maps and Instagram Reel video proof.</a:t>
-            </a:r>
-          </a:p>
-        </p:txBody>
-      </p:sp>
-      <p:sp>
-        <p:nvSpPr>
-          <p:cNvPr id="15" name="TextBox 14"/>
-          <p:cNvSpPr txBox="1"/>
-          <p:nvPr/>
-        </p:nvSpPr>
-        <p:spPr>
-          <a:xfrm>
-            <a:off x="3675888" y="4709160"/>
-            <a:ext cx="2176272" cy="1097280"/>
-          </a:xfrm>
-          <a:prstGeom prst="rect">
-            <a:avLst/>
-          </a:prstGeom>
-          <a:noFill/>
-        </p:spPr>
-        <p:txBody>
-          <a:bodyPr wrap="square">
-            <a:spAutoFit/>
-          </a:bodyPr>
-          <a:lstStyle/>
-          <a:p>
-            <a:pPr>
-              <a:defRPr sz="1000">
-                <a:solidFill>
-                  <a:srgbClr val="E2E8F0"/>
-                </a:solidFill>
-                <a:latin typeface="Segoe UI"/>
-              </a:defRPr>
-            </a:pPr>
-            <a:r>
-              <a:t>✓ Instagram Reel video proofs</a:t>
-            </a:r>
-          </a:p>
-          <a:p>
-            <a:pPr>
-              <a:defRPr sz="1000">
-                <a:solidFill>
-                  <a:srgbClr val="E2E8F0"/>
-                </a:solidFill>
-                <a:latin typeface="Segoe UI"/>
-              </a:defRPr>
-            </a:pPr>
-            <a:r>
-              <a:t>✓ Self-service time slot booking</a:t>
-            </a:r>
-          </a:p>
-          <a:p>
-            <a:pPr>
-              <a:defRPr sz="1000">
-                <a:solidFill>
-                  <a:srgbClr val="E2E8F0"/>
-                </a:solidFill>
-                <a:latin typeface="Segoe UI"/>
-              </a:defRPr>
-            </a:pPr>
-            <a:r>
-              <a:t>✓ 1-click WhatsApp cart checkout</a:t>
-            </a:r>
-          </a:p>
-        </p:txBody>
-      </p:sp>
-      <p:sp>
-        <p:nvSpPr>
-          <p:cNvPr id="16" name="Rounded Rectangle 15"/>
+              </a:rPr>
+              <a:t>Nearby shoppers search Google Maps for top salons, repairs, or plots and see your verified pin.</a:t>
+            </a:r>
+          </a:p>
+          <a:p>
+            <a:pPr>
+              <a:spcAft>
+                <a:spcPts val="600"/>
+              </a:spcAft>
+            </a:pPr>
+            <a:r>
+              <a:rPr b="1" sz="1050">
+                <a:solidFill>
+                  <a:srgbClr val="FFFFFF"/>
+                </a:solidFill>
+                <a:latin typeface="Segoe UI"/>
+              </a:rPr>
+              <a:t>• Direct 1-Tap Booking Portal: </a:t>
+            </a:r>
+            <a:r>
+              <a:rPr sz="1050">
+                <a:solidFill>
+                  <a:srgbClr val="94A3B8"/>
+                </a:solidFill>
+                <a:latin typeface="Segoe UI"/>
+              </a:rPr>
+              <a:t>Clicks straight to your custom URL (app.microcrm.site/book/{slug}) with zero app download friction.</a:t>
+            </a:r>
+          </a:p>
+          <a:p>
+            <a:pPr>
+              <a:spcAft>
+                <a:spcPts val="600"/>
+              </a:spcAft>
+            </a:pPr>
+            <a:r>
+              <a:rPr b="1" sz="1050">
+                <a:solidFill>
+                  <a:srgbClr val="FFFFFF"/>
+                </a:solidFill>
+                <a:latin typeface="Segoe UI"/>
+              </a:rPr>
+              <a:t>• 24/7 WhatsApp AI Assistant: </a:t>
+            </a:r>
+            <a:r>
+              <a:rPr sz="1050">
+                <a:solidFill>
+                  <a:srgbClr val="94A3B8"/>
+                </a:solidFill>
+                <a:latin typeface="Segoe UI"/>
+              </a:rPr>
+              <a:t>Automated multilingual booking confirmation, site-visit calendar slots, and PDF receipts sent in 2 minutes.</a:t>
+            </a:r>
+          </a:p>
+          <a:p>
+            <a:pPr>
+              <a:spcAft>
+                <a:spcPts val="600"/>
+              </a:spcAft>
+            </a:pPr>
+            <a:r>
+              <a:rPr b="1" sz="1050">
+                <a:solidFill>
+                  <a:srgbClr val="FFFFFF"/>
+                </a:solidFill>
+                <a:latin typeface="Segoe UI"/>
+              </a:rPr>
+              <a:t>• 0% Commission Forever: </a:t>
+            </a:r>
+            <a:r>
+              <a:rPr sz="1050">
+                <a:solidFill>
+                  <a:srgbClr val="94A3B8"/>
+                </a:solidFill>
+                <a:latin typeface="Segoe UI"/>
+              </a:rPr>
+              <a:t>100% of revenue stays in your pocket. You own your client database and phone numbers forever.</a:t>
+            </a:r>
+          </a:p>
+        </p:txBody>
+      </p:sp>
+      <p:sp>
+        <p:nvSpPr>
+          <p:cNvPr id="13" name="Rounded Rectangle 12"/>
           <p:cNvSpPr/>
           <p:nvPr/>
         </p:nvSpPr>
         <p:spPr>
           <a:xfrm>
-            <a:off x="6254496" y="1920240"/>
-            <a:ext cx="2542032" cy="4114800"/>
+            <a:off x="6492240" y="5349240"/>
+            <a:ext cx="4663440" cy="457200"/>
           </a:xfrm>
           <a:prstGeom prst="roundRect">
             <a:avLst/>
           </a:prstGeom>
           <a:solidFill>
-            <a:srgbClr val="1E293B"/>
+            <a:srgbClr val="0C261E"/>
           </a:solidFill>
           <a:ln>
             <a:solidFill>
-              <a:srgbClr val="C084FC"/>
+              <a:srgbClr val="10B981"/>
             </a:solidFill>
           </a:ln>
         </p:spPr>
@@ -4819,384 +4858,15 @@
           <a:lstStyle/>
           <a:p>
             <a:pPr algn="ctr"/>
-          </a:p>
-        </p:txBody>
-      </p:sp>
-      <p:sp>
-        <p:nvSpPr>
-          <p:cNvPr id="17" name="TextBox 16"/>
-          <p:cNvSpPr txBox="1"/>
-          <p:nvPr/>
-        </p:nvSpPr>
-        <p:spPr>
-          <a:xfrm>
-            <a:off x="6437376" y="2148840"/>
-            <a:ext cx="2176272" cy="457200"/>
-          </a:xfrm>
-          <a:prstGeom prst="rect">
-            <a:avLst/>
-          </a:prstGeom>
-          <a:noFill/>
-        </p:spPr>
-        <p:txBody>
-          <a:bodyPr wrap="none">
-            <a:spAutoFit/>
-          </a:bodyPr>
-          <a:lstStyle/>
-          <a:p>
-            <a:pPr>
-              <a:defRPr sz="2200">
-                <a:latin typeface="Segoe UI"/>
-              </a:defRPr>
-            </a:pPr>
-            <a:r>
-              <a:t>💬</a:t>
-            </a:r>
-          </a:p>
-        </p:txBody>
-      </p:sp>
-      <p:sp>
-        <p:nvSpPr>
-          <p:cNvPr id="18" name="TextBox 17"/>
-          <p:cNvSpPr txBox="1"/>
-          <p:nvPr/>
-        </p:nvSpPr>
-        <p:spPr>
-          <a:xfrm>
-            <a:off x="6437376" y="2697480"/>
-            <a:ext cx="2176272" cy="640080"/>
-          </a:xfrm>
-          <a:prstGeom prst="rect">
-            <a:avLst/>
-          </a:prstGeom>
-          <a:noFill/>
-        </p:spPr>
-        <p:txBody>
-          <a:bodyPr wrap="square">
-            <a:spAutoFit/>
-          </a:bodyPr>
-          <a:lstStyle/>
-          <a:p>
-            <a:pPr>
-              <a:defRPr sz="1400" b="1">
-                <a:solidFill>
-                  <a:srgbClr val="C084FC"/>
-                </a:solidFill>
-                <a:latin typeface="Segoe UI"/>
-              </a:defRPr>
-            </a:pPr>
-            <a:r>
-              <a:t>3. 24/7 WhatsApp AI Receptionist</a:t>
-            </a:r>
-          </a:p>
-        </p:txBody>
-      </p:sp>
-      <p:sp>
-        <p:nvSpPr>
-          <p:cNvPr id="19" name="TextBox 18"/>
-          <p:cNvSpPr txBox="1"/>
-          <p:nvPr/>
-        </p:nvSpPr>
-        <p:spPr>
-          <a:xfrm>
-            <a:off x="6437376" y="3429000"/>
-            <a:ext cx="2176272" cy="1188720"/>
-          </a:xfrm>
-          <a:prstGeom prst="rect">
-            <a:avLst/>
-          </a:prstGeom>
-          <a:noFill/>
-        </p:spPr>
-        <p:txBody>
-          <a:bodyPr wrap="square">
-            <a:spAutoFit/>
-          </a:bodyPr>
-          <a:lstStyle/>
-          <a:p>
-            <a:pPr>
-              <a:defRPr sz="1100">
-                <a:solidFill>
-                  <a:srgbClr val="94A3B8"/>
-                </a:solidFill>
-                <a:latin typeface="Segoe UI"/>
-              </a:defRPr>
-            </a:pPr>
-            <a:r>
-              <a:t>Answers customer questions in Hindi/Hinglish/English instantly. Dispatches PDF brochures, automated bills, and appointment reminders.</a:t>
-            </a:r>
-          </a:p>
-        </p:txBody>
-      </p:sp>
-      <p:sp>
-        <p:nvSpPr>
-          <p:cNvPr id="20" name="TextBox 19"/>
-          <p:cNvSpPr txBox="1"/>
-          <p:nvPr/>
-        </p:nvSpPr>
-        <p:spPr>
-          <a:xfrm>
-            <a:off x="6437376" y="4709160"/>
-            <a:ext cx="2176272" cy="1097280"/>
-          </a:xfrm>
-          <a:prstGeom prst="rect">
-            <a:avLst/>
-          </a:prstGeom>
-          <a:noFill/>
-        </p:spPr>
-        <p:txBody>
-          <a:bodyPr wrap="square">
-            <a:spAutoFit/>
-          </a:bodyPr>
-          <a:lstStyle/>
-          <a:p>
-            <a:pPr>
-              <a:defRPr sz="1000">
-                <a:solidFill>
-                  <a:srgbClr val="E2E8F0"/>
-                </a:solidFill>
-                <a:latin typeface="Segoe UI"/>
-              </a:defRPr>
-            </a:pPr>
-            <a:r>
-              <a:t>✓ Speaks natural Indian phrasing</a:t>
-            </a:r>
-          </a:p>
-          <a:p>
-            <a:pPr>
-              <a:defRPr sz="1000">
-                <a:solidFill>
-                  <a:srgbClr val="E2E8F0"/>
-                </a:solidFill>
-                <a:latin typeface="Segoe UI"/>
-              </a:defRPr>
-            </a:pPr>
-            <a:r>
-              <a:t>✓ Dispatches PDF receipts &amp; brochures</a:t>
-            </a:r>
-          </a:p>
-          <a:p>
-            <a:pPr>
-              <a:defRPr sz="1000">
-                <a:solidFill>
-                  <a:srgbClr val="E2E8F0"/>
-                </a:solidFill>
-                <a:latin typeface="Segoe UI"/>
-              </a:defRPr>
-            </a:pPr>
-            <a:r>
-              <a:t>✓ 70% reduction in no-shows</a:t>
-            </a:r>
-          </a:p>
-        </p:txBody>
-      </p:sp>
-      <p:sp>
-        <p:nvSpPr>
-          <p:cNvPr id="21" name="Rounded Rectangle 20"/>
-          <p:cNvSpPr/>
-          <p:nvPr/>
-        </p:nvSpPr>
-        <p:spPr>
-          <a:xfrm>
-            <a:off x="9015984" y="1920240"/>
-            <a:ext cx="2542032" cy="4114800"/>
-          </a:xfrm>
-          <a:prstGeom prst="roundRect">
-            <a:avLst/>
-          </a:prstGeom>
-          <a:solidFill>
-            <a:srgbClr val="1E293B"/>
-          </a:solidFill>
-          <a:ln>
-            <a:solidFill>
-              <a:srgbClr val="F472B6"/>
-            </a:solidFill>
-          </a:ln>
-        </p:spPr>
-        <p:style>
-          <a:lnRef idx="1">
-            <a:schemeClr val="accent1"/>
-          </a:lnRef>
-          <a:fillRef idx="3">
-            <a:schemeClr val="accent1"/>
-          </a:fillRef>
-          <a:effectRef idx="2">
-            <a:schemeClr val="accent1"/>
-          </a:effectRef>
-          <a:fontRef idx="minor">
-            <a:schemeClr val="lt1"/>
-          </a:fontRef>
-        </p:style>
-        <p:txBody>
-          <a:bodyPr rtlCol="0" anchor="ctr"/>
-          <a:lstStyle/>
-          <a:p>
-            <a:pPr algn="ctr"/>
-          </a:p>
-        </p:txBody>
-      </p:sp>
-      <p:sp>
-        <p:nvSpPr>
-          <p:cNvPr id="22" name="TextBox 21"/>
-          <p:cNvSpPr txBox="1"/>
-          <p:nvPr/>
-        </p:nvSpPr>
-        <p:spPr>
-          <a:xfrm>
-            <a:off x="9198864" y="2148840"/>
-            <a:ext cx="2176272" cy="457200"/>
-          </a:xfrm>
-          <a:prstGeom prst="rect">
-            <a:avLst/>
-          </a:prstGeom>
-          <a:noFill/>
-        </p:spPr>
-        <p:txBody>
-          <a:bodyPr wrap="none">
-            <a:spAutoFit/>
-          </a:bodyPr>
-          <a:lstStyle/>
-          <a:p>
-            <a:pPr>
-              <a:defRPr sz="2200">
-                <a:latin typeface="Segoe UI"/>
-              </a:defRPr>
-            </a:pPr>
-            <a:r>
-              <a:t>💳</a:t>
-            </a:r>
-          </a:p>
-        </p:txBody>
-      </p:sp>
-      <p:sp>
-        <p:nvSpPr>
-          <p:cNvPr id="23" name="TextBox 22"/>
-          <p:cNvSpPr txBox="1"/>
-          <p:nvPr/>
-        </p:nvSpPr>
-        <p:spPr>
-          <a:xfrm>
-            <a:off x="9198864" y="2697480"/>
-            <a:ext cx="2176272" cy="640080"/>
-          </a:xfrm>
-          <a:prstGeom prst="rect">
-            <a:avLst/>
-          </a:prstGeom>
-          <a:noFill/>
-        </p:spPr>
-        <p:txBody>
-          <a:bodyPr wrap="square">
-            <a:spAutoFit/>
-          </a:bodyPr>
-          <a:lstStyle/>
-          <a:p>
-            <a:pPr>
-              <a:defRPr sz="1400" b="1">
-                <a:solidFill>
-                  <a:srgbClr val="F472B6"/>
-                </a:solidFill>
-                <a:latin typeface="Segoe UI"/>
-              </a:defRPr>
-            </a:pPr>
-            <a:r>
-              <a:t>4. Smart POS Billing &amp; Khata CRM</a:t>
-            </a:r>
-          </a:p>
-        </p:txBody>
-      </p:sp>
-      <p:sp>
-        <p:nvSpPr>
-          <p:cNvPr id="24" name="TextBox 23"/>
-          <p:cNvSpPr txBox="1"/>
-          <p:nvPr/>
-        </p:nvSpPr>
-        <p:spPr>
-          <a:xfrm>
-            <a:off x="9198864" y="3429000"/>
-            <a:ext cx="2176272" cy="1188720"/>
-          </a:xfrm>
-          <a:prstGeom prst="rect">
-            <a:avLst/>
-          </a:prstGeom>
-          <a:noFill/>
-        </p:spPr>
-        <p:txBody>
-          <a:bodyPr wrap="square">
-            <a:spAutoFit/>
-          </a:bodyPr>
-          <a:lstStyle/>
-          <a:p>
-            <a:pPr>
-              <a:defRPr sz="1100">
-                <a:solidFill>
-                  <a:srgbClr val="94A3B8"/>
-                </a:solidFill>
-                <a:latin typeface="Segoe UI"/>
-              </a:defRPr>
-            </a:pPr>
-            <a:r>
-              <a:t>Full cloud administration dashboard. Barcode scanner billing, GST &amp; non-GST tax invoices, customer Khata credit ledger, and pre-sales leads.</a:t>
-            </a:r>
-          </a:p>
-        </p:txBody>
-      </p:sp>
-      <p:sp>
-        <p:nvSpPr>
-          <p:cNvPr id="25" name="TextBox 24"/>
-          <p:cNvSpPr txBox="1"/>
-          <p:nvPr/>
-        </p:nvSpPr>
-        <p:spPr>
-          <a:xfrm>
-            <a:off x="9198864" y="4709160"/>
-            <a:ext cx="2176272" cy="1097280"/>
-          </a:xfrm>
-          <a:prstGeom prst="rect">
-            <a:avLst/>
-          </a:prstGeom>
-          <a:noFill/>
-        </p:spPr>
-        <p:txBody>
-          <a:bodyPr wrap="square">
-            <a:spAutoFit/>
-          </a:bodyPr>
-          <a:lstStyle/>
-          <a:p>
-            <a:pPr>
-              <a:defRPr sz="1000">
-                <a:solidFill>
-                  <a:srgbClr val="E2E8F0"/>
-                </a:solidFill>
-                <a:latin typeface="Segoe UI"/>
-              </a:defRPr>
-            </a:pPr>
-            <a:r>
-              <a:t>✓ High-speed counter POS checkout</a:t>
-            </a:r>
-          </a:p>
-          <a:p>
-            <a:pPr>
-              <a:defRPr sz="1000">
-                <a:solidFill>
-                  <a:srgbClr val="E2E8F0"/>
-                </a:solidFill>
-                <a:latin typeface="Segoe UI"/>
-              </a:defRPr>
-            </a:pPr>
-            <a:r>
-              <a:t>✓ Customer Khata credit balance ledger</a:t>
-            </a:r>
-          </a:p>
-          <a:p>
-            <a:pPr>
-              <a:defRPr sz="1000">
-                <a:solidFill>
-                  <a:srgbClr val="E2E8F0"/>
-                </a:solidFill>
-                <a:latin typeface="Segoe UI"/>
-              </a:defRPr>
-            </a:pPr>
-            <a:r>
-              <a:t>✓ Role-based anti-theft phone masking</a:t>
+            <a:r>
+              <a:rPr sz="950" b="1">
+                <a:solidFill>
+                  <a:srgbClr val="10B981"/>
+                </a:solidFill>
+                <a:latin typeface="Segoe UI"/>
+                <a:hlinkClick r:id="rId2"/>
+              </a:rPr>
+              <a:t>✅ 100% Customer Ownership &amp; 0% Commission  |  See Live Map Demo ↗</a:t>
             </a:r>
           </a:p>
         </p:txBody>
@@ -5314,7 +4984,7 @@
               </a:defRPr>
             </a:pPr>
             <a:r>
-              <a:t>PROVEN IN PRODUCTION</a:t>
+              <a:t>THE SOLUTION</a:t>
             </a:r>
           </a:p>
         </p:txBody>
@@ -5350,7 +5020,7 @@
               </a:defRPr>
             </a:pPr>
             <a:r>
-              <a:t>Trusted by Real Businesses in Daily Operation</a:t>
+              <a:t>The 4-in-1 Complete Business Engine</a:t>
             </a:r>
           </a:p>
         </p:txBody>
@@ -5386,7 +5056,7 @@
               </a:defRPr>
             </a:pPr>
             <a:r>
-              <a:t>Live merchant implementations across diverse verticals proving 100% operational success.</a:t>
+              <a:t>MicroCRM unites your entire customer journey into one connected, automated ecosystem.</a:t>
             </a:r>
           </a:p>
         </p:txBody>
@@ -5400,7 +5070,643 @@
         <p:spPr>
           <a:xfrm>
             <a:off x="731520" y="1920240"/>
-            <a:ext cx="3456432" cy="4114800"/>
+            <a:ext cx="2542032" cy="4114800"/>
+          </a:xfrm>
+          <a:prstGeom prst="roundRect">
+            <a:avLst/>
+          </a:prstGeom>
+          <a:solidFill>
+            <a:srgbClr val="1E293B"/>
+          </a:solidFill>
+          <a:ln>
+            <a:solidFill>
+              <a:srgbClr val="60A5FA"/>
+            </a:solidFill>
+          </a:ln>
+        </p:spPr>
+        <p:style>
+          <a:lnRef idx="1">
+            <a:schemeClr val="accent1"/>
+          </a:lnRef>
+          <a:fillRef idx="3">
+            <a:schemeClr val="accent1"/>
+          </a:fillRef>
+          <a:effectRef idx="2">
+            <a:schemeClr val="accent1"/>
+          </a:effectRef>
+          <a:fontRef idx="minor">
+            <a:schemeClr val="lt1"/>
+          </a:fontRef>
+        </p:style>
+        <p:txBody>
+          <a:bodyPr rtlCol="0" anchor="ctr"/>
+          <a:lstStyle/>
+          <a:p>
+            <a:pPr algn="ctr"/>
+          </a:p>
+        </p:txBody>
+      </p:sp>
+      <p:sp>
+        <p:nvSpPr>
+          <p:cNvPr id="7" name="TextBox 6"/>
+          <p:cNvSpPr txBox="1"/>
+          <p:nvPr/>
+        </p:nvSpPr>
+        <p:spPr>
+          <a:xfrm>
+            <a:off x="914400" y="2148840"/>
+            <a:ext cx="2176272" cy="457200"/>
+          </a:xfrm>
+          <a:prstGeom prst="rect">
+            <a:avLst/>
+          </a:prstGeom>
+          <a:noFill/>
+        </p:spPr>
+        <p:txBody>
+          <a:bodyPr wrap="none">
+            <a:spAutoFit/>
+          </a:bodyPr>
+          <a:lstStyle/>
+          <a:p>
+            <a:pPr>
+              <a:defRPr sz="2200">
+                <a:latin typeface="Segoe UI"/>
+              </a:defRPr>
+            </a:pPr>
+            <a:r>
+              <a:t>🌐</a:t>
+            </a:r>
+          </a:p>
+        </p:txBody>
+      </p:sp>
+      <p:sp>
+        <p:nvSpPr>
+          <p:cNvPr id="8" name="TextBox 7"/>
+          <p:cNvSpPr txBox="1"/>
+          <p:nvPr/>
+        </p:nvSpPr>
+        <p:spPr>
+          <a:xfrm>
+            <a:off x="914400" y="2697480"/>
+            <a:ext cx="2176272" cy="640080"/>
+          </a:xfrm>
+          <a:prstGeom prst="rect">
+            <a:avLst/>
+          </a:prstGeom>
+          <a:noFill/>
+        </p:spPr>
+        <p:txBody>
+          <a:bodyPr wrap="square">
+            <a:spAutoFit/>
+          </a:bodyPr>
+          <a:lstStyle/>
+          <a:p>
+            <a:pPr>
+              <a:defRPr sz="1400" b="1">
+                <a:solidFill>
+                  <a:srgbClr val="60A5FA"/>
+                </a:solidFill>
+                <a:latin typeface="Segoe UI"/>
+              </a:defRPr>
+            </a:pPr>
+            <a:r>
+              <a:t>1. Google Search &amp; Local SEO</a:t>
+            </a:r>
+          </a:p>
+        </p:txBody>
+      </p:sp>
+      <p:sp>
+        <p:nvSpPr>
+          <p:cNvPr id="9" name="TextBox 8"/>
+          <p:cNvSpPr txBox="1"/>
+          <p:nvPr/>
+        </p:nvSpPr>
+        <p:spPr>
+          <a:xfrm>
+            <a:off x="914400" y="3429000"/>
+            <a:ext cx="2176272" cy="1188720"/>
+          </a:xfrm>
+          <a:prstGeom prst="rect">
+            <a:avLst/>
+          </a:prstGeom>
+          <a:noFill/>
+        </p:spPr>
+        <p:txBody>
+          <a:bodyPr wrap="square">
+            <a:spAutoFit/>
+          </a:bodyPr>
+          <a:lstStyle/>
+          <a:p>
+            <a:pPr>
+              <a:defRPr sz="1100">
+                <a:solidFill>
+                  <a:srgbClr val="94A3B8"/>
+                </a:solidFill>
+                <a:latin typeface="Segoe UI"/>
+              </a:defRPr>
+            </a:pPr>
+            <a:r>
+              <a:t>Dominate local searches on Google Maps &amp; Search. Direct searchers to your branded booking link instead of generic directory listing competitors.</a:t>
+            </a:r>
+          </a:p>
+        </p:txBody>
+      </p:sp>
+      <p:sp>
+        <p:nvSpPr>
+          <p:cNvPr id="10" name="TextBox 9"/>
+          <p:cNvSpPr txBox="1"/>
+          <p:nvPr/>
+        </p:nvSpPr>
+        <p:spPr>
+          <a:xfrm>
+            <a:off x="914400" y="4709160"/>
+            <a:ext cx="2176272" cy="1097280"/>
+          </a:xfrm>
+          <a:prstGeom prst="rect">
+            <a:avLst/>
+          </a:prstGeom>
+          <a:noFill/>
+        </p:spPr>
+        <p:txBody>
+          <a:bodyPr wrap="square">
+            <a:spAutoFit/>
+          </a:bodyPr>
+          <a:lstStyle/>
+          <a:p>
+            <a:pPr>
+              <a:defRPr sz="1000">
+                <a:solidFill>
+                  <a:srgbClr val="E2E8F0"/>
+                </a:solidFill>
+                <a:latin typeface="Segoe UI"/>
+              </a:defRPr>
+            </a:pPr>
+            <a:r>
+              <a:t>✓ Top Google Maps ranking</a:t>
+            </a:r>
+          </a:p>
+          <a:p>
+            <a:pPr>
+              <a:defRPr sz="1000">
+                <a:solidFill>
+                  <a:srgbClr val="E2E8F0"/>
+                </a:solidFill>
+                <a:latin typeface="Segoe UI"/>
+              </a:defRPr>
+            </a:pPr>
+            <a:r>
+              <a:t>✓ Direct reservation/order link</a:t>
+            </a:r>
+          </a:p>
+          <a:p>
+            <a:pPr>
+              <a:defRPr sz="1000">
+                <a:solidFill>
+                  <a:srgbClr val="E2E8F0"/>
+                </a:solidFill>
+                <a:latin typeface="Segoe UI"/>
+              </a:defRPr>
+            </a:pPr>
+            <a:r>
+              <a:t>✓ Instant verified review booster</a:t>
+            </a:r>
+          </a:p>
+        </p:txBody>
+      </p:sp>
+      <p:sp>
+        <p:nvSpPr>
+          <p:cNvPr id="11" name="Rounded Rectangle 10"/>
+          <p:cNvSpPr/>
+          <p:nvPr/>
+        </p:nvSpPr>
+        <p:spPr>
+          <a:xfrm>
+            <a:off x="3493008" y="1920240"/>
+            <a:ext cx="2542032" cy="4114800"/>
+          </a:xfrm>
+          <a:prstGeom prst="roundRect">
+            <a:avLst/>
+          </a:prstGeom>
+          <a:solidFill>
+            <a:srgbClr val="1E293B"/>
+          </a:solidFill>
+          <a:ln>
+            <a:solidFill>
+              <a:srgbClr val="10B981"/>
+            </a:solidFill>
+          </a:ln>
+        </p:spPr>
+        <p:style>
+          <a:lnRef idx="1">
+            <a:schemeClr val="accent1"/>
+          </a:lnRef>
+          <a:fillRef idx="3">
+            <a:schemeClr val="accent1"/>
+          </a:fillRef>
+          <a:effectRef idx="2">
+            <a:schemeClr val="accent1"/>
+          </a:effectRef>
+          <a:fontRef idx="minor">
+            <a:schemeClr val="lt1"/>
+          </a:fontRef>
+        </p:style>
+        <p:txBody>
+          <a:bodyPr rtlCol="0" anchor="ctr"/>
+          <a:lstStyle/>
+          <a:p>
+            <a:pPr algn="ctr"/>
+          </a:p>
+        </p:txBody>
+      </p:sp>
+      <p:sp>
+        <p:nvSpPr>
+          <p:cNvPr id="12" name="TextBox 11"/>
+          <p:cNvSpPr txBox="1"/>
+          <p:nvPr/>
+        </p:nvSpPr>
+        <p:spPr>
+          <a:xfrm>
+            <a:off x="3675888" y="2148840"/>
+            <a:ext cx="2176272" cy="457200"/>
+          </a:xfrm>
+          <a:prstGeom prst="rect">
+            <a:avLst/>
+          </a:prstGeom>
+          <a:noFill/>
+        </p:spPr>
+        <p:txBody>
+          <a:bodyPr wrap="none">
+            <a:spAutoFit/>
+          </a:bodyPr>
+          <a:lstStyle/>
+          <a:p>
+            <a:pPr>
+              <a:defRPr sz="2200">
+                <a:latin typeface="Segoe UI"/>
+              </a:defRPr>
+            </a:pPr>
+            <a:r>
+              <a:t>📱</a:t>
+            </a:r>
+          </a:p>
+        </p:txBody>
+      </p:sp>
+      <p:sp>
+        <p:nvSpPr>
+          <p:cNvPr id="13" name="TextBox 12"/>
+          <p:cNvSpPr txBox="1"/>
+          <p:nvPr/>
+        </p:nvSpPr>
+        <p:spPr>
+          <a:xfrm>
+            <a:off x="3675888" y="2697480"/>
+            <a:ext cx="2176272" cy="640080"/>
+          </a:xfrm>
+          <a:prstGeom prst="rect">
+            <a:avLst/>
+          </a:prstGeom>
+          <a:noFill/>
+        </p:spPr>
+        <p:txBody>
+          <a:bodyPr wrap="square">
+            <a:spAutoFit/>
+          </a:bodyPr>
+          <a:lstStyle/>
+          <a:p>
+            <a:pPr>
+              <a:defRPr sz="1400" b="1">
+                <a:solidFill>
+                  <a:srgbClr val="10B981"/>
+                </a:solidFill>
+                <a:latin typeface="Segoe UI"/>
+              </a:defRPr>
+            </a:pPr>
+            <a:r>
+              <a:t>2. Instant Mobile Storefront</a:t>
+            </a:r>
+          </a:p>
+        </p:txBody>
+      </p:sp>
+      <p:sp>
+        <p:nvSpPr>
+          <p:cNvPr id="14" name="TextBox 13"/>
+          <p:cNvSpPr txBox="1"/>
+          <p:nvPr/>
+        </p:nvSpPr>
+        <p:spPr>
+          <a:xfrm>
+            <a:off x="3675888" y="3429000"/>
+            <a:ext cx="2176272" cy="1188720"/>
+          </a:xfrm>
+          <a:prstGeom prst="rect">
+            <a:avLst/>
+          </a:prstGeom>
+          <a:noFill/>
+        </p:spPr>
+        <p:txBody>
+          <a:bodyPr wrap="square">
+            <a:spAutoFit/>
+          </a:bodyPr>
+          <a:lstStyle/>
+          <a:p>
+            <a:pPr>
+              <a:defRPr sz="1100">
+                <a:solidFill>
+                  <a:srgbClr val="94A3B8"/>
+                </a:solidFill>
+                <a:latin typeface="Segoe UI"/>
+              </a:defRPr>
+            </a:pPr>
+            <a:r>
+              <a:t>Lightning-fast digital catalog at app.microcrm.site/book/{slug}. Zero app downloads. Features interactive layout maps and Instagram Reel video proof.</a:t>
+            </a:r>
+          </a:p>
+        </p:txBody>
+      </p:sp>
+      <p:sp>
+        <p:nvSpPr>
+          <p:cNvPr id="15" name="TextBox 14"/>
+          <p:cNvSpPr txBox="1"/>
+          <p:nvPr/>
+        </p:nvSpPr>
+        <p:spPr>
+          <a:xfrm>
+            <a:off x="3675888" y="4709160"/>
+            <a:ext cx="2176272" cy="1097280"/>
+          </a:xfrm>
+          <a:prstGeom prst="rect">
+            <a:avLst/>
+          </a:prstGeom>
+          <a:noFill/>
+        </p:spPr>
+        <p:txBody>
+          <a:bodyPr wrap="square">
+            <a:spAutoFit/>
+          </a:bodyPr>
+          <a:lstStyle/>
+          <a:p>
+            <a:pPr>
+              <a:defRPr sz="1000">
+                <a:solidFill>
+                  <a:srgbClr val="E2E8F0"/>
+                </a:solidFill>
+                <a:latin typeface="Segoe UI"/>
+              </a:defRPr>
+            </a:pPr>
+            <a:r>
+              <a:t>✓ Instagram Reel video proofs</a:t>
+            </a:r>
+          </a:p>
+          <a:p>
+            <a:pPr>
+              <a:defRPr sz="1000">
+                <a:solidFill>
+                  <a:srgbClr val="E2E8F0"/>
+                </a:solidFill>
+                <a:latin typeface="Segoe UI"/>
+              </a:defRPr>
+            </a:pPr>
+            <a:r>
+              <a:t>✓ Self-service time slot booking</a:t>
+            </a:r>
+          </a:p>
+          <a:p>
+            <a:pPr>
+              <a:defRPr sz="1000">
+                <a:solidFill>
+                  <a:srgbClr val="E2E8F0"/>
+                </a:solidFill>
+                <a:latin typeface="Segoe UI"/>
+              </a:defRPr>
+            </a:pPr>
+            <a:r>
+              <a:t>✓ 1-click WhatsApp cart checkout</a:t>
+            </a:r>
+          </a:p>
+        </p:txBody>
+      </p:sp>
+      <p:sp>
+        <p:nvSpPr>
+          <p:cNvPr id="16" name="Rounded Rectangle 15"/>
+          <p:cNvSpPr/>
+          <p:nvPr/>
+        </p:nvSpPr>
+        <p:spPr>
+          <a:xfrm>
+            <a:off x="6254496" y="1920240"/>
+            <a:ext cx="2542032" cy="4114800"/>
+          </a:xfrm>
+          <a:prstGeom prst="roundRect">
+            <a:avLst/>
+          </a:prstGeom>
+          <a:solidFill>
+            <a:srgbClr val="1E293B"/>
+          </a:solidFill>
+          <a:ln>
+            <a:solidFill>
+              <a:srgbClr val="C084FC"/>
+            </a:solidFill>
+          </a:ln>
+        </p:spPr>
+        <p:style>
+          <a:lnRef idx="1">
+            <a:schemeClr val="accent1"/>
+          </a:lnRef>
+          <a:fillRef idx="3">
+            <a:schemeClr val="accent1"/>
+          </a:fillRef>
+          <a:effectRef idx="2">
+            <a:schemeClr val="accent1"/>
+          </a:effectRef>
+          <a:fontRef idx="minor">
+            <a:schemeClr val="lt1"/>
+          </a:fontRef>
+        </p:style>
+        <p:txBody>
+          <a:bodyPr rtlCol="0" anchor="ctr"/>
+          <a:lstStyle/>
+          <a:p>
+            <a:pPr algn="ctr"/>
+          </a:p>
+        </p:txBody>
+      </p:sp>
+      <p:sp>
+        <p:nvSpPr>
+          <p:cNvPr id="17" name="TextBox 16"/>
+          <p:cNvSpPr txBox="1"/>
+          <p:nvPr/>
+        </p:nvSpPr>
+        <p:spPr>
+          <a:xfrm>
+            <a:off x="6437376" y="2148840"/>
+            <a:ext cx="2176272" cy="457200"/>
+          </a:xfrm>
+          <a:prstGeom prst="rect">
+            <a:avLst/>
+          </a:prstGeom>
+          <a:noFill/>
+        </p:spPr>
+        <p:txBody>
+          <a:bodyPr wrap="none">
+            <a:spAutoFit/>
+          </a:bodyPr>
+          <a:lstStyle/>
+          <a:p>
+            <a:pPr>
+              <a:defRPr sz="2200">
+                <a:latin typeface="Segoe UI"/>
+              </a:defRPr>
+            </a:pPr>
+            <a:r>
+              <a:t>💬</a:t>
+            </a:r>
+          </a:p>
+        </p:txBody>
+      </p:sp>
+      <p:sp>
+        <p:nvSpPr>
+          <p:cNvPr id="18" name="TextBox 17"/>
+          <p:cNvSpPr txBox="1"/>
+          <p:nvPr/>
+        </p:nvSpPr>
+        <p:spPr>
+          <a:xfrm>
+            <a:off x="6437376" y="2697480"/>
+            <a:ext cx="2176272" cy="640080"/>
+          </a:xfrm>
+          <a:prstGeom prst="rect">
+            <a:avLst/>
+          </a:prstGeom>
+          <a:noFill/>
+        </p:spPr>
+        <p:txBody>
+          <a:bodyPr wrap="square">
+            <a:spAutoFit/>
+          </a:bodyPr>
+          <a:lstStyle/>
+          <a:p>
+            <a:pPr>
+              <a:defRPr sz="1400" b="1">
+                <a:solidFill>
+                  <a:srgbClr val="C084FC"/>
+                </a:solidFill>
+                <a:latin typeface="Segoe UI"/>
+              </a:defRPr>
+            </a:pPr>
+            <a:r>
+              <a:t>3. 24/7 WhatsApp AI Receptionist</a:t>
+            </a:r>
+          </a:p>
+        </p:txBody>
+      </p:sp>
+      <p:sp>
+        <p:nvSpPr>
+          <p:cNvPr id="19" name="TextBox 18"/>
+          <p:cNvSpPr txBox="1"/>
+          <p:nvPr/>
+        </p:nvSpPr>
+        <p:spPr>
+          <a:xfrm>
+            <a:off x="6437376" y="3429000"/>
+            <a:ext cx="2176272" cy="1188720"/>
+          </a:xfrm>
+          <a:prstGeom prst="rect">
+            <a:avLst/>
+          </a:prstGeom>
+          <a:noFill/>
+        </p:spPr>
+        <p:txBody>
+          <a:bodyPr wrap="square">
+            <a:spAutoFit/>
+          </a:bodyPr>
+          <a:lstStyle/>
+          <a:p>
+            <a:pPr>
+              <a:defRPr sz="1100">
+                <a:solidFill>
+                  <a:srgbClr val="94A3B8"/>
+                </a:solidFill>
+                <a:latin typeface="Segoe UI"/>
+              </a:defRPr>
+            </a:pPr>
+            <a:r>
+              <a:t>Answers customer questions in Hindi/Hinglish/English instantly. Dispatches PDF brochures, automated bills, and appointment reminders.</a:t>
+            </a:r>
+          </a:p>
+        </p:txBody>
+      </p:sp>
+      <p:sp>
+        <p:nvSpPr>
+          <p:cNvPr id="20" name="TextBox 19"/>
+          <p:cNvSpPr txBox="1"/>
+          <p:nvPr/>
+        </p:nvSpPr>
+        <p:spPr>
+          <a:xfrm>
+            <a:off x="6437376" y="4709160"/>
+            <a:ext cx="2176272" cy="1097280"/>
+          </a:xfrm>
+          <a:prstGeom prst="rect">
+            <a:avLst/>
+          </a:prstGeom>
+          <a:noFill/>
+        </p:spPr>
+        <p:txBody>
+          <a:bodyPr wrap="square">
+            <a:spAutoFit/>
+          </a:bodyPr>
+          <a:lstStyle/>
+          <a:p>
+            <a:pPr>
+              <a:defRPr sz="1000">
+                <a:solidFill>
+                  <a:srgbClr val="E2E8F0"/>
+                </a:solidFill>
+                <a:latin typeface="Segoe UI"/>
+              </a:defRPr>
+            </a:pPr>
+            <a:r>
+              <a:t>✓ Speaks natural Indian phrasing</a:t>
+            </a:r>
+          </a:p>
+          <a:p>
+            <a:pPr>
+              <a:defRPr sz="1000">
+                <a:solidFill>
+                  <a:srgbClr val="E2E8F0"/>
+                </a:solidFill>
+                <a:latin typeface="Segoe UI"/>
+              </a:defRPr>
+            </a:pPr>
+            <a:r>
+              <a:t>✓ Dispatches PDF receipts &amp; brochures</a:t>
+            </a:r>
+          </a:p>
+          <a:p>
+            <a:pPr>
+              <a:defRPr sz="1000">
+                <a:solidFill>
+                  <a:srgbClr val="E2E8F0"/>
+                </a:solidFill>
+                <a:latin typeface="Segoe UI"/>
+              </a:defRPr>
+            </a:pPr>
+            <a:r>
+              <a:t>✓ 70% reduction in no-shows</a:t>
+            </a:r>
+          </a:p>
+        </p:txBody>
+      </p:sp>
+      <p:sp>
+        <p:nvSpPr>
+          <p:cNvPr id="21" name="Rounded Rectangle 20"/>
+          <p:cNvSpPr/>
+          <p:nvPr/>
+        </p:nvSpPr>
+        <p:spPr>
+          <a:xfrm>
+            <a:off x="9015984" y="1920240"/>
+            <a:ext cx="2542032" cy="4114800"/>
           </a:xfrm>
           <a:prstGeom prst="roundRect">
             <a:avLst/>
@@ -5438,14 +5744,14 @@
       </p:sp>
       <p:sp>
         <p:nvSpPr>
-          <p:cNvPr id="7" name="TextBox 6"/>
+          <p:cNvPr id="22" name="TextBox 21"/>
           <p:cNvSpPr txBox="1"/>
           <p:nvPr/>
         </p:nvSpPr>
         <p:spPr>
           <a:xfrm>
-            <a:off x="960120" y="2103120"/>
-            <a:ext cx="2999232" cy="411480"/>
+            <a:off x="9198864" y="2148840"/>
+            <a:ext cx="2176272" cy="457200"/>
           </a:xfrm>
           <a:prstGeom prst="rect">
             <a:avLst/>
@@ -5459,100 +5765,26 @@
           <a:lstStyle/>
           <a:p>
             <a:pPr>
-              <a:defRPr sz="1600" b="1">
-                <a:solidFill>
-                  <a:srgbClr val="F472B6"/>
-                </a:solidFill>
-                <a:latin typeface="Segoe UI"/>
-              </a:defRPr>
-            </a:pPr>
-            <a:r>
-              <a:t>💄  Rashmi R Makeup</a:t>
-            </a:r>
-          </a:p>
-        </p:txBody>
-      </p:sp>
-      <p:sp>
-        <p:nvSpPr>
-          <p:cNvPr id="8" name="TextBox 7"/>
+              <a:defRPr sz="2200">
+                <a:latin typeface="Segoe UI"/>
+              </a:defRPr>
+            </a:pPr>
+            <a:r>
+              <a:t>💳</a:t>
+            </a:r>
+          </a:p>
+        </p:txBody>
+      </p:sp>
+      <p:sp>
+        <p:nvSpPr>
+          <p:cNvPr id="23" name="TextBox 22"/>
           <p:cNvSpPr txBox="1"/>
           <p:nvPr/>
         </p:nvSpPr>
         <p:spPr>
           <a:xfrm>
-            <a:off x="960120" y="2542032"/>
-            <a:ext cx="2999232" cy="320040"/>
-          </a:xfrm>
-          <a:prstGeom prst="rect">
-            <a:avLst/>
-          </a:prstGeom>
-          <a:noFill/>
-        </p:spPr>
-        <p:txBody>
-          <a:bodyPr wrap="none">
-            <a:spAutoFit/>
-          </a:bodyPr>
-          <a:lstStyle/>
-          <a:p>
-            <a:pPr>
-              <a:defRPr sz="1100" b="1">
-                <a:solidFill>
-                  <a:srgbClr val="FFFFFF"/>
-                </a:solidFill>
-                <a:latin typeface="Segoe UI"/>
-              </a:defRPr>
-            </a:pPr>
-            <a:r>
-              <a:t>Salon, Bridal Studio &amp; Academy</a:t>
-            </a:r>
-          </a:p>
-        </p:txBody>
-      </p:sp>
-      <p:sp>
-        <p:nvSpPr>
-          <p:cNvPr id="9" name="TextBox 8"/>
-          <p:cNvSpPr txBox="1"/>
-          <p:nvPr/>
-        </p:nvSpPr>
-        <p:spPr>
-          <a:xfrm>
-            <a:off x="960120" y="2852928"/>
-            <a:ext cx="2999232" cy="320040"/>
-          </a:xfrm>
-          <a:prstGeom prst="rect">
-            <a:avLst/>
-          </a:prstGeom>
-          <a:noFill/>
-        </p:spPr>
-        <p:txBody>
-          <a:bodyPr wrap="none">
-            <a:spAutoFit/>
-          </a:bodyPr>
-          <a:lstStyle/>
-          <a:p>
-            <a:r>
-              <a:rPr sz="950" b="1" u="sng">
-                <a:solidFill>
-                  <a:srgbClr val="60A5FA"/>
-                </a:solidFill>
-                <a:latin typeface="Segoe UI"/>
-                <a:hlinkClick r:id="rId2"/>
-              </a:rPr>
-              <a:t>🔗 app.microcrm.site/book/rashmi-r-makeup</a:t>
-            </a:r>
-          </a:p>
-        </p:txBody>
-      </p:sp>
-      <p:sp>
-        <p:nvSpPr>
-          <p:cNvPr id="10" name="TextBox 9"/>
-          <p:cNvSpPr txBox="1"/>
-          <p:nvPr/>
-        </p:nvSpPr>
-        <p:spPr>
-          <a:xfrm>
-            <a:off x="960120" y="3218688"/>
-            <a:ext cx="2999232" cy="2148840"/>
+            <a:off x="9198864" y="2697480"/>
+            <a:ext cx="2176272" cy="640080"/>
           </a:xfrm>
           <a:prstGeom prst="rect">
             <a:avLst/>
@@ -5566,271 +5798,29 @@
           <a:lstStyle/>
           <a:p>
             <a:pPr>
-              <a:spcAft>
-                <a:spcPts val="600"/>
-              </a:spcAft>
-              <a:defRPr sz="1050">
-                <a:solidFill>
-                  <a:srgbClr val="E2E8F0"/>
-                </a:solidFill>
-                <a:latin typeface="Segoe UI"/>
-              </a:defRPr>
-            </a:pPr>
-            <a:r>
-              <a:t>Challenge: Heavy phone distractions during bridal makeup; frequent customer no-shows.</a:t>
-            </a:r>
-          </a:p>
-          <a:p>
-            <a:pPr>
-              <a:spcAft>
-                <a:spcPts val="600"/>
-              </a:spcAft>
-              <a:defRPr sz="1050">
-                <a:solidFill>
-                  <a:srgbClr val="E2E8F0"/>
-                </a:solidFill>
-                <a:latin typeface="Segoe UI"/>
-              </a:defRPr>
-            </a:pPr>
-            <a:r>
-              <a:t>Solution: Branded mobile portal with embedded Instagram Reel video proofs of makeover transformations.</a:t>
-            </a:r>
-          </a:p>
-          <a:p>
-            <a:pPr>
-              <a:spcAft>
-                <a:spcPts val="600"/>
-              </a:spcAft>
-              <a:defRPr sz="1050">
-                <a:solidFill>
-                  <a:srgbClr val="E2E8F0"/>
-                </a:solidFill>
-                <a:latin typeface="Segoe UI"/>
-              </a:defRPr>
-            </a:pPr>
-            <a:r>
-              <a:t>Result: 100% self-service booking with automated 24-hour WhatsApp reminder messages.</a:t>
-            </a:r>
-          </a:p>
-        </p:txBody>
-      </p:sp>
-      <p:sp>
-        <p:nvSpPr>
-          <p:cNvPr id="11" name="Rounded Rectangle 10"/>
-          <p:cNvSpPr/>
-          <p:nvPr/>
-        </p:nvSpPr>
-        <p:spPr>
-          <a:xfrm>
-            <a:off x="960120" y="5468112"/>
-            <a:ext cx="2999232" cy="384048"/>
-          </a:xfrm>
-          <a:prstGeom prst="roundRect">
-            <a:avLst/>
-          </a:prstGeom>
-          <a:solidFill>
-            <a:srgbClr val="111827"/>
-          </a:solidFill>
-          <a:ln>
-            <a:solidFill>
-              <a:srgbClr val="F472B6"/>
-            </a:solidFill>
-          </a:ln>
-        </p:spPr>
-        <p:style>
-          <a:lnRef idx="1">
-            <a:schemeClr val="accent1"/>
-          </a:lnRef>
-          <a:fillRef idx="3">
-            <a:schemeClr val="accent1"/>
-          </a:fillRef>
-          <a:effectRef idx="2">
-            <a:schemeClr val="accent1"/>
-          </a:effectRef>
-          <a:fontRef idx="minor">
-            <a:schemeClr val="lt1"/>
-          </a:fontRef>
-        </p:style>
-        <p:txBody>
-          <a:bodyPr rtlCol="0" anchor="ctr"/>
-          <a:lstStyle/>
-          <a:p>
-            <a:pPr algn="ctr"/>
-            <a:r>
-              <a:rPr sz="1000" b="1">
+              <a:defRPr sz="1400" b="1">
                 <a:solidFill>
                   <a:srgbClr val="F472B6"/>
                 </a:solidFill>
                 <a:latin typeface="Segoe UI"/>
-                <a:hlinkClick r:id="rId2"/>
-              </a:rPr>
-              <a:t>Open Live Client Portal ↗</a:t>
-            </a:r>
-          </a:p>
-        </p:txBody>
-      </p:sp>
-      <p:sp>
-        <p:nvSpPr>
-          <p:cNvPr id="12" name="Rounded Rectangle 11"/>
-          <p:cNvSpPr/>
-          <p:nvPr/>
-        </p:nvSpPr>
-        <p:spPr>
-          <a:xfrm>
-            <a:off x="4462272" y="1920240"/>
-            <a:ext cx="3456432" cy="4114800"/>
-          </a:xfrm>
-          <a:prstGeom prst="roundRect">
-            <a:avLst/>
-          </a:prstGeom>
-          <a:solidFill>
-            <a:srgbClr val="1E293B"/>
-          </a:solidFill>
-          <a:ln>
-            <a:solidFill>
-              <a:srgbClr val="60A5FA"/>
-            </a:solidFill>
-          </a:ln>
-        </p:spPr>
-        <p:style>
-          <a:lnRef idx="1">
-            <a:schemeClr val="accent1"/>
-          </a:lnRef>
-          <a:fillRef idx="3">
-            <a:schemeClr val="accent1"/>
-          </a:fillRef>
-          <a:effectRef idx="2">
-            <a:schemeClr val="accent1"/>
-          </a:effectRef>
-          <a:fontRef idx="minor">
-            <a:schemeClr val="lt1"/>
-          </a:fontRef>
-        </p:style>
-        <p:txBody>
-          <a:bodyPr rtlCol="0" anchor="ctr"/>
-          <a:lstStyle/>
-          <a:p>
-            <a:pPr algn="ctr"/>
-          </a:p>
-        </p:txBody>
-      </p:sp>
-      <p:sp>
-        <p:nvSpPr>
-          <p:cNvPr id="13" name="TextBox 12"/>
+              </a:defRPr>
+            </a:pPr>
+            <a:r>
+              <a:t>4. Smart POS Billing &amp; Khata CRM</a:t>
+            </a:r>
+          </a:p>
+        </p:txBody>
+      </p:sp>
+      <p:sp>
+        <p:nvSpPr>
+          <p:cNvPr id="24" name="TextBox 23"/>
           <p:cNvSpPr txBox="1"/>
           <p:nvPr/>
         </p:nvSpPr>
         <p:spPr>
           <a:xfrm>
-            <a:off x="4690872" y="2103120"/>
-            <a:ext cx="2999232" cy="411480"/>
-          </a:xfrm>
-          <a:prstGeom prst="rect">
-            <a:avLst/>
-          </a:prstGeom>
-          <a:noFill/>
-        </p:spPr>
-        <p:txBody>
-          <a:bodyPr wrap="none">
-            <a:spAutoFit/>
-          </a:bodyPr>
-          <a:lstStyle/>
-          <a:p>
-            <a:pPr>
-              <a:defRPr sz="1600" b="1">
-                <a:solidFill>
-                  <a:srgbClr val="60A5FA"/>
-                </a:solidFill>
-                <a:latin typeface="Segoe UI"/>
-              </a:defRPr>
-            </a:pPr>
-            <a:r>
-              <a:t>💻  Shri Ranawat Infotech</a:t>
-            </a:r>
-          </a:p>
-        </p:txBody>
-      </p:sp>
-      <p:sp>
-        <p:nvSpPr>
-          <p:cNvPr id="14" name="TextBox 13"/>
-          <p:cNvSpPr txBox="1"/>
-          <p:nvPr/>
-        </p:nvSpPr>
-        <p:spPr>
-          <a:xfrm>
-            <a:off x="4690872" y="2542032"/>
-            <a:ext cx="2999232" cy="320040"/>
-          </a:xfrm>
-          <a:prstGeom prst="rect">
-            <a:avLst/>
-          </a:prstGeom>
-          <a:noFill/>
-        </p:spPr>
-        <p:txBody>
-          <a:bodyPr wrap="none">
-            <a:spAutoFit/>
-          </a:bodyPr>
-          <a:lstStyle/>
-          <a:p>
-            <a:pPr>
-              <a:defRPr sz="1100" b="1">
-                <a:solidFill>
-                  <a:srgbClr val="FFFFFF"/>
-                </a:solidFill>
-                <a:latin typeface="Segoe UI"/>
-              </a:defRPr>
-            </a:pPr>
-            <a:r>
-              <a:t>Computer Store &amp; Tech Repair Center</a:t>
-            </a:r>
-          </a:p>
-        </p:txBody>
-      </p:sp>
-      <p:sp>
-        <p:nvSpPr>
-          <p:cNvPr id="15" name="TextBox 14"/>
-          <p:cNvSpPr txBox="1"/>
-          <p:nvPr/>
-        </p:nvSpPr>
-        <p:spPr>
-          <a:xfrm>
-            <a:off x="4690872" y="2852928"/>
-            <a:ext cx="2999232" cy="320040"/>
-          </a:xfrm>
-          <a:prstGeom prst="rect">
-            <a:avLst/>
-          </a:prstGeom>
-          <a:noFill/>
-        </p:spPr>
-        <p:txBody>
-          <a:bodyPr wrap="none">
-            <a:spAutoFit/>
-          </a:bodyPr>
-          <a:lstStyle/>
-          <a:p>
-            <a:r>
-              <a:rPr sz="950" b="1" u="sng">
-                <a:solidFill>
-                  <a:srgbClr val="60A5FA"/>
-                </a:solidFill>
-                <a:latin typeface="Segoe UI"/>
-                <a:hlinkClick r:id="rId3"/>
-              </a:rPr>
-              <a:t>🔗 app.microcrm.site/book/shri-ranawat-infotech</a:t>
-            </a:r>
-          </a:p>
-        </p:txBody>
-      </p:sp>
-      <p:sp>
-        <p:nvSpPr>
-          <p:cNvPr id="16" name="TextBox 15"/>
-          <p:cNvSpPr txBox="1"/>
-          <p:nvPr/>
-        </p:nvSpPr>
-        <p:spPr>
-          <a:xfrm>
-            <a:off x="4690872" y="3218688"/>
-            <a:ext cx="2999232" cy="2148840"/>
+            <a:off x="9198864" y="3429000"/>
+            <a:ext cx="2176272" cy="1188720"/>
           </a:xfrm>
           <a:prstGeom prst="rect">
             <a:avLst/>
@@ -5844,271 +5834,29 @@
           <a:lstStyle/>
           <a:p>
             <a:pPr>
-              <a:spcAft>
-                <a:spcPts val="600"/>
-              </a:spcAft>
-              <a:defRPr sz="1050">
-                <a:solidFill>
-                  <a:srgbClr val="E2E8F0"/>
-                </a:solidFill>
-                <a:latin typeface="Segoe UI"/>
-              </a:defRPr>
-            </a:pPr>
-            <a:r>
-              <a:t>Challenge: Constant calls asking 'Is my laptop ready?'; lost tracking of hardware spare parts.</a:t>
-            </a:r>
-          </a:p>
-          <a:p>
-            <a:pPr>
-              <a:spcAft>
-                <a:spcPts val="600"/>
-              </a:spcAft>
-              <a:defRPr sz="1050">
-                <a:solidFill>
-                  <a:srgbClr val="E2E8F0"/>
-                </a:solidFill>
-                <a:latin typeface="Segoe UI"/>
-              </a:defRPr>
-            </a:pPr>
-            <a:r>
-              <a:t>Solution: Job-card diagnostic tiers + real-time stock deduction + automated ready alerts.</a:t>
-            </a:r>
-          </a:p>
-          <a:p>
-            <a:pPr>
-              <a:spcAft>
-                <a:spcPts val="600"/>
-              </a:spcAft>
-              <a:defRPr sz="1050">
-                <a:solidFill>
-                  <a:srgbClr val="E2E8F0"/>
-                </a:solidFill>
-                <a:latin typeface="Segoe UI"/>
-              </a:defRPr>
-            </a:pPr>
-            <a:r>
-              <a:t>Result: Customers receive instant WhatsApp message when device is fixed with attached GST bill.</a:t>
-            </a:r>
-          </a:p>
-        </p:txBody>
-      </p:sp>
-      <p:sp>
-        <p:nvSpPr>
-          <p:cNvPr id="17" name="Rounded Rectangle 16"/>
-          <p:cNvSpPr/>
-          <p:nvPr/>
-        </p:nvSpPr>
-        <p:spPr>
-          <a:xfrm>
-            <a:off x="4690872" y="5468112"/>
-            <a:ext cx="2999232" cy="384048"/>
-          </a:xfrm>
-          <a:prstGeom prst="roundRect">
-            <a:avLst/>
-          </a:prstGeom>
-          <a:solidFill>
-            <a:srgbClr val="111827"/>
-          </a:solidFill>
-          <a:ln>
-            <a:solidFill>
-              <a:srgbClr val="60A5FA"/>
-            </a:solidFill>
-          </a:ln>
-        </p:spPr>
-        <p:style>
-          <a:lnRef idx="1">
-            <a:schemeClr val="accent1"/>
-          </a:lnRef>
-          <a:fillRef idx="3">
-            <a:schemeClr val="accent1"/>
-          </a:fillRef>
-          <a:effectRef idx="2">
-            <a:schemeClr val="accent1"/>
-          </a:effectRef>
-          <a:fontRef idx="minor">
-            <a:schemeClr val="lt1"/>
-          </a:fontRef>
-        </p:style>
-        <p:txBody>
-          <a:bodyPr rtlCol="0" anchor="ctr"/>
-          <a:lstStyle/>
-          <a:p>
-            <a:pPr algn="ctr"/>
-            <a:r>
-              <a:rPr sz="1000" b="1">
-                <a:solidFill>
-                  <a:srgbClr val="60A5FA"/>
-                </a:solidFill>
-                <a:latin typeface="Segoe UI"/>
-                <a:hlinkClick r:id="rId3"/>
-              </a:rPr>
-              <a:t>Open Live Client Portal ↗</a:t>
-            </a:r>
-          </a:p>
-        </p:txBody>
-      </p:sp>
-      <p:sp>
-        <p:nvSpPr>
-          <p:cNvPr id="18" name="Rounded Rectangle 17"/>
-          <p:cNvSpPr/>
-          <p:nvPr/>
-        </p:nvSpPr>
-        <p:spPr>
-          <a:xfrm>
-            <a:off x="8193024" y="1920240"/>
-            <a:ext cx="3456432" cy="4114800"/>
-          </a:xfrm>
-          <a:prstGeom prst="roundRect">
-            <a:avLst/>
-          </a:prstGeom>
-          <a:solidFill>
-            <a:srgbClr val="1E293B"/>
-          </a:solidFill>
-          <a:ln>
-            <a:solidFill>
-              <a:srgbClr val="10B981"/>
-            </a:solidFill>
-          </a:ln>
-        </p:spPr>
-        <p:style>
-          <a:lnRef idx="1">
-            <a:schemeClr val="accent1"/>
-          </a:lnRef>
-          <a:fillRef idx="3">
-            <a:schemeClr val="accent1"/>
-          </a:fillRef>
-          <a:effectRef idx="2">
-            <a:schemeClr val="accent1"/>
-          </a:effectRef>
-          <a:fontRef idx="minor">
-            <a:schemeClr val="lt1"/>
-          </a:fontRef>
-        </p:style>
-        <p:txBody>
-          <a:bodyPr rtlCol="0" anchor="ctr"/>
-          <a:lstStyle/>
-          <a:p>
-            <a:pPr algn="ctr"/>
-          </a:p>
-        </p:txBody>
-      </p:sp>
-      <p:sp>
-        <p:nvSpPr>
-          <p:cNvPr id="19" name="TextBox 18"/>
+              <a:defRPr sz="1100">
+                <a:solidFill>
+                  <a:srgbClr val="94A3B8"/>
+                </a:solidFill>
+                <a:latin typeface="Segoe UI"/>
+              </a:defRPr>
+            </a:pPr>
+            <a:r>
+              <a:t>Full cloud administration dashboard. Barcode scanner billing, GST &amp; non-GST tax invoices, customer Khata credit ledger, and pre-sales leads.</a:t>
+            </a:r>
+          </a:p>
+        </p:txBody>
+      </p:sp>
+      <p:sp>
+        <p:nvSpPr>
+          <p:cNvPr id="25" name="TextBox 24"/>
           <p:cNvSpPr txBox="1"/>
           <p:nvPr/>
         </p:nvSpPr>
         <p:spPr>
           <a:xfrm>
-            <a:off x="8421624" y="2103120"/>
-            <a:ext cx="2999232" cy="411480"/>
-          </a:xfrm>
-          <a:prstGeom prst="rect">
-            <a:avLst/>
-          </a:prstGeom>
-          <a:noFill/>
-        </p:spPr>
-        <p:txBody>
-          <a:bodyPr wrap="none">
-            <a:spAutoFit/>
-          </a:bodyPr>
-          <a:lstStyle/>
-          <a:p>
-            <a:pPr>
-              <a:defRPr sz="1600" b="1">
-                <a:solidFill>
-                  <a:srgbClr val="10B981"/>
-                </a:solidFill>
-                <a:latin typeface="Segoe UI"/>
-              </a:defRPr>
-            </a:pPr>
-            <a:r>
-              <a:t>🏘️  BBC Real Estate (Aahana Residency)</a:t>
-            </a:r>
-          </a:p>
-        </p:txBody>
-      </p:sp>
-      <p:sp>
-        <p:nvSpPr>
-          <p:cNvPr id="20" name="TextBox 19"/>
-          <p:cNvSpPr txBox="1"/>
-          <p:nvPr/>
-        </p:nvSpPr>
-        <p:spPr>
-          <a:xfrm>
-            <a:off x="8421624" y="2542032"/>
-            <a:ext cx="2999232" cy="320040"/>
-          </a:xfrm>
-          <a:prstGeom prst="rect">
-            <a:avLst/>
-          </a:prstGeom>
-          <a:noFill/>
-        </p:spPr>
-        <p:txBody>
-          <a:bodyPr wrap="none">
-            <a:spAutoFit/>
-          </a:bodyPr>
-          <a:lstStyle/>
-          <a:p>
-            <a:pPr>
-              <a:defRPr sz="1100" b="1">
-                <a:solidFill>
-                  <a:srgbClr val="FFFFFF"/>
-                </a:solidFill>
-                <a:latin typeface="Segoe UI"/>
-              </a:defRPr>
-            </a:pPr>
-            <a:r>
-              <a:t>Township Developer &amp; Pre-Sales CRM</a:t>
-            </a:r>
-          </a:p>
-        </p:txBody>
-      </p:sp>
-      <p:sp>
-        <p:nvSpPr>
-          <p:cNvPr id="21" name="TextBox 20"/>
-          <p:cNvSpPr txBox="1"/>
-          <p:nvPr/>
-        </p:nvSpPr>
-        <p:spPr>
-          <a:xfrm>
-            <a:off x="8421624" y="2852928"/>
-            <a:ext cx="2999232" cy="320040"/>
-          </a:xfrm>
-          <a:prstGeom prst="rect">
-            <a:avLst/>
-          </a:prstGeom>
-          <a:noFill/>
-        </p:spPr>
-        <p:txBody>
-          <a:bodyPr wrap="none">
-            <a:spAutoFit/>
-          </a:bodyPr>
-          <a:lstStyle/>
-          <a:p>
-            <a:r>
-              <a:rPr sz="950" b="1" u="sng">
-                <a:solidFill>
-                  <a:srgbClr val="60A5FA"/>
-                </a:solidFill>
-                <a:latin typeface="Segoe UI"/>
-                <a:hlinkClick r:id="rId4"/>
-              </a:rPr>
-              <a:t>🔗 app.microcrm.site/book/bbc</a:t>
-            </a:r>
-          </a:p>
-        </p:txBody>
-      </p:sp>
-      <p:sp>
-        <p:nvSpPr>
-          <p:cNvPr id="22" name="TextBox 21"/>
-          <p:cNvSpPr txBox="1"/>
-          <p:nvPr/>
-        </p:nvSpPr>
-        <p:spPr>
-          <a:xfrm>
-            <a:off x="8421624" y="3218688"/>
-            <a:ext cx="2999232" cy="2148840"/>
+            <a:off x="9198864" y="4709160"/>
+            <a:ext cx="2176272" cy="1097280"/>
           </a:xfrm>
           <a:prstGeom prst="rect">
             <a:avLst/>
@@ -6122,10 +5870,7 @@
           <a:lstStyle/>
           <a:p>
             <a:pPr>
-              <a:spcAft>
-                <a:spcPts val="600"/>
-              </a:spcAft>
-              <a:defRPr sz="1050">
+              <a:defRPr sz="1000">
                 <a:solidFill>
                   <a:srgbClr val="E2E8F0"/>
                 </a:solidFill>
@@ -6133,15 +5878,12 @@
               </a:defRPr>
             </a:pPr>
             <a:r>
-              <a:t>Challenge: Static PDF maps confused buyers; Meta ad leads went cold within hours.</a:t>
-            </a:r>
-          </a:p>
-          <a:p>
-            <a:pPr>
-              <a:spcAft>
-                <a:spcPts val="600"/>
-              </a:spcAft>
-              <a:defRPr sz="1050">
+              <a:t>✓ High-speed counter POS checkout</a:t>
+            </a:r>
+          </a:p>
+          <a:p>
+            <a:pPr>
+              <a:defRPr sz="1000">
                 <a:solidFill>
                   <a:srgbClr val="E2E8F0"/>
                 </a:solidFill>
@@ -6149,15 +5891,12 @@
               </a:defRPr>
             </a:pPr>
             <a:r>
-              <a:t>Solution: Live interactive canvas plot maps (Available vs Sold) + WhatsApp AI brochure bot.</a:t>
-            </a:r>
-          </a:p>
-          <a:p>
-            <a:pPr>
-              <a:spcAft>
-                <a:spcPts val="600"/>
-              </a:spcAft>
-              <a:defRPr sz="1050">
+              <a:t>✓ Customer Khata credit balance ledger</a:t>
+            </a:r>
+          </a:p>
+          <a:p>
+            <a:pPr>
+              <a:defRPr sz="1000">
                 <a:solidFill>
                   <a:srgbClr val="E2E8F0"/>
                 </a:solidFill>
@@ -6165,62 +5904,7 @@
               </a:defRPr>
             </a:pPr>
             <a:r>
-              <a:t>Result: Inbound ad leads get automated brochure in 2 minutes; 392% higher site visit conversion.</a:t>
-            </a:r>
-          </a:p>
-        </p:txBody>
-      </p:sp>
-      <p:sp>
-        <p:nvSpPr>
-          <p:cNvPr id="23" name="Rounded Rectangle 22"/>
-          <p:cNvSpPr/>
-          <p:nvPr/>
-        </p:nvSpPr>
-        <p:spPr>
-          <a:xfrm>
-            <a:off x="8421624" y="5468112"/>
-            <a:ext cx="2999232" cy="384048"/>
-          </a:xfrm>
-          <a:prstGeom prst="roundRect">
-            <a:avLst/>
-          </a:prstGeom>
-          <a:solidFill>
-            <a:srgbClr val="111827"/>
-          </a:solidFill>
-          <a:ln>
-            <a:solidFill>
-              <a:srgbClr val="10B981"/>
-            </a:solidFill>
-          </a:ln>
-        </p:spPr>
-        <p:style>
-          <a:lnRef idx="1">
-            <a:schemeClr val="accent1"/>
-          </a:lnRef>
-          <a:fillRef idx="3">
-            <a:schemeClr val="accent1"/>
-          </a:fillRef>
-          <a:effectRef idx="2">
-            <a:schemeClr val="accent1"/>
-          </a:effectRef>
-          <a:fontRef idx="minor">
-            <a:schemeClr val="lt1"/>
-          </a:fontRef>
-        </p:style>
-        <p:txBody>
-          <a:bodyPr rtlCol="0" anchor="ctr"/>
-          <a:lstStyle/>
-          <a:p>
-            <a:pPr algn="ctr"/>
-            <a:r>
-              <a:rPr sz="1000" b="1">
-                <a:solidFill>
-                  <a:srgbClr val="10B981"/>
-                </a:solidFill>
-                <a:latin typeface="Segoe UI"/>
-                <a:hlinkClick r:id="rId4"/>
-              </a:rPr>
-              <a:t>Open Live Client Portal ↗</a:t>
+              <a:t>✓ Role-based anti-theft phone masking</a:t>
             </a:r>
           </a:p>
         </p:txBody>
@@ -6338,7 +6022,7 @@
               </a:defRPr>
             </a:pPr>
             <a:r>
-              <a:t>WHATSAPP AI AUTOMATION</a:t>
+              <a:t>PROVEN IN PRODUCTION</a:t>
             </a:r>
           </a:p>
         </p:txBody>
@@ -6374,7 +6058,7 @@
               </a:defRPr>
             </a:pPr>
             <a:r>
-              <a:t>Conversational 24/7 AI Receptionist</a:t>
+              <a:t>Trusted by Real Businesses in Daily Operation</a:t>
             </a:r>
           </a:p>
         </p:txBody>
@@ -6410,7 +6094,7 @@
               </a:defRPr>
             </a:pPr>
             <a:r>
-              <a:t>Turn your existing WhatsApp number into a tireless sales agent without per-message API fees.</a:t>
+              <a:t>Live merchant implementations across diverse verticals proving 100% operational success.</a:t>
             </a:r>
           </a:p>
         </p:txBody>
@@ -6424,7 +6108,563 @@
         <p:spPr>
           <a:xfrm>
             <a:off x="731520" y="1920240"/>
-            <a:ext cx="5303520" cy="4114800"/>
+            <a:ext cx="3456432" cy="4114800"/>
+          </a:xfrm>
+          <a:prstGeom prst="roundRect">
+            <a:avLst/>
+          </a:prstGeom>
+          <a:solidFill>
+            <a:srgbClr val="1E293B"/>
+          </a:solidFill>
+          <a:ln>
+            <a:solidFill>
+              <a:srgbClr val="F472B6"/>
+            </a:solidFill>
+          </a:ln>
+        </p:spPr>
+        <p:style>
+          <a:lnRef idx="1">
+            <a:schemeClr val="accent1"/>
+          </a:lnRef>
+          <a:fillRef idx="3">
+            <a:schemeClr val="accent1"/>
+          </a:fillRef>
+          <a:effectRef idx="2">
+            <a:schemeClr val="accent1"/>
+          </a:effectRef>
+          <a:fontRef idx="minor">
+            <a:schemeClr val="lt1"/>
+          </a:fontRef>
+        </p:style>
+        <p:txBody>
+          <a:bodyPr rtlCol="0" anchor="ctr"/>
+          <a:lstStyle/>
+          <a:p>
+            <a:pPr algn="ctr"/>
+          </a:p>
+        </p:txBody>
+      </p:sp>
+      <p:sp>
+        <p:nvSpPr>
+          <p:cNvPr id="7" name="TextBox 6"/>
+          <p:cNvSpPr txBox="1"/>
+          <p:nvPr/>
+        </p:nvSpPr>
+        <p:spPr>
+          <a:xfrm>
+            <a:off x="960120" y="2103120"/>
+            <a:ext cx="2999232" cy="411480"/>
+          </a:xfrm>
+          <a:prstGeom prst="rect">
+            <a:avLst/>
+          </a:prstGeom>
+          <a:noFill/>
+        </p:spPr>
+        <p:txBody>
+          <a:bodyPr wrap="none">
+            <a:spAutoFit/>
+          </a:bodyPr>
+          <a:lstStyle/>
+          <a:p>
+            <a:pPr>
+              <a:defRPr sz="1600" b="1">
+                <a:solidFill>
+                  <a:srgbClr val="F472B6"/>
+                </a:solidFill>
+                <a:latin typeface="Segoe UI"/>
+              </a:defRPr>
+            </a:pPr>
+            <a:r>
+              <a:t>💄  Rashmi R Makeup</a:t>
+            </a:r>
+          </a:p>
+        </p:txBody>
+      </p:sp>
+      <p:sp>
+        <p:nvSpPr>
+          <p:cNvPr id="8" name="TextBox 7"/>
+          <p:cNvSpPr txBox="1"/>
+          <p:nvPr/>
+        </p:nvSpPr>
+        <p:spPr>
+          <a:xfrm>
+            <a:off x="960120" y="2542032"/>
+            <a:ext cx="2999232" cy="320040"/>
+          </a:xfrm>
+          <a:prstGeom prst="rect">
+            <a:avLst/>
+          </a:prstGeom>
+          <a:noFill/>
+        </p:spPr>
+        <p:txBody>
+          <a:bodyPr wrap="none">
+            <a:spAutoFit/>
+          </a:bodyPr>
+          <a:lstStyle/>
+          <a:p>
+            <a:pPr>
+              <a:defRPr sz="1100" b="1">
+                <a:solidFill>
+                  <a:srgbClr val="FFFFFF"/>
+                </a:solidFill>
+                <a:latin typeface="Segoe UI"/>
+              </a:defRPr>
+            </a:pPr>
+            <a:r>
+              <a:t>Salon, Bridal Studio &amp; Academy</a:t>
+            </a:r>
+          </a:p>
+        </p:txBody>
+      </p:sp>
+      <p:sp>
+        <p:nvSpPr>
+          <p:cNvPr id="9" name="TextBox 8"/>
+          <p:cNvSpPr txBox="1"/>
+          <p:nvPr/>
+        </p:nvSpPr>
+        <p:spPr>
+          <a:xfrm>
+            <a:off x="960120" y="2852928"/>
+            <a:ext cx="2999232" cy="320040"/>
+          </a:xfrm>
+          <a:prstGeom prst="rect">
+            <a:avLst/>
+          </a:prstGeom>
+          <a:noFill/>
+        </p:spPr>
+        <p:txBody>
+          <a:bodyPr wrap="none">
+            <a:spAutoFit/>
+          </a:bodyPr>
+          <a:lstStyle/>
+          <a:p>
+            <a:r>
+              <a:rPr sz="950" b="1" u="sng">
+                <a:solidFill>
+                  <a:srgbClr val="60A5FA"/>
+                </a:solidFill>
+                <a:latin typeface="Segoe UI"/>
+                <a:hlinkClick r:id="rId2"/>
+              </a:rPr>
+              <a:t>🔗 app.microcrm.site/book/rashmi-r-makeup</a:t>
+            </a:r>
+          </a:p>
+        </p:txBody>
+      </p:sp>
+      <p:sp>
+        <p:nvSpPr>
+          <p:cNvPr id="10" name="TextBox 9"/>
+          <p:cNvSpPr txBox="1"/>
+          <p:nvPr/>
+        </p:nvSpPr>
+        <p:spPr>
+          <a:xfrm>
+            <a:off x="960120" y="3218688"/>
+            <a:ext cx="2999232" cy="2148840"/>
+          </a:xfrm>
+          <a:prstGeom prst="rect">
+            <a:avLst/>
+          </a:prstGeom>
+          <a:noFill/>
+        </p:spPr>
+        <p:txBody>
+          <a:bodyPr wrap="square">
+            <a:spAutoFit/>
+          </a:bodyPr>
+          <a:lstStyle/>
+          <a:p>
+            <a:pPr>
+              <a:spcAft>
+                <a:spcPts val="600"/>
+              </a:spcAft>
+              <a:defRPr sz="1050">
+                <a:solidFill>
+                  <a:srgbClr val="E2E8F0"/>
+                </a:solidFill>
+                <a:latin typeface="Segoe UI"/>
+              </a:defRPr>
+            </a:pPr>
+            <a:r>
+              <a:t>Challenge: Heavy phone distractions during bridal makeup; frequent customer no-shows.</a:t>
+            </a:r>
+          </a:p>
+          <a:p>
+            <a:pPr>
+              <a:spcAft>
+                <a:spcPts val="600"/>
+              </a:spcAft>
+              <a:defRPr sz="1050">
+                <a:solidFill>
+                  <a:srgbClr val="E2E8F0"/>
+                </a:solidFill>
+                <a:latin typeface="Segoe UI"/>
+              </a:defRPr>
+            </a:pPr>
+            <a:r>
+              <a:t>Solution: Branded mobile portal with embedded Instagram Reel video proofs of makeover transformations.</a:t>
+            </a:r>
+          </a:p>
+          <a:p>
+            <a:pPr>
+              <a:spcAft>
+                <a:spcPts val="600"/>
+              </a:spcAft>
+              <a:defRPr sz="1050">
+                <a:solidFill>
+                  <a:srgbClr val="E2E8F0"/>
+                </a:solidFill>
+                <a:latin typeface="Segoe UI"/>
+              </a:defRPr>
+            </a:pPr>
+            <a:r>
+              <a:t>Result: 100% self-service booking with automated 24-hour WhatsApp reminder messages.</a:t>
+            </a:r>
+          </a:p>
+        </p:txBody>
+      </p:sp>
+      <p:sp>
+        <p:nvSpPr>
+          <p:cNvPr id="11" name="Rounded Rectangle 10"/>
+          <p:cNvSpPr/>
+          <p:nvPr/>
+        </p:nvSpPr>
+        <p:spPr>
+          <a:xfrm>
+            <a:off x="960120" y="5468112"/>
+            <a:ext cx="2999232" cy="384048"/>
+          </a:xfrm>
+          <a:prstGeom prst="roundRect">
+            <a:avLst/>
+          </a:prstGeom>
+          <a:solidFill>
+            <a:srgbClr val="111827"/>
+          </a:solidFill>
+          <a:ln>
+            <a:solidFill>
+              <a:srgbClr val="F472B6"/>
+            </a:solidFill>
+          </a:ln>
+        </p:spPr>
+        <p:style>
+          <a:lnRef idx="1">
+            <a:schemeClr val="accent1"/>
+          </a:lnRef>
+          <a:fillRef idx="3">
+            <a:schemeClr val="accent1"/>
+          </a:fillRef>
+          <a:effectRef idx="2">
+            <a:schemeClr val="accent1"/>
+          </a:effectRef>
+          <a:fontRef idx="minor">
+            <a:schemeClr val="lt1"/>
+          </a:fontRef>
+        </p:style>
+        <p:txBody>
+          <a:bodyPr rtlCol="0" anchor="ctr"/>
+          <a:lstStyle/>
+          <a:p>
+            <a:pPr algn="ctr"/>
+            <a:r>
+              <a:rPr sz="1000" b="1">
+                <a:solidFill>
+                  <a:srgbClr val="F472B6"/>
+                </a:solidFill>
+                <a:latin typeface="Segoe UI"/>
+                <a:hlinkClick r:id="rId2"/>
+              </a:rPr>
+              <a:t>Open Live Client Portal ↗</a:t>
+            </a:r>
+          </a:p>
+        </p:txBody>
+      </p:sp>
+      <p:sp>
+        <p:nvSpPr>
+          <p:cNvPr id="12" name="Rounded Rectangle 11"/>
+          <p:cNvSpPr/>
+          <p:nvPr/>
+        </p:nvSpPr>
+        <p:spPr>
+          <a:xfrm>
+            <a:off x="4462272" y="1920240"/>
+            <a:ext cx="3456432" cy="4114800"/>
+          </a:xfrm>
+          <a:prstGeom prst="roundRect">
+            <a:avLst/>
+          </a:prstGeom>
+          <a:solidFill>
+            <a:srgbClr val="1E293B"/>
+          </a:solidFill>
+          <a:ln>
+            <a:solidFill>
+              <a:srgbClr val="60A5FA"/>
+            </a:solidFill>
+          </a:ln>
+        </p:spPr>
+        <p:style>
+          <a:lnRef idx="1">
+            <a:schemeClr val="accent1"/>
+          </a:lnRef>
+          <a:fillRef idx="3">
+            <a:schemeClr val="accent1"/>
+          </a:fillRef>
+          <a:effectRef idx="2">
+            <a:schemeClr val="accent1"/>
+          </a:effectRef>
+          <a:fontRef idx="minor">
+            <a:schemeClr val="lt1"/>
+          </a:fontRef>
+        </p:style>
+        <p:txBody>
+          <a:bodyPr rtlCol="0" anchor="ctr"/>
+          <a:lstStyle/>
+          <a:p>
+            <a:pPr algn="ctr"/>
+          </a:p>
+        </p:txBody>
+      </p:sp>
+      <p:sp>
+        <p:nvSpPr>
+          <p:cNvPr id="13" name="TextBox 12"/>
+          <p:cNvSpPr txBox="1"/>
+          <p:nvPr/>
+        </p:nvSpPr>
+        <p:spPr>
+          <a:xfrm>
+            <a:off x="4690872" y="2103120"/>
+            <a:ext cx="2999232" cy="411480"/>
+          </a:xfrm>
+          <a:prstGeom prst="rect">
+            <a:avLst/>
+          </a:prstGeom>
+          <a:noFill/>
+        </p:spPr>
+        <p:txBody>
+          <a:bodyPr wrap="none">
+            <a:spAutoFit/>
+          </a:bodyPr>
+          <a:lstStyle/>
+          <a:p>
+            <a:pPr>
+              <a:defRPr sz="1600" b="1">
+                <a:solidFill>
+                  <a:srgbClr val="60A5FA"/>
+                </a:solidFill>
+                <a:latin typeface="Segoe UI"/>
+              </a:defRPr>
+            </a:pPr>
+            <a:r>
+              <a:t>💻  Shri Ranawat Infotech</a:t>
+            </a:r>
+          </a:p>
+        </p:txBody>
+      </p:sp>
+      <p:sp>
+        <p:nvSpPr>
+          <p:cNvPr id="14" name="TextBox 13"/>
+          <p:cNvSpPr txBox="1"/>
+          <p:nvPr/>
+        </p:nvSpPr>
+        <p:spPr>
+          <a:xfrm>
+            <a:off x="4690872" y="2542032"/>
+            <a:ext cx="2999232" cy="320040"/>
+          </a:xfrm>
+          <a:prstGeom prst="rect">
+            <a:avLst/>
+          </a:prstGeom>
+          <a:noFill/>
+        </p:spPr>
+        <p:txBody>
+          <a:bodyPr wrap="none">
+            <a:spAutoFit/>
+          </a:bodyPr>
+          <a:lstStyle/>
+          <a:p>
+            <a:pPr>
+              <a:defRPr sz="1100" b="1">
+                <a:solidFill>
+                  <a:srgbClr val="FFFFFF"/>
+                </a:solidFill>
+                <a:latin typeface="Segoe UI"/>
+              </a:defRPr>
+            </a:pPr>
+            <a:r>
+              <a:t>Computer Store &amp; Tech Repair Center</a:t>
+            </a:r>
+          </a:p>
+        </p:txBody>
+      </p:sp>
+      <p:sp>
+        <p:nvSpPr>
+          <p:cNvPr id="15" name="TextBox 14"/>
+          <p:cNvSpPr txBox="1"/>
+          <p:nvPr/>
+        </p:nvSpPr>
+        <p:spPr>
+          <a:xfrm>
+            <a:off x="4690872" y="2852928"/>
+            <a:ext cx="2999232" cy="320040"/>
+          </a:xfrm>
+          <a:prstGeom prst="rect">
+            <a:avLst/>
+          </a:prstGeom>
+          <a:noFill/>
+        </p:spPr>
+        <p:txBody>
+          <a:bodyPr wrap="none">
+            <a:spAutoFit/>
+          </a:bodyPr>
+          <a:lstStyle/>
+          <a:p>
+            <a:r>
+              <a:rPr sz="950" b="1" u="sng">
+                <a:solidFill>
+                  <a:srgbClr val="60A5FA"/>
+                </a:solidFill>
+                <a:latin typeface="Segoe UI"/>
+                <a:hlinkClick r:id="rId3"/>
+              </a:rPr>
+              <a:t>🔗 app.microcrm.site/book/shri-ranawat-infotech</a:t>
+            </a:r>
+          </a:p>
+        </p:txBody>
+      </p:sp>
+      <p:sp>
+        <p:nvSpPr>
+          <p:cNvPr id="16" name="TextBox 15"/>
+          <p:cNvSpPr txBox="1"/>
+          <p:nvPr/>
+        </p:nvSpPr>
+        <p:spPr>
+          <a:xfrm>
+            <a:off x="4690872" y="3218688"/>
+            <a:ext cx="2999232" cy="2148840"/>
+          </a:xfrm>
+          <a:prstGeom prst="rect">
+            <a:avLst/>
+          </a:prstGeom>
+          <a:noFill/>
+        </p:spPr>
+        <p:txBody>
+          <a:bodyPr wrap="square">
+            <a:spAutoFit/>
+          </a:bodyPr>
+          <a:lstStyle/>
+          <a:p>
+            <a:pPr>
+              <a:spcAft>
+                <a:spcPts val="600"/>
+              </a:spcAft>
+              <a:defRPr sz="1050">
+                <a:solidFill>
+                  <a:srgbClr val="E2E8F0"/>
+                </a:solidFill>
+                <a:latin typeface="Segoe UI"/>
+              </a:defRPr>
+            </a:pPr>
+            <a:r>
+              <a:t>Challenge: Constant calls asking 'Is my laptop ready?'; lost tracking of hardware spare parts.</a:t>
+            </a:r>
+          </a:p>
+          <a:p>
+            <a:pPr>
+              <a:spcAft>
+                <a:spcPts val="600"/>
+              </a:spcAft>
+              <a:defRPr sz="1050">
+                <a:solidFill>
+                  <a:srgbClr val="E2E8F0"/>
+                </a:solidFill>
+                <a:latin typeface="Segoe UI"/>
+              </a:defRPr>
+            </a:pPr>
+            <a:r>
+              <a:t>Solution: Job-card diagnostic tiers + real-time stock deduction + automated ready alerts.</a:t>
+            </a:r>
+          </a:p>
+          <a:p>
+            <a:pPr>
+              <a:spcAft>
+                <a:spcPts val="600"/>
+              </a:spcAft>
+              <a:defRPr sz="1050">
+                <a:solidFill>
+                  <a:srgbClr val="E2E8F0"/>
+                </a:solidFill>
+                <a:latin typeface="Segoe UI"/>
+              </a:defRPr>
+            </a:pPr>
+            <a:r>
+              <a:t>Result: Customers receive instant WhatsApp message when device is fixed with attached GST bill.</a:t>
+            </a:r>
+          </a:p>
+        </p:txBody>
+      </p:sp>
+      <p:sp>
+        <p:nvSpPr>
+          <p:cNvPr id="17" name="Rounded Rectangle 16"/>
+          <p:cNvSpPr/>
+          <p:nvPr/>
+        </p:nvSpPr>
+        <p:spPr>
+          <a:xfrm>
+            <a:off x="4690872" y="5468112"/>
+            <a:ext cx="2999232" cy="384048"/>
+          </a:xfrm>
+          <a:prstGeom prst="roundRect">
+            <a:avLst/>
+          </a:prstGeom>
+          <a:solidFill>
+            <a:srgbClr val="111827"/>
+          </a:solidFill>
+          <a:ln>
+            <a:solidFill>
+              <a:srgbClr val="60A5FA"/>
+            </a:solidFill>
+          </a:ln>
+        </p:spPr>
+        <p:style>
+          <a:lnRef idx="1">
+            <a:schemeClr val="accent1"/>
+          </a:lnRef>
+          <a:fillRef idx="3">
+            <a:schemeClr val="accent1"/>
+          </a:fillRef>
+          <a:effectRef idx="2">
+            <a:schemeClr val="accent1"/>
+          </a:effectRef>
+          <a:fontRef idx="minor">
+            <a:schemeClr val="lt1"/>
+          </a:fontRef>
+        </p:style>
+        <p:txBody>
+          <a:bodyPr rtlCol="0" anchor="ctr"/>
+          <a:lstStyle/>
+          <a:p>
+            <a:pPr algn="ctr"/>
+            <a:r>
+              <a:rPr sz="1000" b="1">
+                <a:solidFill>
+                  <a:srgbClr val="60A5FA"/>
+                </a:solidFill>
+                <a:latin typeface="Segoe UI"/>
+                <a:hlinkClick r:id="rId3"/>
+              </a:rPr>
+              <a:t>Open Live Client Portal ↗</a:t>
+            </a:r>
+          </a:p>
+        </p:txBody>
+      </p:sp>
+      <p:sp>
+        <p:nvSpPr>
+          <p:cNvPr id="18" name="Rounded Rectangle 17"/>
+          <p:cNvSpPr/>
+          <p:nvPr/>
+        </p:nvSpPr>
+        <p:spPr>
+          <a:xfrm>
+            <a:off x="8193024" y="1920240"/>
+            <a:ext cx="3456432" cy="4114800"/>
           </a:xfrm>
           <a:prstGeom prst="roundRect">
             <a:avLst/>
@@ -6462,14 +6702,121 @@
       </p:sp>
       <p:sp>
         <p:nvSpPr>
-          <p:cNvPr id="7" name="TextBox 6"/>
+          <p:cNvPr id="19" name="TextBox 18"/>
           <p:cNvSpPr txBox="1"/>
           <p:nvPr/>
         </p:nvSpPr>
         <p:spPr>
           <a:xfrm>
-            <a:off x="1005840" y="2194560"/>
-            <a:ext cx="4754880" cy="3566160"/>
+            <a:off x="8421624" y="2103120"/>
+            <a:ext cx="2999232" cy="411480"/>
+          </a:xfrm>
+          <a:prstGeom prst="rect">
+            <a:avLst/>
+          </a:prstGeom>
+          <a:noFill/>
+        </p:spPr>
+        <p:txBody>
+          <a:bodyPr wrap="none">
+            <a:spAutoFit/>
+          </a:bodyPr>
+          <a:lstStyle/>
+          <a:p>
+            <a:pPr>
+              <a:defRPr sz="1600" b="1">
+                <a:solidFill>
+                  <a:srgbClr val="10B981"/>
+                </a:solidFill>
+                <a:latin typeface="Segoe UI"/>
+              </a:defRPr>
+            </a:pPr>
+            <a:r>
+              <a:t>🏘️  BBC Real Estate (Aahana Residency)</a:t>
+            </a:r>
+          </a:p>
+        </p:txBody>
+      </p:sp>
+      <p:sp>
+        <p:nvSpPr>
+          <p:cNvPr id="20" name="TextBox 19"/>
+          <p:cNvSpPr txBox="1"/>
+          <p:nvPr/>
+        </p:nvSpPr>
+        <p:spPr>
+          <a:xfrm>
+            <a:off x="8421624" y="2542032"/>
+            <a:ext cx="2999232" cy="320040"/>
+          </a:xfrm>
+          <a:prstGeom prst="rect">
+            <a:avLst/>
+          </a:prstGeom>
+          <a:noFill/>
+        </p:spPr>
+        <p:txBody>
+          <a:bodyPr wrap="none">
+            <a:spAutoFit/>
+          </a:bodyPr>
+          <a:lstStyle/>
+          <a:p>
+            <a:pPr>
+              <a:defRPr sz="1100" b="1">
+                <a:solidFill>
+                  <a:srgbClr val="FFFFFF"/>
+                </a:solidFill>
+                <a:latin typeface="Segoe UI"/>
+              </a:defRPr>
+            </a:pPr>
+            <a:r>
+              <a:t>Township Developer &amp; Pre-Sales CRM</a:t>
+            </a:r>
+          </a:p>
+        </p:txBody>
+      </p:sp>
+      <p:sp>
+        <p:nvSpPr>
+          <p:cNvPr id="21" name="TextBox 20"/>
+          <p:cNvSpPr txBox="1"/>
+          <p:nvPr/>
+        </p:nvSpPr>
+        <p:spPr>
+          <a:xfrm>
+            <a:off x="8421624" y="2852928"/>
+            <a:ext cx="2999232" cy="320040"/>
+          </a:xfrm>
+          <a:prstGeom prst="rect">
+            <a:avLst/>
+          </a:prstGeom>
+          <a:noFill/>
+        </p:spPr>
+        <p:txBody>
+          <a:bodyPr wrap="none">
+            <a:spAutoFit/>
+          </a:bodyPr>
+          <a:lstStyle/>
+          <a:p>
+            <a:r>
+              <a:rPr sz="950" b="1" u="sng">
+                <a:solidFill>
+                  <a:srgbClr val="60A5FA"/>
+                </a:solidFill>
+                <a:latin typeface="Segoe UI"/>
+                <a:hlinkClick r:id="rId4"/>
+              </a:rPr>
+              <a:t>🔗 app.microcrm.site/book/bbc</a:t>
+            </a:r>
+          </a:p>
+        </p:txBody>
+      </p:sp>
+      <p:sp>
+        <p:nvSpPr>
+          <p:cNvPr id="22" name="TextBox 21"/>
+          <p:cNvSpPr txBox="1"/>
+          <p:nvPr/>
+        </p:nvSpPr>
+        <p:spPr>
+          <a:xfrm>
+            <a:off x="8421624" y="3218688"/>
+            <a:ext cx="2999232" cy="2148840"/>
           </a:xfrm>
           <a:prstGeom prst="rect">
             <a:avLst/>
@@ -6483,23 +6830,10 @@
           <a:lstStyle/>
           <a:p>
             <a:pPr>
-              <a:defRPr sz="1600" b="1">
-                <a:solidFill>
-                  <a:srgbClr val="10B981"/>
-                </a:solidFill>
-                <a:latin typeface="Segoe UI"/>
-              </a:defRPr>
-            </a:pPr>
-            <a:r>
-              <a:t>How the WhatsApp AI Powers Your Sales:</a:t>
-            </a:r>
-          </a:p>
-          <a:p>
-            <a:pPr>
-              <a:spcBef>
-                <a:spcPts val="800"/>
-              </a:spcBef>
-              <a:defRPr sz="1150">
+              <a:spcAft>
+                <a:spcPts val="600"/>
+              </a:spcAft>
+              <a:defRPr sz="1050">
                 <a:solidFill>
                   <a:srgbClr val="E2E8F0"/>
                 </a:solidFill>
@@ -6507,15 +6841,15 @@
               </a:defRPr>
             </a:pPr>
             <a:r>
-              <a:t>•  Natural Indian Phrasing: Understands Hindi, Hinglish, and colloquial expressions (e.g. 'Anjali this side, plot price kya hai?').</a:t>
-            </a:r>
-          </a:p>
-          <a:p>
-            <a:pPr>
-              <a:spcBef>
-                <a:spcPts val="800"/>
-              </a:spcBef>
-              <a:defRPr sz="1150">
+              <a:t>Challenge: Static PDF maps confused buyers; Meta ad leads went cold within hours.</a:t>
+            </a:r>
+          </a:p>
+          <a:p>
+            <a:pPr>
+              <a:spcAft>
+                <a:spcPts val="600"/>
+              </a:spcAft>
+              <a:defRPr sz="1050">
                 <a:solidFill>
                   <a:srgbClr val="E2E8F0"/>
                 </a:solidFill>
@@ -6523,15 +6857,15 @@
               </a:defRPr>
             </a:pPr>
             <a:r>
-              <a:t>•  Brochures &amp; Videos: Instantly shares downloadable PDF brochures, photos, and Instagram Reel transformation links.</a:t>
-            </a:r>
-          </a:p>
-          <a:p>
-            <a:pPr>
-              <a:spcBef>
-                <a:spcPts val="800"/>
-              </a:spcBef>
-              <a:defRPr sz="1150">
+              <a:t>Solution: Live interactive canvas plot maps (Available vs Sold) + WhatsApp AI brochure bot.</a:t>
+            </a:r>
+          </a:p>
+          <a:p>
+            <a:pPr>
+              <a:spcAft>
+                <a:spcPts val="600"/>
+              </a:spcAft>
+              <a:defRPr sz="1050">
                 <a:solidFill>
                   <a:srgbClr val="E2E8F0"/>
                 </a:solidFill>
@@ -6539,53 +6873,21 @@
               </a:defRPr>
             </a:pPr>
             <a:r>
-              <a:t>•  Automated PDF Invoices: Whenever an order or service is completed in POS, the system automatically sends a PDF receipt to WhatsApp.</a:t>
-            </a:r>
-          </a:p>
-          <a:p>
-            <a:pPr>
-              <a:spcBef>
-                <a:spcPts val="800"/>
-              </a:spcBef>
-              <a:defRPr sz="1150">
-                <a:solidFill>
-                  <a:srgbClr val="E2E8F0"/>
-                </a:solidFill>
-                <a:latin typeface="Segoe UI"/>
-              </a:defRPr>
-            </a:pPr>
-            <a:r>
-              <a:t>•  Zero Per-Message Markups: Connects securely via direct WhatsApp Web protocol—no costly 50p/message Meta business API fees.</a:t>
-            </a:r>
-          </a:p>
-          <a:p>
-            <a:pPr>
-              <a:spcBef>
-                <a:spcPts val="800"/>
-              </a:spcBef>
-              <a:defRPr sz="1150">
-                <a:solidFill>
-                  <a:srgbClr val="E2E8F0"/>
-                </a:solidFill>
-                <a:latin typeface="Segoe UI"/>
-              </a:defRPr>
-            </a:pPr>
-            <a:r>
-              <a:t>•  Lead Attribution: Incoming chats are tagged and attributed to specific sales reps with automated CRM follow-up alarms.</a:t>
-            </a:r>
-          </a:p>
-        </p:txBody>
-      </p:sp>
-      <p:sp>
-        <p:nvSpPr>
-          <p:cNvPr id="8" name="Rounded Rectangle 7"/>
+              <a:t>Result: Inbound ad leads get automated brochure in 2 minutes; 392% higher site visit conversion.</a:t>
+            </a:r>
+          </a:p>
+        </p:txBody>
+      </p:sp>
+      <p:sp>
+        <p:nvSpPr>
+          <p:cNvPr id="23" name="Rounded Rectangle 22"/>
           <p:cNvSpPr/>
           <p:nvPr/>
         </p:nvSpPr>
         <p:spPr>
           <a:xfrm>
-            <a:off x="6309360" y="1920240"/>
-            <a:ext cx="5120640" cy="4114800"/>
+            <a:off x="8421624" y="5468112"/>
+            <a:ext cx="2999232" cy="384048"/>
           </a:xfrm>
           <a:prstGeom prst="roundRect">
             <a:avLst/>
@@ -6595,7 +6897,7 @@
           </a:solidFill>
           <a:ln>
             <a:solidFill>
-              <a:srgbClr val="334155"/>
+              <a:srgbClr val="10B981"/>
             </a:solidFill>
           </a:ln>
         </p:spPr>
@@ -6618,125 +6920,15 @@
           <a:lstStyle/>
           <a:p>
             <a:pPr algn="ctr"/>
-          </a:p>
-        </p:txBody>
-      </p:sp>
-      <p:sp>
-        <p:nvSpPr>
-          <p:cNvPr id="9" name="TextBox 8"/>
-          <p:cNvSpPr txBox="1"/>
-          <p:nvPr/>
-        </p:nvSpPr>
-        <p:spPr>
-          <a:xfrm>
-            <a:off x="6583680" y="2194560"/>
-            <a:ext cx="4572000" cy="3566160"/>
-          </a:xfrm>
-          <a:prstGeom prst="rect">
-            <a:avLst/>
-          </a:prstGeom>
-          <a:noFill/>
-        </p:spPr>
-        <p:txBody>
-          <a:bodyPr wrap="square">
-            <a:spAutoFit/>
-          </a:bodyPr>
-          <a:lstStyle/>
-          <a:p>
-            <a:pPr>
-              <a:defRPr sz="1400" b="1">
-                <a:solidFill>
-                  <a:srgbClr val="60A5FA"/>
-                </a:solidFill>
-                <a:latin typeface="Segoe UI"/>
-              </a:defRPr>
-            </a:pPr>
-            <a:r>
-              <a:t>💬 Live WhatsApp Chat Example</a:t>
-            </a:r>
-          </a:p>
-          <a:p>
-            <a:pPr>
-              <a:spcBef>
-                <a:spcPts val="600"/>
-              </a:spcBef>
-              <a:defRPr sz="1000">
-                <a:solidFill>
-                  <a:srgbClr val="FFFFFF"/>
-                </a:solidFill>
-                <a:latin typeface="Segoe UI"/>
-              </a:defRPr>
-            </a:pPr>
-            <a:r>
-              <a:t>[Customer]: Anjali this side. Looking for 1000 sqft plot in Aahana Residency. What is the current rate?</a:t>
-            </a:r>
-          </a:p>
-          <a:p>
-            <a:pPr>
-              <a:spcBef>
-                <a:spcPts val="600"/>
-              </a:spcBef>
-              <a:defRPr sz="1000">
+            <a:r>
+              <a:rPr sz="1000" b="1">
                 <a:solidFill>
                   <a:srgbClr val="10B981"/>
                 </a:solidFill>
                 <a:latin typeface="Segoe UI"/>
-              </a:defRPr>
-            </a:pPr>
-            <a:r>
-              <a:t>[MicroCRM AI]: Namaste Anjali ji! 😊 Plots in Aahana Residency start at ₹3,750/sqft in Puwarda Junarda, Indore. Corner and garden-facing plots are currently available.</a:t>
-            </a:r>
-          </a:p>
-          <a:p>
-            <a:pPr>
-              <a:spcBef>
-                <a:spcPts val="600"/>
-              </a:spcBef>
-              <a:defRPr sz="1000">
-                <a:solidFill>
-                  <a:srgbClr val="10B981"/>
-                </a:solidFill>
-                <a:latin typeface="Segoe UI"/>
-              </a:defRPr>
-            </a:pPr>
-            <a:r>
-              <a:t>[MicroCRM AI]: Here is the layout map and brochure: app.microcrm.site/book/bbc</a:t>
-            </a:r>
-            <a:br/>
-            <a:r>
-              <a:t>Would you like me to book a free site visit for you this weekend?</a:t>
-            </a:r>
-          </a:p>
-          <a:p>
-            <a:pPr>
-              <a:spcBef>
-                <a:spcPts val="600"/>
-              </a:spcBef>
-              <a:defRPr sz="1000">
-                <a:solidFill>
-                  <a:srgbClr val="FFFFFF"/>
-                </a:solidFill>
-                <a:latin typeface="Segoe UI"/>
-              </a:defRPr>
-            </a:pPr>
-            <a:r>
-              <a:t>[Customer]: Yes please, Saturday 4 PM works.</a:t>
-            </a:r>
-          </a:p>
-          <a:p>
-            <a:pPr>
-              <a:spcBef>
-                <a:spcPts val="600"/>
-              </a:spcBef>
-              <a:defRPr sz="1000">
-                <a:solidFill>
-                  <a:srgbClr val="10B981"/>
-                </a:solidFill>
-                <a:latin typeface="Segoe UI"/>
-              </a:defRPr>
-            </a:pPr>
-            <a:r>
-              <a:t>[MicroCRM AI]: Confirmed! 🎉 Your site visit is booked for Saturday at 4:00 PM. Our project manager will welcome you at the site gate. Location pin sent!</a:t>
+                <a:hlinkClick r:id="rId4"/>
+              </a:rPr>
+              <a:t>Open Live Client Portal ↗</a:t>
             </a:r>
           </a:p>
         </p:txBody>
@@ -6854,7 +7046,7 @@
               </a:defRPr>
             </a:pPr>
             <a:r>
-              <a:t>SECURITY &amp; LEGAL COMPLIANCE</a:t>
+              <a:t>WHATSAPP AI AUTOMATION</a:t>
             </a:r>
           </a:p>
         </p:txBody>
@@ -6890,7 +7082,7 @@
               </a:defRPr>
             </a:pPr>
             <a:r>
-              <a:t>Bank-Grade Privacy &amp; Anti-Theft Protection</a:t>
+              <a:t>Conversational 24/7 AI Receptionist</a:t>
             </a:r>
           </a:p>
         </p:txBody>
@@ -6926,7 +7118,7 @@
               </a:defRPr>
             </a:pPr>
             <a:r>
-              <a:t>Engineered with strict multi-tenancy and compliance with India's Digital Personal Data Protection Act.</a:t>
+              <a:t>Turn your existing WhatsApp number into a tireless sales agent without per-message API fees.</a:t>
             </a:r>
           </a:p>
         </p:txBody>
@@ -6940,157 +7132,7 @@
         <p:spPr>
           <a:xfrm>
             <a:off x="731520" y="1920240"/>
-            <a:ext cx="2542032" cy="4114800"/>
-          </a:xfrm>
-          <a:prstGeom prst="roundRect">
-            <a:avLst/>
-          </a:prstGeom>
-          <a:solidFill>
-            <a:srgbClr val="1E293B"/>
-          </a:solidFill>
-          <a:ln>
-            <a:solidFill>
-              <a:srgbClr val="60A5FA"/>
-            </a:solidFill>
-          </a:ln>
-        </p:spPr>
-        <p:style>
-          <a:lnRef idx="1">
-            <a:schemeClr val="accent1"/>
-          </a:lnRef>
-          <a:fillRef idx="3">
-            <a:schemeClr val="accent1"/>
-          </a:fillRef>
-          <a:effectRef idx="2">
-            <a:schemeClr val="accent1"/>
-          </a:effectRef>
-          <a:fontRef idx="minor">
-            <a:schemeClr val="lt1"/>
-          </a:fontRef>
-        </p:style>
-        <p:txBody>
-          <a:bodyPr rtlCol="0" anchor="ctr"/>
-          <a:lstStyle/>
-          <a:p>
-            <a:pPr algn="ctr"/>
-          </a:p>
-        </p:txBody>
-      </p:sp>
-      <p:sp>
-        <p:nvSpPr>
-          <p:cNvPr id="7" name="TextBox 6"/>
-          <p:cNvSpPr txBox="1"/>
-          <p:nvPr/>
-        </p:nvSpPr>
-        <p:spPr>
-          <a:xfrm>
-            <a:off x="914400" y="2194560"/>
-            <a:ext cx="2176272" cy="457200"/>
-          </a:xfrm>
-          <a:prstGeom prst="rect">
-            <a:avLst/>
-          </a:prstGeom>
-          <a:noFill/>
-        </p:spPr>
-        <p:txBody>
-          <a:bodyPr wrap="none">
-            <a:spAutoFit/>
-          </a:bodyPr>
-          <a:lstStyle/>
-          <a:p>
-            <a:pPr>
-              <a:defRPr sz="2600">
-                <a:latin typeface="Segoe UI"/>
-              </a:defRPr>
-            </a:pPr>
-            <a:r>
-              <a:t>🛡️</a:t>
-            </a:r>
-          </a:p>
-        </p:txBody>
-      </p:sp>
-      <p:sp>
-        <p:nvSpPr>
-          <p:cNvPr id="8" name="TextBox 7"/>
-          <p:cNvSpPr txBox="1"/>
-          <p:nvPr/>
-        </p:nvSpPr>
-        <p:spPr>
-          <a:xfrm>
-            <a:off x="914400" y="2834640"/>
-            <a:ext cx="2176272" cy="731520"/>
-          </a:xfrm>
-          <a:prstGeom prst="rect">
-            <a:avLst/>
-          </a:prstGeom>
-          <a:noFill/>
-        </p:spPr>
-        <p:txBody>
-          <a:bodyPr wrap="square">
-            <a:spAutoFit/>
-          </a:bodyPr>
-          <a:lstStyle/>
-          <a:p>
-            <a:pPr>
-              <a:defRPr sz="1500" b="1">
-                <a:solidFill>
-                  <a:srgbClr val="60A5FA"/>
-                </a:solidFill>
-                <a:latin typeface="Segoe UI"/>
-              </a:defRPr>
-            </a:pPr>
-            <a:r>
-              <a:t>DPDPA 2023 Compliance</a:t>
-            </a:r>
-          </a:p>
-        </p:txBody>
-      </p:sp>
-      <p:sp>
-        <p:nvSpPr>
-          <p:cNvPr id="9" name="TextBox 8"/>
-          <p:cNvSpPr txBox="1"/>
-          <p:nvPr/>
-        </p:nvSpPr>
-        <p:spPr>
-          <a:xfrm>
-            <a:off x="914400" y="3657600"/>
-            <a:ext cx="2176272" cy="2011680"/>
-          </a:xfrm>
-          <a:prstGeom prst="rect">
-            <a:avLst/>
-          </a:prstGeom>
-          <a:noFill/>
-        </p:spPr>
-        <p:txBody>
-          <a:bodyPr wrap="square">
-            <a:spAutoFit/>
-          </a:bodyPr>
-          <a:lstStyle/>
-          <a:p>
-            <a:pPr>
-              <a:defRPr sz="1150">
-                <a:solidFill>
-                  <a:srgbClr val="E2E8F0"/>
-                </a:solidFill>
-                <a:latin typeface="Segoe UI"/>
-              </a:defRPr>
-            </a:pPr>
-            <a:r>
-              <a:t>Strict adherence to India's Digital Personal Data Protection Act. Explicit purpose limitation, consent-based messaging, and designated Grievance Officer redressal.</a:t>
-            </a:r>
-          </a:p>
-        </p:txBody>
-      </p:sp>
-      <p:sp>
-        <p:nvSpPr>
-          <p:cNvPr id="10" name="Rounded Rectangle 9"/>
-          <p:cNvSpPr/>
-          <p:nvPr/>
-        </p:nvSpPr>
-        <p:spPr>
-          <a:xfrm>
-            <a:off x="3493008" y="1920240"/>
-            <a:ext cx="2542032" cy="4114800"/>
+            <a:ext cx="5303520" cy="4114800"/>
           </a:xfrm>
           <a:prstGeom prst="roundRect">
             <a:avLst/>
@@ -7128,47 +7170,14 @@
       </p:sp>
       <p:sp>
         <p:nvSpPr>
-          <p:cNvPr id="11" name="TextBox 10"/>
+          <p:cNvPr id="7" name="TextBox 6"/>
           <p:cNvSpPr txBox="1"/>
           <p:nvPr/>
         </p:nvSpPr>
         <p:spPr>
           <a:xfrm>
-            <a:off x="3675888" y="2194560"/>
-            <a:ext cx="2176272" cy="457200"/>
-          </a:xfrm>
-          <a:prstGeom prst="rect">
-            <a:avLst/>
-          </a:prstGeom>
-          <a:noFill/>
-        </p:spPr>
-        <p:txBody>
-          <a:bodyPr wrap="none">
-            <a:spAutoFit/>
-          </a:bodyPr>
-          <a:lstStyle/>
-          <a:p>
-            <a:pPr>
-              <a:defRPr sz="2600">
-                <a:latin typeface="Segoe UI"/>
-              </a:defRPr>
-            </a:pPr>
-            <a:r>
-              <a:t>🔐</a:t>
-            </a:r>
-          </a:p>
-        </p:txBody>
-      </p:sp>
-      <p:sp>
-        <p:nvSpPr>
-          <p:cNvPr id="12" name="TextBox 11"/>
-          <p:cNvSpPr txBox="1"/>
-          <p:nvPr/>
-        </p:nvSpPr>
-        <p:spPr>
-          <a:xfrm>
-            <a:off x="3675888" y="2834640"/>
-            <a:ext cx="2176272" cy="731520"/>
+            <a:off x="1005840" y="2194560"/>
+            <a:ext cx="4754880" cy="3566160"/>
           </a:xfrm>
           <a:prstGeom prst="rect">
             <a:avLst/>
@@ -7182,7 +7191,7 @@
           <a:lstStyle/>
           <a:p>
             <a:pPr>
-              <a:defRPr sz="1500" b="1">
+              <a:defRPr sz="1600" b="1">
                 <a:solidFill>
                   <a:srgbClr val="10B981"/>
                 </a:solidFill>
@@ -7190,34 +7199,14 @@
               </a:defRPr>
             </a:pPr>
             <a:r>
-              <a:t>100% Multi-Tenant Isolation</a:t>
-            </a:r>
-          </a:p>
-        </p:txBody>
-      </p:sp>
-      <p:sp>
-        <p:nvSpPr>
-          <p:cNvPr id="13" name="TextBox 12"/>
-          <p:cNvSpPr txBox="1"/>
-          <p:nvPr/>
-        </p:nvSpPr>
-        <p:spPr>
-          <a:xfrm>
-            <a:off x="3675888" y="3657600"/>
-            <a:ext cx="2176272" cy="2011680"/>
-          </a:xfrm>
-          <a:prstGeom prst="rect">
-            <a:avLst/>
-          </a:prstGeom>
-          <a:noFill/>
-        </p:spPr>
-        <p:txBody>
-          <a:bodyPr wrap="square">
-            <a:spAutoFit/>
-          </a:bodyPr>
-          <a:lstStyle/>
-          <a:p>
-            <a:pPr>
+              <a:t>How the WhatsApp AI Powers Your Sales:</a:t>
+            </a:r>
+          </a:p>
+          <a:p>
+            <a:pPr>
+              <a:spcBef>
+                <a:spcPts val="800"/>
+              </a:spcBef>
               <a:defRPr sz="1150">
                 <a:solidFill>
                   <a:srgbClr val="E2E8F0"/>
@@ -7226,31 +7215,95 @@
               </a:defRPr>
             </a:pPr>
             <a:r>
-              <a:t>Every database query strictly enforces WHERE business_id = %s. Competitors or other branches can NEVER view or leak your sales leads or financial metrics.</a:t>
-            </a:r>
-          </a:p>
-        </p:txBody>
-      </p:sp>
-      <p:sp>
-        <p:nvSpPr>
-          <p:cNvPr id="14" name="Rounded Rectangle 13"/>
+              <a:t>•  Natural Indian Phrasing: Understands Hindi, Hinglish, and colloquial expressions (e.g. 'Anjali this side, plot price kya hai?').</a:t>
+            </a:r>
+          </a:p>
+          <a:p>
+            <a:pPr>
+              <a:spcBef>
+                <a:spcPts val="800"/>
+              </a:spcBef>
+              <a:defRPr sz="1150">
+                <a:solidFill>
+                  <a:srgbClr val="E2E8F0"/>
+                </a:solidFill>
+                <a:latin typeface="Segoe UI"/>
+              </a:defRPr>
+            </a:pPr>
+            <a:r>
+              <a:t>•  Brochures &amp; Videos: Instantly shares downloadable PDF brochures, photos, and Instagram Reel transformation links.</a:t>
+            </a:r>
+          </a:p>
+          <a:p>
+            <a:pPr>
+              <a:spcBef>
+                <a:spcPts val="800"/>
+              </a:spcBef>
+              <a:defRPr sz="1150">
+                <a:solidFill>
+                  <a:srgbClr val="E2E8F0"/>
+                </a:solidFill>
+                <a:latin typeface="Segoe UI"/>
+              </a:defRPr>
+            </a:pPr>
+            <a:r>
+              <a:t>•  Automated PDF Invoices: Whenever an order or service is completed in POS, the system automatically sends a PDF receipt to WhatsApp.</a:t>
+            </a:r>
+          </a:p>
+          <a:p>
+            <a:pPr>
+              <a:spcBef>
+                <a:spcPts val="800"/>
+              </a:spcBef>
+              <a:defRPr sz="1150">
+                <a:solidFill>
+                  <a:srgbClr val="E2E8F0"/>
+                </a:solidFill>
+                <a:latin typeface="Segoe UI"/>
+              </a:defRPr>
+            </a:pPr>
+            <a:r>
+              <a:t>•  Zero Per-Message Markups: Connects securely via direct WhatsApp Web protocol—no costly 50p/message Meta business API fees.</a:t>
+            </a:r>
+          </a:p>
+          <a:p>
+            <a:pPr>
+              <a:spcBef>
+                <a:spcPts val="800"/>
+              </a:spcBef>
+              <a:defRPr sz="1150">
+                <a:solidFill>
+                  <a:srgbClr val="E2E8F0"/>
+                </a:solidFill>
+                <a:latin typeface="Segoe UI"/>
+              </a:defRPr>
+            </a:pPr>
+            <a:r>
+              <a:t>•  Lead Attribution: Incoming chats are tagged and attributed to specific sales reps with automated CRM follow-up alarms.</a:t>
+            </a:r>
+          </a:p>
+        </p:txBody>
+      </p:sp>
+      <p:sp>
+        <p:nvSpPr>
+          <p:cNvPr id="8" name="Rounded Rectangle 7"/>
           <p:cNvSpPr/>
           <p:nvPr/>
         </p:nvSpPr>
         <p:spPr>
           <a:xfrm>
-            <a:off x="6254496" y="1920240"/>
-            <a:ext cx="2542032" cy="4114800"/>
+            <a:off x="6309360" y="1920240"/>
+            <a:ext cx="5120640" cy="4114800"/>
           </a:xfrm>
           <a:prstGeom prst="roundRect">
             <a:avLst/>
           </a:prstGeom>
           <a:solidFill>
-            <a:srgbClr val="1E293B"/>
+            <a:srgbClr val="111827"/>
           </a:solidFill>
           <a:ln>
             <a:solidFill>
-              <a:srgbClr val="F472B6"/>
+              <a:srgbClr val="334155"/>
             </a:solidFill>
           </a:ln>
         </p:spPr>
@@ -7278,47 +7331,14 @@
       </p:sp>
       <p:sp>
         <p:nvSpPr>
-          <p:cNvPr id="15" name="TextBox 14"/>
+          <p:cNvPr id="9" name="TextBox 8"/>
           <p:cNvSpPr txBox="1"/>
           <p:nvPr/>
         </p:nvSpPr>
         <p:spPr>
           <a:xfrm>
-            <a:off x="6437376" y="2194560"/>
-            <a:ext cx="2176272" cy="457200"/>
-          </a:xfrm>
-          <a:prstGeom prst="rect">
-            <a:avLst/>
-          </a:prstGeom>
-          <a:noFill/>
-        </p:spPr>
-        <p:txBody>
-          <a:bodyPr wrap="none">
-            <a:spAutoFit/>
-          </a:bodyPr>
-          <a:lstStyle/>
-          <a:p>
-            <a:pPr>
-              <a:defRPr sz="2600">
-                <a:latin typeface="Segoe UI"/>
-              </a:defRPr>
-            </a:pPr>
-            <a:r>
-              <a:t>🙈</a:t>
-            </a:r>
-          </a:p>
-        </p:txBody>
-      </p:sp>
-      <p:sp>
-        <p:nvSpPr>
-          <p:cNvPr id="16" name="TextBox 15"/>
-          <p:cNvSpPr txBox="1"/>
-          <p:nvPr/>
-        </p:nvSpPr>
-        <p:spPr>
-          <a:xfrm>
-            <a:off x="6437376" y="2834640"/>
-            <a:ext cx="2176272" cy="731520"/>
+            <a:off x="6583680" y="2194560"/>
+            <a:ext cx="4572000" cy="3566160"/>
           </a:xfrm>
           <a:prstGeom prst="rect">
             <a:avLst/>
@@ -7332,201 +7352,99 @@
           <a:lstStyle/>
           <a:p>
             <a:pPr>
-              <a:defRPr sz="1500" b="1">
-                <a:solidFill>
-                  <a:srgbClr val="F472B6"/>
-                </a:solidFill>
-                <a:latin typeface="Segoe UI"/>
-              </a:defRPr>
-            </a:pPr>
-            <a:r>
-              <a:t>Anti-Theft Phone Masking</a:t>
-            </a:r>
-          </a:p>
-        </p:txBody>
-      </p:sp>
-      <p:sp>
-        <p:nvSpPr>
-          <p:cNvPr id="17" name="TextBox 16"/>
-          <p:cNvSpPr txBox="1"/>
-          <p:nvPr/>
-        </p:nvSpPr>
-        <p:spPr>
-          <a:xfrm>
-            <a:off x="6437376" y="3657600"/>
-            <a:ext cx="2176272" cy="2011680"/>
-          </a:xfrm>
-          <a:prstGeom prst="rect">
-            <a:avLst/>
-          </a:prstGeom>
-          <a:noFill/>
-        </p:spPr>
-        <p:txBody>
-          <a:bodyPr wrap="square">
-            <a:spAutoFit/>
-          </a:bodyPr>
-          <a:lstStyle/>
-          <a:p>
-            <a:pPr>
-              <a:defRPr sz="1150">
-                <a:solidFill>
-                  <a:srgbClr val="E2E8F0"/>
-                </a:solidFill>
-                <a:latin typeface="Segoe UI"/>
-              </a:defRPr>
-            </a:pPr>
-            <a:r>
-              <a:t>Sales reps and staff view masked numbers (+91 62641*****). They can message leads via WhatsApp but cannot copy, export, or steal your customer phone database.</a:t>
-            </a:r>
-          </a:p>
-        </p:txBody>
-      </p:sp>
-      <p:sp>
-        <p:nvSpPr>
-          <p:cNvPr id="18" name="Rounded Rectangle 17"/>
-          <p:cNvSpPr/>
-          <p:nvPr/>
-        </p:nvSpPr>
-        <p:spPr>
-          <a:xfrm>
-            <a:off x="9015984" y="1920240"/>
-            <a:ext cx="2542032" cy="4114800"/>
-          </a:xfrm>
-          <a:prstGeom prst="roundRect">
-            <a:avLst/>
-          </a:prstGeom>
-          <a:solidFill>
-            <a:srgbClr val="1E293B"/>
-          </a:solidFill>
-          <a:ln>
-            <a:solidFill>
-              <a:srgbClr val="C084FC"/>
-            </a:solidFill>
-          </a:ln>
-        </p:spPr>
-        <p:style>
-          <a:lnRef idx="1">
-            <a:schemeClr val="accent1"/>
-          </a:lnRef>
-          <a:fillRef idx="3">
-            <a:schemeClr val="accent1"/>
-          </a:fillRef>
-          <a:effectRef idx="2">
-            <a:schemeClr val="accent1"/>
-          </a:effectRef>
-          <a:fontRef idx="minor">
-            <a:schemeClr val="lt1"/>
-          </a:fontRef>
-        </p:style>
-        <p:txBody>
-          <a:bodyPr rtlCol="0" anchor="ctr"/>
-          <a:lstStyle/>
-          <a:p>
-            <a:pPr algn="ctr"/>
-          </a:p>
-        </p:txBody>
-      </p:sp>
-      <p:sp>
-        <p:nvSpPr>
-          <p:cNvPr id="19" name="TextBox 18"/>
-          <p:cNvSpPr txBox="1"/>
-          <p:nvPr/>
-        </p:nvSpPr>
-        <p:spPr>
-          <a:xfrm>
-            <a:off x="9198864" y="2194560"/>
-            <a:ext cx="2176272" cy="457200"/>
-          </a:xfrm>
-          <a:prstGeom prst="rect">
-            <a:avLst/>
-          </a:prstGeom>
-          <a:noFill/>
-        </p:spPr>
-        <p:txBody>
-          <a:bodyPr wrap="none">
-            <a:spAutoFit/>
-          </a:bodyPr>
-          <a:lstStyle/>
-          <a:p>
-            <a:pPr>
-              <a:defRPr sz="2600">
-                <a:latin typeface="Segoe UI"/>
-              </a:defRPr>
-            </a:pPr>
-            <a:r>
-              <a:t>💾</a:t>
-            </a:r>
-          </a:p>
-        </p:txBody>
-      </p:sp>
-      <p:sp>
-        <p:nvSpPr>
-          <p:cNvPr id="20" name="TextBox 19"/>
-          <p:cNvSpPr txBox="1"/>
-          <p:nvPr/>
-        </p:nvSpPr>
-        <p:spPr>
-          <a:xfrm>
-            <a:off x="9198864" y="2834640"/>
-            <a:ext cx="2176272" cy="731520"/>
-          </a:xfrm>
-          <a:prstGeom prst="rect">
-            <a:avLst/>
-          </a:prstGeom>
-          <a:noFill/>
-        </p:spPr>
-        <p:txBody>
-          <a:bodyPr wrap="square">
-            <a:spAutoFit/>
-          </a:bodyPr>
-          <a:lstStyle/>
-          <a:p>
-            <a:pPr>
-              <a:defRPr sz="1500" b="1">
-                <a:solidFill>
-                  <a:srgbClr val="C084FC"/>
-                </a:solidFill>
-                <a:latin typeface="Segoe UI"/>
-              </a:defRPr>
-            </a:pPr>
-            <a:r>
-              <a:t>Zero Vendor Lock-In</a:t>
-            </a:r>
-          </a:p>
-        </p:txBody>
-      </p:sp>
-      <p:sp>
-        <p:nvSpPr>
-          <p:cNvPr id="21" name="TextBox 20"/>
-          <p:cNvSpPr txBox="1"/>
-          <p:nvPr/>
-        </p:nvSpPr>
-        <p:spPr>
-          <a:xfrm>
-            <a:off x="9198864" y="3657600"/>
-            <a:ext cx="2176272" cy="2011680"/>
-          </a:xfrm>
-          <a:prstGeom prst="rect">
-            <a:avLst/>
-          </a:prstGeom>
-          <a:noFill/>
-        </p:spPr>
-        <p:txBody>
-          <a:bodyPr wrap="square">
-            <a:spAutoFit/>
-          </a:bodyPr>
-          <a:lstStyle/>
-          <a:p>
-            <a:pPr>
-              <a:defRPr sz="1150">
-                <a:solidFill>
-                  <a:srgbClr val="E2E8F0"/>
-                </a:solidFill>
-                <a:latin typeface="Segoe UI"/>
-              </a:defRPr>
-            </a:pPr>
-            <a:r>
-              <a:t>Your business data is 100% yours. 1-click CSV exports for all customer contacts, leads, inventory records, and sales bills at any time.</a:t>
+              <a:defRPr sz="1400" b="1">
+                <a:solidFill>
+                  <a:srgbClr val="60A5FA"/>
+                </a:solidFill>
+                <a:latin typeface="Segoe UI"/>
+              </a:defRPr>
+            </a:pPr>
+            <a:r>
+              <a:t>💬 Live WhatsApp Chat Example</a:t>
+            </a:r>
+          </a:p>
+          <a:p>
+            <a:pPr>
+              <a:spcBef>
+                <a:spcPts val="600"/>
+              </a:spcBef>
+              <a:defRPr sz="1000">
+                <a:solidFill>
+                  <a:srgbClr val="FFFFFF"/>
+                </a:solidFill>
+                <a:latin typeface="Segoe UI"/>
+              </a:defRPr>
+            </a:pPr>
+            <a:r>
+              <a:t>[Customer]: Anjali this side. Looking for 1000 sqft plot in Aahana Residency. What is the current rate?</a:t>
+            </a:r>
+          </a:p>
+          <a:p>
+            <a:pPr>
+              <a:spcBef>
+                <a:spcPts val="600"/>
+              </a:spcBef>
+              <a:defRPr sz="1000">
+                <a:solidFill>
+                  <a:srgbClr val="10B981"/>
+                </a:solidFill>
+                <a:latin typeface="Segoe UI"/>
+              </a:defRPr>
+            </a:pPr>
+            <a:r>
+              <a:t>[MicroCRM AI]: Namaste Anjali ji! 😊 Plots in Aahana Residency start at ₹3,750/sqft in Puwarda Junarda, Indore. Corner and garden-facing plots are currently available.</a:t>
+            </a:r>
+          </a:p>
+          <a:p>
+            <a:pPr>
+              <a:spcBef>
+                <a:spcPts val="600"/>
+              </a:spcBef>
+              <a:defRPr sz="1000">
+                <a:solidFill>
+                  <a:srgbClr val="10B981"/>
+                </a:solidFill>
+                <a:latin typeface="Segoe UI"/>
+              </a:defRPr>
+            </a:pPr>
+            <a:r>
+              <a:t>[MicroCRM AI]: Here is the layout map and brochure: app.microcrm.site/book/bbc</a:t>
+            </a:r>
+            <a:br/>
+            <a:r>
+              <a:t>Would you like me to book a free site visit for you this weekend?</a:t>
+            </a:r>
+          </a:p>
+          <a:p>
+            <a:pPr>
+              <a:spcBef>
+                <a:spcPts val="600"/>
+              </a:spcBef>
+              <a:defRPr sz="1000">
+                <a:solidFill>
+                  <a:srgbClr val="FFFFFF"/>
+                </a:solidFill>
+                <a:latin typeface="Segoe UI"/>
+              </a:defRPr>
+            </a:pPr>
+            <a:r>
+              <a:t>[Customer]: Yes please, Saturday 4 PM works.</a:t>
+            </a:r>
+          </a:p>
+          <a:p>
+            <a:pPr>
+              <a:spcBef>
+                <a:spcPts val="600"/>
+              </a:spcBef>
+              <a:defRPr sz="1000">
+                <a:solidFill>
+                  <a:srgbClr val="10B981"/>
+                </a:solidFill>
+                <a:latin typeface="Segoe UI"/>
+              </a:defRPr>
+            </a:pPr>
+            <a:r>
+              <a:t>[MicroCRM AI]: Confirmed! 🎉 Your site visit is booked for Saturday at 4:00 PM. Our project manager will welcome you at the site gate. Location pin sent!</a:t>
             </a:r>
           </a:p>
         </p:txBody>
@@ -7644,7 +7562,7 @@
               </a:defRPr>
             </a:pPr>
             <a:r>
-              <a:t>MULTI-INDUSTRY ENGINE</a:t>
+              <a:t>SECURITY &amp; LEGAL COMPLIANCE</a:t>
             </a:r>
           </a:p>
         </p:txBody>
@@ -7680,7 +7598,7 @@
               </a:defRPr>
             </a:pPr>
             <a:r>
-              <a:t>Tailored for Every Local Industry &amp; Sub-Category</a:t>
+              <a:t>Bank-Grade Privacy &amp; Anti-Theft Protection</a:t>
             </a:r>
           </a:p>
         </p:txBody>
@@ -7716,7 +7634,7 @@
               </a:defRPr>
             </a:pPr>
             <a:r>
-              <a:t>MicroCRM dynamically switches catalog schema, booking logic, and AI behaviors for your niche.</a:t>
+              <a:t>Engineered with strict multi-tenancy and compliance with India's Digital Personal Data Protection Act.</a:t>
             </a:r>
           </a:p>
         </p:txBody>
@@ -7730,7 +7648,7 @@
         <p:spPr>
           <a:xfrm>
             <a:off x="731520" y="1920240"/>
-            <a:ext cx="5120640" cy="658368"/>
+            <a:ext cx="2542032" cy="4114800"/>
           </a:xfrm>
           <a:prstGeom prst="roundRect">
             <a:avLst/>
@@ -7740,7 +7658,7 @@
           </a:solidFill>
           <a:ln>
             <a:solidFill>
-              <a:srgbClr val="334155"/>
+              <a:srgbClr val="60A5FA"/>
             </a:solidFill>
           </a:ln>
         </p:spPr>
@@ -7774,8 +7692,41 @@
         </p:nvSpPr>
         <p:spPr>
           <a:xfrm>
-            <a:off x="868680" y="1965960"/>
-            <a:ext cx="4846320" cy="566928"/>
+            <a:off x="914400" y="2194560"/>
+            <a:ext cx="2176272" cy="457200"/>
+          </a:xfrm>
+          <a:prstGeom prst="rect">
+            <a:avLst/>
+          </a:prstGeom>
+          <a:noFill/>
+        </p:spPr>
+        <p:txBody>
+          <a:bodyPr wrap="none">
+            <a:spAutoFit/>
+          </a:bodyPr>
+          <a:lstStyle/>
+          <a:p>
+            <a:pPr>
+              <a:defRPr sz="2600">
+                <a:latin typeface="Segoe UI"/>
+              </a:defRPr>
+            </a:pPr>
+            <a:r>
+              <a:t>🛡️</a:t>
+            </a:r>
+          </a:p>
+        </p:txBody>
+      </p:sp>
+      <p:sp>
+        <p:nvSpPr>
+          <p:cNvPr id="8" name="TextBox 7"/>
+          <p:cNvSpPr txBox="1"/>
+          <p:nvPr/>
+        </p:nvSpPr>
+        <p:spPr>
+          <a:xfrm>
+            <a:off x="914400" y="2834640"/>
+            <a:ext cx="2176272" cy="731520"/>
           </a:xfrm>
           <a:prstGeom prst="rect">
             <a:avLst/>
@@ -7789,7 +7740,7 @@
           <a:lstStyle/>
           <a:p>
             <a:pPr>
-              <a:defRPr sz="1200" b="1">
+              <a:defRPr sz="1500" b="1">
                 <a:solidFill>
                   <a:srgbClr val="60A5FA"/>
                 </a:solidFill>
@@ -7797,34 +7748,57 @@
               </a:defRPr>
             </a:pPr>
             <a:r>
-              <a:t>💄 Beauty &amp; Salons</a:t>
-            </a:r>
-          </a:p>
-          <a:p>
-            <a:pPr>
-              <a:defRPr sz="950">
-                <a:solidFill>
-                  <a:srgbClr val="94A3B8"/>
-                </a:solidFill>
-                <a:latin typeface="Segoe UI"/>
-              </a:defRPr>
-            </a:pPr>
-            <a:r>
-              <a:t>Hair Salons, Bridal Studios, Nail Bars, Luxury Spas, Tattoo Parlors</a:t>
-            </a:r>
-          </a:p>
-        </p:txBody>
-      </p:sp>
-      <p:sp>
-        <p:nvSpPr>
-          <p:cNvPr id="8" name="Rounded Rectangle 7"/>
+              <a:t>DPDPA 2023 Compliance</a:t>
+            </a:r>
+          </a:p>
+        </p:txBody>
+      </p:sp>
+      <p:sp>
+        <p:nvSpPr>
+          <p:cNvPr id="9" name="TextBox 8"/>
+          <p:cNvSpPr txBox="1"/>
+          <p:nvPr/>
+        </p:nvSpPr>
+        <p:spPr>
+          <a:xfrm>
+            <a:off x="914400" y="3657600"/>
+            <a:ext cx="2176272" cy="2011680"/>
+          </a:xfrm>
+          <a:prstGeom prst="rect">
+            <a:avLst/>
+          </a:prstGeom>
+          <a:noFill/>
+        </p:spPr>
+        <p:txBody>
+          <a:bodyPr wrap="square">
+            <a:spAutoFit/>
+          </a:bodyPr>
+          <a:lstStyle/>
+          <a:p>
+            <a:pPr>
+              <a:defRPr sz="1150">
+                <a:solidFill>
+                  <a:srgbClr val="E2E8F0"/>
+                </a:solidFill>
+                <a:latin typeface="Segoe UI"/>
+              </a:defRPr>
+            </a:pPr>
+            <a:r>
+              <a:t>Strict adherence to India's Digital Personal Data Protection Act. Explicit purpose limitation, consent-based messaging, and designated Grievance Officer redressal.</a:t>
+            </a:r>
+          </a:p>
+        </p:txBody>
+      </p:sp>
+      <p:sp>
+        <p:nvSpPr>
+          <p:cNvPr id="10" name="Rounded Rectangle 9"/>
           <p:cNvSpPr/>
           <p:nvPr/>
         </p:nvSpPr>
         <p:spPr>
           <a:xfrm>
-            <a:off x="731520" y="2706624"/>
-            <a:ext cx="5120640" cy="658368"/>
+            <a:off x="3493008" y="1920240"/>
+            <a:ext cx="2542032" cy="4114800"/>
           </a:xfrm>
           <a:prstGeom prst="roundRect">
             <a:avLst/>
@@ -7834,7 +7808,7 @@
           </a:solidFill>
           <a:ln>
             <a:solidFill>
-              <a:srgbClr val="334155"/>
+              <a:srgbClr val="10B981"/>
             </a:solidFill>
           </a:ln>
         </p:spPr>
@@ -7862,14 +7836,47 @@
       </p:sp>
       <p:sp>
         <p:nvSpPr>
-          <p:cNvPr id="9" name="TextBox 8"/>
+          <p:cNvPr id="11" name="TextBox 10"/>
           <p:cNvSpPr txBox="1"/>
           <p:nvPr/>
         </p:nvSpPr>
         <p:spPr>
           <a:xfrm>
-            <a:off x="868680" y="2752344"/>
-            <a:ext cx="4846320" cy="566928"/>
+            <a:off x="3675888" y="2194560"/>
+            <a:ext cx="2176272" cy="457200"/>
+          </a:xfrm>
+          <a:prstGeom prst="rect">
+            <a:avLst/>
+          </a:prstGeom>
+          <a:noFill/>
+        </p:spPr>
+        <p:txBody>
+          <a:bodyPr wrap="none">
+            <a:spAutoFit/>
+          </a:bodyPr>
+          <a:lstStyle/>
+          <a:p>
+            <a:pPr>
+              <a:defRPr sz="2600">
+                <a:latin typeface="Segoe UI"/>
+              </a:defRPr>
+            </a:pPr>
+            <a:r>
+              <a:t>🔐</a:t>
+            </a:r>
+          </a:p>
+        </p:txBody>
+      </p:sp>
+      <p:sp>
+        <p:nvSpPr>
+          <p:cNvPr id="12" name="TextBox 11"/>
+          <p:cNvSpPr txBox="1"/>
+          <p:nvPr/>
+        </p:nvSpPr>
+        <p:spPr>
+          <a:xfrm>
+            <a:off x="3675888" y="2834640"/>
+            <a:ext cx="2176272" cy="731520"/>
           </a:xfrm>
           <a:prstGeom prst="rect">
             <a:avLst/>
@@ -7883,42 +7890,65 @@
           <a:lstStyle/>
           <a:p>
             <a:pPr>
-              <a:defRPr sz="1200" b="1">
-                <a:solidFill>
-                  <a:srgbClr val="60A5FA"/>
-                </a:solidFill>
-                <a:latin typeface="Segoe UI"/>
-              </a:defRPr>
-            </a:pPr>
-            <a:r>
-              <a:t>💻 Tech &amp; Repair</a:t>
-            </a:r>
-          </a:p>
-          <a:p>
-            <a:pPr>
-              <a:defRPr sz="950">
-                <a:solidFill>
-                  <a:srgbClr val="94A3B8"/>
-                </a:solidFill>
-                <a:latin typeface="Segoe UI"/>
-              </a:defRPr>
-            </a:pPr>
-            <a:r>
-              <a:t>Laptop/PC Repair, Mobile Diagnostics, CCTV, Hardware Sales, Refurbished</a:t>
-            </a:r>
-          </a:p>
-        </p:txBody>
-      </p:sp>
-      <p:sp>
-        <p:nvSpPr>
-          <p:cNvPr id="10" name="Rounded Rectangle 9"/>
+              <a:defRPr sz="1500" b="1">
+                <a:solidFill>
+                  <a:srgbClr val="10B981"/>
+                </a:solidFill>
+                <a:latin typeface="Segoe UI"/>
+              </a:defRPr>
+            </a:pPr>
+            <a:r>
+              <a:t>100% Multi-Tenant Isolation</a:t>
+            </a:r>
+          </a:p>
+        </p:txBody>
+      </p:sp>
+      <p:sp>
+        <p:nvSpPr>
+          <p:cNvPr id="13" name="TextBox 12"/>
+          <p:cNvSpPr txBox="1"/>
+          <p:nvPr/>
+        </p:nvSpPr>
+        <p:spPr>
+          <a:xfrm>
+            <a:off x="3675888" y="3657600"/>
+            <a:ext cx="2176272" cy="2011680"/>
+          </a:xfrm>
+          <a:prstGeom prst="rect">
+            <a:avLst/>
+          </a:prstGeom>
+          <a:noFill/>
+        </p:spPr>
+        <p:txBody>
+          <a:bodyPr wrap="square">
+            <a:spAutoFit/>
+          </a:bodyPr>
+          <a:lstStyle/>
+          <a:p>
+            <a:pPr>
+              <a:defRPr sz="1150">
+                <a:solidFill>
+                  <a:srgbClr val="E2E8F0"/>
+                </a:solidFill>
+                <a:latin typeface="Segoe UI"/>
+              </a:defRPr>
+            </a:pPr>
+            <a:r>
+              <a:t>Every database query strictly enforces WHERE business_id = %s. Competitors or other branches can NEVER view or leak your sales leads or financial metrics.</a:t>
+            </a:r>
+          </a:p>
+        </p:txBody>
+      </p:sp>
+      <p:sp>
+        <p:nvSpPr>
+          <p:cNvPr id="14" name="Rounded Rectangle 13"/>
           <p:cNvSpPr/>
           <p:nvPr/>
         </p:nvSpPr>
         <p:spPr>
           <a:xfrm>
-            <a:off x="731520" y="3493008"/>
-            <a:ext cx="5120640" cy="658368"/>
+            <a:off x="6254496" y="1920240"/>
+            <a:ext cx="2542032" cy="4114800"/>
           </a:xfrm>
           <a:prstGeom prst="roundRect">
             <a:avLst/>
@@ -7928,7 +7958,7 @@
           </a:solidFill>
           <a:ln>
             <a:solidFill>
-              <a:srgbClr val="334155"/>
+              <a:srgbClr val="F472B6"/>
             </a:solidFill>
           </a:ln>
         </p:spPr>
@@ -7956,14 +7986,47 @@
       </p:sp>
       <p:sp>
         <p:nvSpPr>
-          <p:cNvPr id="11" name="TextBox 10"/>
+          <p:cNvPr id="15" name="TextBox 14"/>
           <p:cNvSpPr txBox="1"/>
           <p:nvPr/>
         </p:nvSpPr>
         <p:spPr>
           <a:xfrm>
-            <a:off x="868680" y="3538728"/>
-            <a:ext cx="4846320" cy="566928"/>
+            <a:off x="6437376" y="2194560"/>
+            <a:ext cx="2176272" cy="457200"/>
+          </a:xfrm>
+          <a:prstGeom prst="rect">
+            <a:avLst/>
+          </a:prstGeom>
+          <a:noFill/>
+        </p:spPr>
+        <p:txBody>
+          <a:bodyPr wrap="none">
+            <a:spAutoFit/>
+          </a:bodyPr>
+          <a:lstStyle/>
+          <a:p>
+            <a:pPr>
+              <a:defRPr sz="2600">
+                <a:latin typeface="Segoe UI"/>
+              </a:defRPr>
+            </a:pPr>
+            <a:r>
+              <a:t>🙈</a:t>
+            </a:r>
+          </a:p>
+        </p:txBody>
+      </p:sp>
+      <p:sp>
+        <p:nvSpPr>
+          <p:cNvPr id="16" name="TextBox 15"/>
+          <p:cNvSpPr txBox="1"/>
+          <p:nvPr/>
+        </p:nvSpPr>
+        <p:spPr>
+          <a:xfrm>
+            <a:off x="6437376" y="2834640"/>
+            <a:ext cx="2176272" cy="731520"/>
           </a:xfrm>
           <a:prstGeom prst="rect">
             <a:avLst/>
@@ -7977,42 +8040,65 @@
           <a:lstStyle/>
           <a:p>
             <a:pPr>
-              <a:defRPr sz="1200" b="1">
-                <a:solidFill>
-                  <a:srgbClr val="60A5FA"/>
-                </a:solidFill>
-                <a:latin typeface="Segoe UI"/>
-              </a:defRPr>
-            </a:pPr>
-            <a:r>
-              <a:t>🏘️ Real Estate</a:t>
-            </a:r>
-          </a:p>
-          <a:p>
-            <a:pPr>
-              <a:defRPr sz="950">
-                <a:solidFill>
-                  <a:srgbClr val="94A3B8"/>
-                </a:solidFill>
-                <a:latin typeface="Segoe UI"/>
-              </a:defRPr>
-            </a:pPr>
-            <a:r>
-              <a:t>Builders, Developers, Brokers, Township Planners, Plot &amp; Villa Schemes</a:t>
-            </a:r>
-          </a:p>
-        </p:txBody>
-      </p:sp>
-      <p:sp>
-        <p:nvSpPr>
-          <p:cNvPr id="12" name="Rounded Rectangle 11"/>
+              <a:defRPr sz="1500" b="1">
+                <a:solidFill>
+                  <a:srgbClr val="F472B6"/>
+                </a:solidFill>
+                <a:latin typeface="Segoe UI"/>
+              </a:defRPr>
+            </a:pPr>
+            <a:r>
+              <a:t>Anti-Theft Phone Masking</a:t>
+            </a:r>
+          </a:p>
+        </p:txBody>
+      </p:sp>
+      <p:sp>
+        <p:nvSpPr>
+          <p:cNvPr id="17" name="TextBox 16"/>
+          <p:cNvSpPr txBox="1"/>
+          <p:nvPr/>
+        </p:nvSpPr>
+        <p:spPr>
+          <a:xfrm>
+            <a:off x="6437376" y="3657600"/>
+            <a:ext cx="2176272" cy="2011680"/>
+          </a:xfrm>
+          <a:prstGeom prst="rect">
+            <a:avLst/>
+          </a:prstGeom>
+          <a:noFill/>
+        </p:spPr>
+        <p:txBody>
+          <a:bodyPr wrap="square">
+            <a:spAutoFit/>
+          </a:bodyPr>
+          <a:lstStyle/>
+          <a:p>
+            <a:pPr>
+              <a:defRPr sz="1150">
+                <a:solidFill>
+                  <a:srgbClr val="E2E8F0"/>
+                </a:solidFill>
+                <a:latin typeface="Segoe UI"/>
+              </a:defRPr>
+            </a:pPr>
+            <a:r>
+              <a:t>Sales reps and staff view masked numbers (+91 62641*****). They can message leads via WhatsApp but cannot copy, export, or steal your customer phone database.</a:t>
+            </a:r>
+          </a:p>
+        </p:txBody>
+      </p:sp>
+      <p:sp>
+        <p:nvSpPr>
+          <p:cNvPr id="18" name="Rounded Rectangle 17"/>
           <p:cNvSpPr/>
           <p:nvPr/>
         </p:nvSpPr>
         <p:spPr>
           <a:xfrm>
-            <a:off x="731520" y="4279392"/>
-            <a:ext cx="5120640" cy="658368"/>
+            <a:off x="9015984" y="1920240"/>
+            <a:ext cx="2542032" cy="4114800"/>
           </a:xfrm>
           <a:prstGeom prst="roundRect">
             <a:avLst/>
@@ -8022,7 +8108,7 @@
           </a:solidFill>
           <a:ln>
             <a:solidFill>
-              <a:srgbClr val="334155"/>
+              <a:srgbClr val="C084FC"/>
             </a:solidFill>
           </a:ln>
         </p:spPr>
@@ -8050,14 +8136,47 @@
       </p:sp>
       <p:sp>
         <p:nvSpPr>
-          <p:cNvPr id="13" name="TextBox 12"/>
+          <p:cNvPr id="19" name="TextBox 18"/>
           <p:cNvSpPr txBox="1"/>
           <p:nvPr/>
         </p:nvSpPr>
         <p:spPr>
           <a:xfrm>
-            <a:off x="868680" y="4325112"/>
-            <a:ext cx="4846320" cy="566928"/>
+            <a:off x="9198864" y="2194560"/>
+            <a:ext cx="2176272" cy="457200"/>
+          </a:xfrm>
+          <a:prstGeom prst="rect">
+            <a:avLst/>
+          </a:prstGeom>
+          <a:noFill/>
+        </p:spPr>
+        <p:txBody>
+          <a:bodyPr wrap="none">
+            <a:spAutoFit/>
+          </a:bodyPr>
+          <a:lstStyle/>
+          <a:p>
+            <a:pPr>
+              <a:defRPr sz="2600">
+                <a:latin typeface="Segoe UI"/>
+              </a:defRPr>
+            </a:pPr>
+            <a:r>
+              <a:t>💾</a:t>
+            </a:r>
+          </a:p>
+        </p:txBody>
+      </p:sp>
+      <p:sp>
+        <p:nvSpPr>
+          <p:cNvPr id="20" name="TextBox 19"/>
+          <p:cNvSpPr txBox="1"/>
+          <p:nvPr/>
+        </p:nvSpPr>
+        <p:spPr>
+          <a:xfrm>
+            <a:off x="9198864" y="2834640"/>
+            <a:ext cx="2176272" cy="731520"/>
           </a:xfrm>
           <a:prstGeom prst="rect">
             <a:avLst/>
@@ -8071,87 +8190,29 @@
           <a:lstStyle/>
           <a:p>
             <a:pPr>
-              <a:defRPr sz="1200" b="1">
-                <a:solidFill>
-                  <a:srgbClr val="60A5FA"/>
-                </a:solidFill>
-                <a:latin typeface="Segoe UI"/>
-              </a:defRPr>
-            </a:pPr>
-            <a:r>
-              <a:t>🩺 Healthcare</a:t>
-            </a:r>
-          </a:p>
-          <a:p>
-            <a:pPr>
-              <a:defRPr sz="950">
-                <a:solidFill>
-                  <a:srgbClr val="94A3B8"/>
-                </a:solidFill>
-                <a:latin typeface="Segoe UI"/>
-              </a:defRPr>
-            </a:pPr>
-            <a:r>
-              <a:t>Dental Clinics, General Doctors, Physiotherapy, Pathology Labs, Eye Clinics</a:t>
-            </a:r>
-          </a:p>
-        </p:txBody>
-      </p:sp>
-      <p:sp>
-        <p:nvSpPr>
-          <p:cNvPr id="14" name="Rounded Rectangle 13"/>
-          <p:cNvSpPr/>
-          <p:nvPr/>
-        </p:nvSpPr>
-        <p:spPr>
-          <a:xfrm>
-            <a:off x="731520" y="5065776"/>
-            <a:ext cx="5120640" cy="658368"/>
-          </a:xfrm>
-          <a:prstGeom prst="roundRect">
-            <a:avLst/>
-          </a:prstGeom>
-          <a:solidFill>
-            <a:srgbClr val="1E293B"/>
-          </a:solidFill>
-          <a:ln>
-            <a:solidFill>
-              <a:srgbClr val="334155"/>
-            </a:solidFill>
-          </a:ln>
-        </p:spPr>
-        <p:style>
-          <a:lnRef idx="1">
-            <a:schemeClr val="accent1"/>
-          </a:lnRef>
-          <a:fillRef idx="3">
-            <a:schemeClr val="accent1"/>
-          </a:fillRef>
-          <a:effectRef idx="2">
-            <a:schemeClr val="accent1"/>
-          </a:effectRef>
-          <a:fontRef idx="minor">
-            <a:schemeClr val="lt1"/>
-          </a:fontRef>
-        </p:style>
-        <p:txBody>
-          <a:bodyPr rtlCol="0" anchor="ctr"/>
-          <a:lstStyle/>
-          <a:p>
-            <a:pPr algn="ctr"/>
-          </a:p>
-        </p:txBody>
-      </p:sp>
-      <p:sp>
-        <p:nvSpPr>
-          <p:cNvPr id="15" name="TextBox 14"/>
+              <a:defRPr sz="1500" b="1">
+                <a:solidFill>
+                  <a:srgbClr val="C084FC"/>
+                </a:solidFill>
+                <a:latin typeface="Segoe UI"/>
+              </a:defRPr>
+            </a:pPr>
+            <a:r>
+              <a:t>Zero Vendor Lock-In</a:t>
+            </a:r>
+          </a:p>
+        </p:txBody>
+      </p:sp>
+      <p:sp>
+        <p:nvSpPr>
+          <p:cNvPr id="21" name="TextBox 20"/>
           <p:cNvSpPr txBox="1"/>
           <p:nvPr/>
         </p:nvSpPr>
         <p:spPr>
           <a:xfrm>
-            <a:off x="868680" y="5111496"/>
-            <a:ext cx="4846320" cy="566928"/>
+            <a:off x="9198864" y="3657600"/>
+            <a:ext cx="2176272" cy="2011680"/>
           </a:xfrm>
           <a:prstGeom prst="rect">
             <a:avLst/>
@@ -8165,498 +8226,15 @@
           <a:lstStyle/>
           <a:p>
             <a:pPr>
-              <a:defRPr sz="1200" b="1">
-                <a:solidFill>
-                  <a:srgbClr val="60A5FA"/>
-                </a:solidFill>
-                <a:latin typeface="Segoe UI"/>
-              </a:defRPr>
-            </a:pPr>
-            <a:r>
-              <a:t>🛍️ Retail Stores</a:t>
-            </a:r>
-          </a:p>
-          <a:p>
-            <a:pPr>
-              <a:defRPr sz="950">
-                <a:solidFill>
-                  <a:srgbClr val="94A3B8"/>
-                </a:solidFill>
-                <a:latin typeface="Segoe UI"/>
-              </a:defRPr>
-            </a:pPr>
-            <a:r>
-              <a:t>Clothing Boutiques, Shoe Stores, Optical, Jewelry, Kirana &amp; Supermarkets</a:t>
-            </a:r>
-          </a:p>
-        </p:txBody>
-      </p:sp>
-      <p:sp>
-        <p:nvSpPr>
-          <p:cNvPr id="16" name="Rounded Rectangle 15"/>
-          <p:cNvSpPr/>
-          <p:nvPr/>
-        </p:nvSpPr>
-        <p:spPr>
-          <a:xfrm>
-            <a:off x="6309360" y="1920240"/>
-            <a:ext cx="5120640" cy="658368"/>
-          </a:xfrm>
-          <a:prstGeom prst="roundRect">
-            <a:avLst/>
-          </a:prstGeom>
-          <a:solidFill>
-            <a:srgbClr val="1E293B"/>
-          </a:solidFill>
-          <a:ln>
-            <a:solidFill>
-              <a:srgbClr val="334155"/>
-            </a:solidFill>
-          </a:ln>
-        </p:spPr>
-        <p:style>
-          <a:lnRef idx="1">
-            <a:schemeClr val="accent1"/>
-          </a:lnRef>
-          <a:fillRef idx="3">
-            <a:schemeClr val="accent1"/>
-          </a:fillRef>
-          <a:effectRef idx="2">
-            <a:schemeClr val="accent1"/>
-          </a:effectRef>
-          <a:fontRef idx="minor">
-            <a:schemeClr val="lt1"/>
-          </a:fontRef>
-        </p:style>
-        <p:txBody>
-          <a:bodyPr rtlCol="0" anchor="ctr"/>
-          <a:lstStyle/>
-          <a:p>
-            <a:pPr algn="ctr"/>
-          </a:p>
-        </p:txBody>
-      </p:sp>
-      <p:sp>
-        <p:nvSpPr>
-          <p:cNvPr id="17" name="TextBox 16"/>
-          <p:cNvSpPr txBox="1"/>
-          <p:nvPr/>
-        </p:nvSpPr>
-        <p:spPr>
-          <a:xfrm>
-            <a:off x="6446520" y="1965960"/>
-            <a:ext cx="4846320" cy="566928"/>
-          </a:xfrm>
-          <a:prstGeom prst="rect">
-            <a:avLst/>
-          </a:prstGeom>
-          <a:noFill/>
-        </p:spPr>
-        <p:txBody>
-          <a:bodyPr wrap="square">
-            <a:spAutoFit/>
-          </a:bodyPr>
-          <a:lstStyle/>
-          <a:p>
-            <a:pPr>
-              <a:defRPr sz="1200" b="1">
-                <a:solidFill>
-                  <a:srgbClr val="60A5FA"/>
-                </a:solidFill>
-                <a:latin typeface="Segoe UI"/>
-              </a:defRPr>
-            </a:pPr>
-            <a:r>
-              <a:t>🚗 Automobile</a:t>
-            </a:r>
-          </a:p>
-          <a:p>
-            <a:pPr>
-              <a:defRPr sz="950">
-                <a:solidFill>
-                  <a:srgbClr val="94A3B8"/>
-                </a:solidFill>
-                <a:latin typeface="Segoe UI"/>
-              </a:defRPr>
-            </a:pPr>
-            <a:r>
-              <a:t>Multi-Brand Garages, Two-Wheeler Centers, Car Detailing &amp; PPF, Battery Shops</a:t>
-            </a:r>
-          </a:p>
-        </p:txBody>
-      </p:sp>
-      <p:sp>
-        <p:nvSpPr>
-          <p:cNvPr id="18" name="Rounded Rectangle 17"/>
-          <p:cNvSpPr/>
-          <p:nvPr/>
-        </p:nvSpPr>
-        <p:spPr>
-          <a:xfrm>
-            <a:off x="6309360" y="2706624"/>
-            <a:ext cx="5120640" cy="658368"/>
-          </a:xfrm>
-          <a:prstGeom prst="roundRect">
-            <a:avLst/>
-          </a:prstGeom>
-          <a:solidFill>
-            <a:srgbClr val="1E293B"/>
-          </a:solidFill>
-          <a:ln>
-            <a:solidFill>
-              <a:srgbClr val="334155"/>
-            </a:solidFill>
-          </a:ln>
-        </p:spPr>
-        <p:style>
-          <a:lnRef idx="1">
-            <a:schemeClr val="accent1"/>
-          </a:lnRef>
-          <a:fillRef idx="3">
-            <a:schemeClr val="accent1"/>
-          </a:fillRef>
-          <a:effectRef idx="2">
-            <a:schemeClr val="accent1"/>
-          </a:effectRef>
-          <a:fontRef idx="minor">
-            <a:schemeClr val="lt1"/>
-          </a:fontRef>
-        </p:style>
-        <p:txBody>
-          <a:bodyPr rtlCol="0" anchor="ctr"/>
-          <a:lstStyle/>
-          <a:p>
-            <a:pPr algn="ctr"/>
-          </a:p>
-        </p:txBody>
-      </p:sp>
-      <p:sp>
-        <p:nvSpPr>
-          <p:cNvPr id="19" name="TextBox 18"/>
-          <p:cNvSpPr txBox="1"/>
-          <p:nvPr/>
-        </p:nvSpPr>
-        <p:spPr>
-          <a:xfrm>
-            <a:off x="6446520" y="2752344"/>
-            <a:ext cx="4846320" cy="566928"/>
-          </a:xfrm>
-          <a:prstGeom prst="rect">
-            <a:avLst/>
-          </a:prstGeom>
-          <a:noFill/>
-        </p:spPr>
-        <p:txBody>
-          <a:bodyPr wrap="square">
-            <a:spAutoFit/>
-          </a:bodyPr>
-          <a:lstStyle/>
-          <a:p>
-            <a:pPr>
-              <a:defRPr sz="1200" b="1">
-                <a:solidFill>
-                  <a:srgbClr val="60A5FA"/>
-                </a:solidFill>
-                <a:latin typeface="Segoe UI"/>
-              </a:defRPr>
-            </a:pPr>
-            <a:r>
-              <a:t>🏋️ Fitness &amp; Gyms</a:t>
-            </a:r>
-          </a:p>
-          <a:p>
-            <a:pPr>
-              <a:defRPr sz="950">
-                <a:solidFill>
-                  <a:srgbClr val="94A3B8"/>
-                </a:solidFill>
-                <a:latin typeface="Segoe UI"/>
-              </a:defRPr>
-            </a:pPr>
-            <a:r>
-              <a:t>Gyms, Yoga &amp; Pilates Studios, CrossFit, Martial Arts, Dance Academies</a:t>
-            </a:r>
-          </a:p>
-        </p:txBody>
-      </p:sp>
-      <p:sp>
-        <p:nvSpPr>
-          <p:cNvPr id="20" name="Rounded Rectangle 19"/>
-          <p:cNvSpPr/>
-          <p:nvPr/>
-        </p:nvSpPr>
-        <p:spPr>
-          <a:xfrm>
-            <a:off x="6309360" y="3493008"/>
-            <a:ext cx="5120640" cy="658368"/>
-          </a:xfrm>
-          <a:prstGeom prst="roundRect">
-            <a:avLst/>
-          </a:prstGeom>
-          <a:solidFill>
-            <a:srgbClr val="1E293B"/>
-          </a:solidFill>
-          <a:ln>
-            <a:solidFill>
-              <a:srgbClr val="334155"/>
-            </a:solidFill>
-          </a:ln>
-        </p:spPr>
-        <p:style>
-          <a:lnRef idx="1">
-            <a:schemeClr val="accent1"/>
-          </a:lnRef>
-          <a:fillRef idx="3">
-            <a:schemeClr val="accent1"/>
-          </a:fillRef>
-          <a:effectRef idx="2">
-            <a:schemeClr val="accent1"/>
-          </a:effectRef>
-          <a:fontRef idx="minor">
-            <a:schemeClr val="lt1"/>
-          </a:fontRef>
-        </p:style>
-        <p:txBody>
-          <a:bodyPr rtlCol="0" anchor="ctr"/>
-          <a:lstStyle/>
-          <a:p>
-            <a:pPr algn="ctr"/>
-          </a:p>
-        </p:txBody>
-      </p:sp>
-      <p:sp>
-        <p:nvSpPr>
-          <p:cNvPr id="21" name="TextBox 20"/>
-          <p:cNvSpPr txBox="1"/>
-          <p:nvPr/>
-        </p:nvSpPr>
-        <p:spPr>
-          <a:xfrm>
-            <a:off x="6446520" y="3538728"/>
-            <a:ext cx="4846320" cy="566928"/>
-          </a:xfrm>
-          <a:prstGeom prst="rect">
-            <a:avLst/>
-          </a:prstGeom>
-          <a:noFill/>
-        </p:spPr>
-        <p:txBody>
-          <a:bodyPr wrap="square">
-            <a:spAutoFit/>
-          </a:bodyPr>
-          <a:lstStyle/>
-          <a:p>
-            <a:pPr>
-              <a:defRPr sz="1200" b="1">
-                <a:solidFill>
-                  <a:srgbClr val="60A5FA"/>
-                </a:solidFill>
-                <a:latin typeface="Segoe UI"/>
-              </a:defRPr>
-            </a:pPr>
-            <a:r>
-              <a:t>📚 Education</a:t>
-            </a:r>
-          </a:p>
-          <a:p>
-            <a:pPr>
-              <a:defRPr sz="950">
-                <a:solidFill>
-                  <a:srgbClr val="94A3B8"/>
-                </a:solidFill>
-                <a:latin typeface="Segoe UI"/>
-              </a:defRPr>
-            </a:pPr>
-            <a:r>
-              <a:t>Test Prep Coaching, Home Tutors, Computer Centers, Music &amp; Art Institutes</a:t>
-            </a:r>
-          </a:p>
-        </p:txBody>
-      </p:sp>
-      <p:sp>
-        <p:nvSpPr>
-          <p:cNvPr id="22" name="Rounded Rectangle 21"/>
-          <p:cNvSpPr/>
-          <p:nvPr/>
-        </p:nvSpPr>
-        <p:spPr>
-          <a:xfrm>
-            <a:off x="6309360" y="4279392"/>
-            <a:ext cx="5120640" cy="658368"/>
-          </a:xfrm>
-          <a:prstGeom prst="roundRect">
-            <a:avLst/>
-          </a:prstGeom>
-          <a:solidFill>
-            <a:srgbClr val="1E293B"/>
-          </a:solidFill>
-          <a:ln>
-            <a:solidFill>
-              <a:srgbClr val="334155"/>
-            </a:solidFill>
-          </a:ln>
-        </p:spPr>
-        <p:style>
-          <a:lnRef idx="1">
-            <a:schemeClr val="accent1"/>
-          </a:lnRef>
-          <a:fillRef idx="3">
-            <a:schemeClr val="accent1"/>
-          </a:fillRef>
-          <a:effectRef idx="2">
-            <a:schemeClr val="accent1"/>
-          </a:effectRef>
-          <a:fontRef idx="minor">
-            <a:schemeClr val="lt1"/>
-          </a:fontRef>
-        </p:style>
-        <p:txBody>
-          <a:bodyPr rtlCol="0" anchor="ctr"/>
-          <a:lstStyle/>
-          <a:p>
-            <a:pPr algn="ctr"/>
-          </a:p>
-        </p:txBody>
-      </p:sp>
-      <p:sp>
-        <p:nvSpPr>
-          <p:cNvPr id="23" name="TextBox 22"/>
-          <p:cNvSpPr txBox="1"/>
-          <p:nvPr/>
-        </p:nvSpPr>
-        <p:spPr>
-          <a:xfrm>
-            <a:off x="6446520" y="4325112"/>
-            <a:ext cx="4846320" cy="566928"/>
-          </a:xfrm>
-          <a:prstGeom prst="rect">
-            <a:avLst/>
-          </a:prstGeom>
-          <a:noFill/>
-        </p:spPr>
-        <p:txBody>
-          <a:bodyPr wrap="square">
-            <a:spAutoFit/>
-          </a:bodyPr>
-          <a:lstStyle/>
-          <a:p>
-            <a:pPr>
-              <a:defRPr sz="1200" b="1">
-                <a:solidFill>
-                  <a:srgbClr val="60A5FA"/>
-                </a:solidFill>
-                <a:latin typeface="Segoe UI"/>
-              </a:defRPr>
-            </a:pPr>
-            <a:r>
-              <a:t>🍽️ Food &amp; Cafes</a:t>
-            </a:r>
-          </a:p>
-          <a:p>
-            <a:pPr>
-              <a:defRPr sz="950">
-                <a:solidFill>
-                  <a:srgbClr val="94A3B8"/>
-                </a:solidFill>
-                <a:latin typeface="Segoe UI"/>
-              </a:defRPr>
-            </a:pPr>
-            <a:r>
-              <a:t>Specialty Cafes, Cake Bakeries, Cloud Kitchens, Event Caterers, Banquet Halls</a:t>
-            </a:r>
-          </a:p>
-        </p:txBody>
-      </p:sp>
-      <p:sp>
-        <p:nvSpPr>
-          <p:cNvPr id="24" name="Rounded Rectangle 23"/>
-          <p:cNvSpPr/>
-          <p:nvPr/>
-        </p:nvSpPr>
-        <p:spPr>
-          <a:xfrm>
-            <a:off x="6309360" y="5065776"/>
-            <a:ext cx="5120640" cy="658368"/>
-          </a:xfrm>
-          <a:prstGeom prst="roundRect">
-            <a:avLst/>
-          </a:prstGeom>
-          <a:solidFill>
-            <a:srgbClr val="1E293B"/>
-          </a:solidFill>
-          <a:ln>
-            <a:solidFill>
-              <a:srgbClr val="334155"/>
-            </a:solidFill>
-          </a:ln>
-        </p:spPr>
-        <p:style>
-          <a:lnRef idx="1">
-            <a:schemeClr val="accent1"/>
-          </a:lnRef>
-          <a:fillRef idx="3">
-            <a:schemeClr val="accent1"/>
-          </a:fillRef>
-          <a:effectRef idx="2">
-            <a:schemeClr val="accent1"/>
-          </a:effectRef>
-          <a:fontRef idx="minor">
-            <a:schemeClr val="lt1"/>
-          </a:fontRef>
-        </p:style>
-        <p:txBody>
-          <a:bodyPr rtlCol="0" anchor="ctr"/>
-          <a:lstStyle/>
-          <a:p>
-            <a:pPr algn="ctr"/>
-          </a:p>
-        </p:txBody>
-      </p:sp>
-      <p:sp>
-        <p:nvSpPr>
-          <p:cNvPr id="25" name="TextBox 24"/>
-          <p:cNvSpPr txBox="1"/>
-          <p:nvPr/>
-        </p:nvSpPr>
-        <p:spPr>
-          <a:xfrm>
-            <a:off x="6446520" y="5111496"/>
-            <a:ext cx="4846320" cy="566928"/>
-          </a:xfrm>
-          <a:prstGeom prst="rect">
-            <a:avLst/>
-          </a:prstGeom>
-          <a:noFill/>
-        </p:spPr>
-        <p:txBody>
-          <a:bodyPr wrap="square">
-            <a:spAutoFit/>
-          </a:bodyPr>
-          <a:lstStyle/>
-          <a:p>
-            <a:pPr>
-              <a:defRPr sz="1200" b="1">
-                <a:solidFill>
-                  <a:srgbClr val="60A5FA"/>
-                </a:solidFill>
-                <a:latin typeface="Segoe UI"/>
-              </a:defRPr>
-            </a:pPr>
-            <a:r>
-              <a:t>💼 Consulting</a:t>
-            </a:r>
-          </a:p>
-          <a:p>
-            <a:pPr>
-              <a:defRPr sz="950">
-                <a:solidFill>
-                  <a:srgbClr val="94A3B8"/>
-                </a:solidFill>
-                <a:latin typeface="Segoe UI"/>
-              </a:defRPr>
-            </a:pPr>
-            <a:r>
-              <a:t>CA &amp; Tax Consultants, Advocates, Interior Designers, Visa &amp; Loan Agents</a:t>
+              <a:defRPr sz="1150">
+                <a:solidFill>
+                  <a:srgbClr val="E2E8F0"/>
+                </a:solidFill>
+                <a:latin typeface="Segoe UI"/>
+              </a:defRPr>
+            </a:pPr>
+            <a:r>
+              <a:t>Your business data is 100% yours. 1-click CSV exports for all customer contacts, leads, inventory records, and sales bills at any time.</a:t>
             </a:r>
           </a:p>
         </p:txBody>
@@ -8670,6 +8248,1136 @@
 </file>
 
 <file path=ppt/slides/slide8.xml><?xml version="1.0" encoding="utf-8"?>
+<p:sld xmlns:a="http://schemas.openxmlformats.org/drawingml/2006/main" xmlns:p="http://schemas.openxmlformats.org/presentationml/2006/main" xmlns:r="http://schemas.openxmlformats.org/officeDocument/2006/relationships">
+  <p:cSld>
+    <p:spTree>
+      <p:nvGrpSpPr>
+        <p:cNvPr id="1" name=""/>
+        <p:cNvGrpSpPr/>
+        <p:nvPr/>
+      </p:nvGrpSpPr>
+      <p:grpSpPr/>
+      <p:sp>
+        <p:nvSpPr>
+          <p:cNvPr id="2" name="Rectangle 1"/>
+          <p:cNvSpPr/>
+          <p:nvPr/>
+        </p:nvSpPr>
+        <p:spPr>
+          <a:xfrm>
+            <a:off x="0" y="0"/>
+            <a:ext cx="12191695" cy="6858000"/>
+          </a:xfrm>
+          <a:prstGeom prst="rect">
+            <a:avLst/>
+          </a:prstGeom>
+          <a:solidFill>
+            <a:srgbClr val="0F172A"/>
+          </a:solidFill>
+          <a:ln>
+            <a:solidFill>
+              <a:srgbClr val="0F172A"/>
+            </a:solidFill>
+          </a:ln>
+        </p:spPr>
+        <p:style>
+          <a:lnRef idx="1">
+            <a:schemeClr val="accent1"/>
+          </a:lnRef>
+          <a:fillRef idx="3">
+            <a:schemeClr val="accent1"/>
+          </a:fillRef>
+          <a:effectRef idx="2">
+            <a:schemeClr val="accent1"/>
+          </a:effectRef>
+          <a:fontRef idx="minor">
+            <a:schemeClr val="lt1"/>
+          </a:fontRef>
+        </p:style>
+        <p:txBody>
+          <a:bodyPr rtlCol="0" anchor="ctr"/>
+          <a:lstStyle/>
+          <a:p>
+            <a:pPr algn="ctr"/>
+          </a:p>
+        </p:txBody>
+      </p:sp>
+      <p:sp>
+        <p:nvSpPr>
+          <p:cNvPr id="3" name="Rounded Rectangle 2"/>
+          <p:cNvSpPr/>
+          <p:nvPr/>
+        </p:nvSpPr>
+        <p:spPr>
+          <a:xfrm>
+            <a:off x="731520" y="411480"/>
+            <a:ext cx="2926080" cy="347472"/>
+          </a:xfrm>
+          <a:prstGeom prst="roundRect">
+            <a:avLst/>
+          </a:prstGeom>
+          <a:solidFill>
+            <a:srgbClr val="1E293B"/>
+          </a:solidFill>
+          <a:ln>
+            <a:solidFill>
+              <a:srgbClr val="60A5FA"/>
+            </a:solidFill>
+          </a:ln>
+        </p:spPr>
+        <p:style>
+          <a:lnRef idx="1">
+            <a:schemeClr val="accent1"/>
+          </a:lnRef>
+          <a:fillRef idx="3">
+            <a:schemeClr val="accent1"/>
+          </a:fillRef>
+          <a:effectRef idx="2">
+            <a:schemeClr val="accent1"/>
+          </a:effectRef>
+          <a:fontRef idx="minor">
+            <a:schemeClr val="lt1"/>
+          </a:fontRef>
+        </p:style>
+        <p:txBody>
+          <a:bodyPr rtlCol="0" anchor="ctr"/>
+          <a:lstStyle/>
+          <a:p>
+            <a:pPr algn="ctr">
+              <a:defRPr sz="1100" b="1">
+                <a:solidFill>
+                  <a:srgbClr val="60A5FA"/>
+                </a:solidFill>
+                <a:latin typeface="Segoe UI"/>
+              </a:defRPr>
+            </a:pPr>
+            <a:r>
+              <a:t>MULTI-INDUSTRY ENGINE</a:t>
+            </a:r>
+          </a:p>
+        </p:txBody>
+      </p:sp>
+      <p:sp>
+        <p:nvSpPr>
+          <p:cNvPr id="4" name="TextBox 3"/>
+          <p:cNvSpPr txBox="1"/>
+          <p:nvPr/>
+        </p:nvSpPr>
+        <p:spPr>
+          <a:xfrm>
+            <a:off x="731520" y="822960"/>
+            <a:ext cx="10698480" cy="594360"/>
+          </a:xfrm>
+          <a:prstGeom prst="rect">
+            <a:avLst/>
+          </a:prstGeom>
+          <a:noFill/>
+        </p:spPr>
+        <p:txBody>
+          <a:bodyPr wrap="square">
+            <a:spAutoFit/>
+          </a:bodyPr>
+          <a:lstStyle/>
+          <a:p>
+            <a:pPr>
+              <a:defRPr sz="2400" b="1">
+                <a:solidFill>
+                  <a:srgbClr val="FFFFFF"/>
+                </a:solidFill>
+                <a:latin typeface="Segoe UI"/>
+              </a:defRPr>
+            </a:pPr>
+            <a:r>
+              <a:t>Tailored for Every Local Industry &amp; Sub-Category</a:t>
+            </a:r>
+          </a:p>
+        </p:txBody>
+      </p:sp>
+      <p:sp>
+        <p:nvSpPr>
+          <p:cNvPr id="5" name="TextBox 4"/>
+          <p:cNvSpPr txBox="1"/>
+          <p:nvPr/>
+        </p:nvSpPr>
+        <p:spPr>
+          <a:xfrm>
+            <a:off x="731520" y="1371600"/>
+            <a:ext cx="10698480" cy="411480"/>
+          </a:xfrm>
+          <a:prstGeom prst="rect">
+            <a:avLst/>
+          </a:prstGeom>
+          <a:noFill/>
+        </p:spPr>
+        <p:txBody>
+          <a:bodyPr wrap="square">
+            <a:spAutoFit/>
+          </a:bodyPr>
+          <a:lstStyle/>
+          <a:p>
+            <a:pPr>
+              <a:defRPr sz="1200">
+                <a:solidFill>
+                  <a:srgbClr val="94A3B8"/>
+                </a:solidFill>
+                <a:latin typeface="Segoe UI"/>
+              </a:defRPr>
+            </a:pPr>
+            <a:r>
+              <a:t>MicroCRM dynamically switches catalog schema, booking logic, and AI behaviors for your niche.</a:t>
+            </a:r>
+          </a:p>
+        </p:txBody>
+      </p:sp>
+      <p:sp>
+        <p:nvSpPr>
+          <p:cNvPr id="6" name="Rounded Rectangle 5"/>
+          <p:cNvSpPr/>
+          <p:nvPr/>
+        </p:nvSpPr>
+        <p:spPr>
+          <a:xfrm>
+            <a:off x="731520" y="1920240"/>
+            <a:ext cx="5120640" cy="658368"/>
+          </a:xfrm>
+          <a:prstGeom prst="roundRect">
+            <a:avLst/>
+          </a:prstGeom>
+          <a:solidFill>
+            <a:srgbClr val="1E293B"/>
+          </a:solidFill>
+          <a:ln>
+            <a:solidFill>
+              <a:srgbClr val="334155"/>
+            </a:solidFill>
+          </a:ln>
+        </p:spPr>
+        <p:style>
+          <a:lnRef idx="1">
+            <a:schemeClr val="accent1"/>
+          </a:lnRef>
+          <a:fillRef idx="3">
+            <a:schemeClr val="accent1"/>
+          </a:fillRef>
+          <a:effectRef idx="2">
+            <a:schemeClr val="accent1"/>
+          </a:effectRef>
+          <a:fontRef idx="minor">
+            <a:schemeClr val="lt1"/>
+          </a:fontRef>
+        </p:style>
+        <p:txBody>
+          <a:bodyPr rtlCol="0" anchor="ctr"/>
+          <a:lstStyle/>
+          <a:p>
+            <a:pPr algn="ctr"/>
+          </a:p>
+        </p:txBody>
+      </p:sp>
+      <p:sp>
+        <p:nvSpPr>
+          <p:cNvPr id="7" name="TextBox 6"/>
+          <p:cNvSpPr txBox="1"/>
+          <p:nvPr/>
+        </p:nvSpPr>
+        <p:spPr>
+          <a:xfrm>
+            <a:off x="868680" y="1965960"/>
+            <a:ext cx="4846320" cy="566928"/>
+          </a:xfrm>
+          <a:prstGeom prst="rect">
+            <a:avLst/>
+          </a:prstGeom>
+          <a:noFill/>
+        </p:spPr>
+        <p:txBody>
+          <a:bodyPr wrap="square">
+            <a:spAutoFit/>
+          </a:bodyPr>
+          <a:lstStyle/>
+          <a:p>
+            <a:pPr>
+              <a:defRPr sz="1200" b="1">
+                <a:solidFill>
+                  <a:srgbClr val="60A5FA"/>
+                </a:solidFill>
+                <a:latin typeface="Segoe UI"/>
+              </a:defRPr>
+            </a:pPr>
+            <a:r>
+              <a:t>💄 Beauty &amp; Salons</a:t>
+            </a:r>
+          </a:p>
+          <a:p>
+            <a:pPr>
+              <a:defRPr sz="950">
+                <a:solidFill>
+                  <a:srgbClr val="94A3B8"/>
+                </a:solidFill>
+                <a:latin typeface="Segoe UI"/>
+              </a:defRPr>
+            </a:pPr>
+            <a:r>
+              <a:t>Hair Salons, Bridal Studios, Nail Bars, Luxury Spas, Tattoo Parlors</a:t>
+            </a:r>
+          </a:p>
+        </p:txBody>
+      </p:sp>
+      <p:sp>
+        <p:nvSpPr>
+          <p:cNvPr id="8" name="Rounded Rectangle 7"/>
+          <p:cNvSpPr/>
+          <p:nvPr/>
+        </p:nvSpPr>
+        <p:spPr>
+          <a:xfrm>
+            <a:off x="731520" y="2706624"/>
+            <a:ext cx="5120640" cy="658368"/>
+          </a:xfrm>
+          <a:prstGeom prst="roundRect">
+            <a:avLst/>
+          </a:prstGeom>
+          <a:solidFill>
+            <a:srgbClr val="1E293B"/>
+          </a:solidFill>
+          <a:ln>
+            <a:solidFill>
+              <a:srgbClr val="334155"/>
+            </a:solidFill>
+          </a:ln>
+        </p:spPr>
+        <p:style>
+          <a:lnRef idx="1">
+            <a:schemeClr val="accent1"/>
+          </a:lnRef>
+          <a:fillRef idx="3">
+            <a:schemeClr val="accent1"/>
+          </a:fillRef>
+          <a:effectRef idx="2">
+            <a:schemeClr val="accent1"/>
+          </a:effectRef>
+          <a:fontRef idx="minor">
+            <a:schemeClr val="lt1"/>
+          </a:fontRef>
+        </p:style>
+        <p:txBody>
+          <a:bodyPr rtlCol="0" anchor="ctr"/>
+          <a:lstStyle/>
+          <a:p>
+            <a:pPr algn="ctr"/>
+          </a:p>
+        </p:txBody>
+      </p:sp>
+      <p:sp>
+        <p:nvSpPr>
+          <p:cNvPr id="9" name="TextBox 8"/>
+          <p:cNvSpPr txBox="1"/>
+          <p:nvPr/>
+        </p:nvSpPr>
+        <p:spPr>
+          <a:xfrm>
+            <a:off x="868680" y="2752344"/>
+            <a:ext cx="4846320" cy="566928"/>
+          </a:xfrm>
+          <a:prstGeom prst="rect">
+            <a:avLst/>
+          </a:prstGeom>
+          <a:noFill/>
+        </p:spPr>
+        <p:txBody>
+          <a:bodyPr wrap="square">
+            <a:spAutoFit/>
+          </a:bodyPr>
+          <a:lstStyle/>
+          <a:p>
+            <a:pPr>
+              <a:defRPr sz="1200" b="1">
+                <a:solidFill>
+                  <a:srgbClr val="60A5FA"/>
+                </a:solidFill>
+                <a:latin typeface="Segoe UI"/>
+              </a:defRPr>
+            </a:pPr>
+            <a:r>
+              <a:t>💻 Tech &amp; Repair</a:t>
+            </a:r>
+          </a:p>
+          <a:p>
+            <a:pPr>
+              <a:defRPr sz="950">
+                <a:solidFill>
+                  <a:srgbClr val="94A3B8"/>
+                </a:solidFill>
+                <a:latin typeface="Segoe UI"/>
+              </a:defRPr>
+            </a:pPr>
+            <a:r>
+              <a:t>Laptop/PC Repair, Mobile Diagnostics, CCTV, Hardware Sales, Refurbished</a:t>
+            </a:r>
+          </a:p>
+        </p:txBody>
+      </p:sp>
+      <p:sp>
+        <p:nvSpPr>
+          <p:cNvPr id="10" name="Rounded Rectangle 9"/>
+          <p:cNvSpPr/>
+          <p:nvPr/>
+        </p:nvSpPr>
+        <p:spPr>
+          <a:xfrm>
+            <a:off x="731520" y="3493008"/>
+            <a:ext cx="5120640" cy="658368"/>
+          </a:xfrm>
+          <a:prstGeom prst="roundRect">
+            <a:avLst/>
+          </a:prstGeom>
+          <a:solidFill>
+            <a:srgbClr val="1E293B"/>
+          </a:solidFill>
+          <a:ln>
+            <a:solidFill>
+              <a:srgbClr val="334155"/>
+            </a:solidFill>
+          </a:ln>
+        </p:spPr>
+        <p:style>
+          <a:lnRef idx="1">
+            <a:schemeClr val="accent1"/>
+          </a:lnRef>
+          <a:fillRef idx="3">
+            <a:schemeClr val="accent1"/>
+          </a:fillRef>
+          <a:effectRef idx="2">
+            <a:schemeClr val="accent1"/>
+          </a:effectRef>
+          <a:fontRef idx="minor">
+            <a:schemeClr val="lt1"/>
+          </a:fontRef>
+        </p:style>
+        <p:txBody>
+          <a:bodyPr rtlCol="0" anchor="ctr"/>
+          <a:lstStyle/>
+          <a:p>
+            <a:pPr algn="ctr"/>
+          </a:p>
+        </p:txBody>
+      </p:sp>
+      <p:sp>
+        <p:nvSpPr>
+          <p:cNvPr id="11" name="TextBox 10"/>
+          <p:cNvSpPr txBox="1"/>
+          <p:nvPr/>
+        </p:nvSpPr>
+        <p:spPr>
+          <a:xfrm>
+            <a:off x="868680" y="3538728"/>
+            <a:ext cx="4846320" cy="566928"/>
+          </a:xfrm>
+          <a:prstGeom prst="rect">
+            <a:avLst/>
+          </a:prstGeom>
+          <a:noFill/>
+        </p:spPr>
+        <p:txBody>
+          <a:bodyPr wrap="square">
+            <a:spAutoFit/>
+          </a:bodyPr>
+          <a:lstStyle/>
+          <a:p>
+            <a:pPr>
+              <a:defRPr sz="1200" b="1">
+                <a:solidFill>
+                  <a:srgbClr val="60A5FA"/>
+                </a:solidFill>
+                <a:latin typeface="Segoe UI"/>
+              </a:defRPr>
+            </a:pPr>
+            <a:r>
+              <a:t>🏘️ Real Estate</a:t>
+            </a:r>
+          </a:p>
+          <a:p>
+            <a:pPr>
+              <a:defRPr sz="950">
+                <a:solidFill>
+                  <a:srgbClr val="94A3B8"/>
+                </a:solidFill>
+                <a:latin typeface="Segoe UI"/>
+              </a:defRPr>
+            </a:pPr>
+            <a:r>
+              <a:t>Builders, Developers, Brokers, Township Planners, Plot &amp; Villa Schemes</a:t>
+            </a:r>
+          </a:p>
+        </p:txBody>
+      </p:sp>
+      <p:sp>
+        <p:nvSpPr>
+          <p:cNvPr id="12" name="Rounded Rectangle 11"/>
+          <p:cNvSpPr/>
+          <p:nvPr/>
+        </p:nvSpPr>
+        <p:spPr>
+          <a:xfrm>
+            <a:off x="731520" y="4279392"/>
+            <a:ext cx="5120640" cy="658368"/>
+          </a:xfrm>
+          <a:prstGeom prst="roundRect">
+            <a:avLst/>
+          </a:prstGeom>
+          <a:solidFill>
+            <a:srgbClr val="1E293B"/>
+          </a:solidFill>
+          <a:ln>
+            <a:solidFill>
+              <a:srgbClr val="334155"/>
+            </a:solidFill>
+          </a:ln>
+        </p:spPr>
+        <p:style>
+          <a:lnRef idx="1">
+            <a:schemeClr val="accent1"/>
+          </a:lnRef>
+          <a:fillRef idx="3">
+            <a:schemeClr val="accent1"/>
+          </a:fillRef>
+          <a:effectRef idx="2">
+            <a:schemeClr val="accent1"/>
+          </a:effectRef>
+          <a:fontRef idx="minor">
+            <a:schemeClr val="lt1"/>
+          </a:fontRef>
+        </p:style>
+        <p:txBody>
+          <a:bodyPr rtlCol="0" anchor="ctr"/>
+          <a:lstStyle/>
+          <a:p>
+            <a:pPr algn="ctr"/>
+          </a:p>
+        </p:txBody>
+      </p:sp>
+      <p:sp>
+        <p:nvSpPr>
+          <p:cNvPr id="13" name="TextBox 12"/>
+          <p:cNvSpPr txBox="1"/>
+          <p:nvPr/>
+        </p:nvSpPr>
+        <p:spPr>
+          <a:xfrm>
+            <a:off x="868680" y="4325112"/>
+            <a:ext cx="4846320" cy="566928"/>
+          </a:xfrm>
+          <a:prstGeom prst="rect">
+            <a:avLst/>
+          </a:prstGeom>
+          <a:noFill/>
+        </p:spPr>
+        <p:txBody>
+          <a:bodyPr wrap="square">
+            <a:spAutoFit/>
+          </a:bodyPr>
+          <a:lstStyle/>
+          <a:p>
+            <a:pPr>
+              <a:defRPr sz="1200" b="1">
+                <a:solidFill>
+                  <a:srgbClr val="60A5FA"/>
+                </a:solidFill>
+                <a:latin typeface="Segoe UI"/>
+              </a:defRPr>
+            </a:pPr>
+            <a:r>
+              <a:t>🩺 Healthcare</a:t>
+            </a:r>
+          </a:p>
+          <a:p>
+            <a:pPr>
+              <a:defRPr sz="950">
+                <a:solidFill>
+                  <a:srgbClr val="94A3B8"/>
+                </a:solidFill>
+                <a:latin typeface="Segoe UI"/>
+              </a:defRPr>
+            </a:pPr>
+            <a:r>
+              <a:t>Dental Clinics, General Doctors, Physiotherapy, Pathology Labs, Eye Clinics</a:t>
+            </a:r>
+          </a:p>
+        </p:txBody>
+      </p:sp>
+      <p:sp>
+        <p:nvSpPr>
+          <p:cNvPr id="14" name="Rounded Rectangle 13"/>
+          <p:cNvSpPr/>
+          <p:nvPr/>
+        </p:nvSpPr>
+        <p:spPr>
+          <a:xfrm>
+            <a:off x="731520" y="5065776"/>
+            <a:ext cx="5120640" cy="658368"/>
+          </a:xfrm>
+          <a:prstGeom prst="roundRect">
+            <a:avLst/>
+          </a:prstGeom>
+          <a:solidFill>
+            <a:srgbClr val="1E293B"/>
+          </a:solidFill>
+          <a:ln>
+            <a:solidFill>
+              <a:srgbClr val="334155"/>
+            </a:solidFill>
+          </a:ln>
+        </p:spPr>
+        <p:style>
+          <a:lnRef idx="1">
+            <a:schemeClr val="accent1"/>
+          </a:lnRef>
+          <a:fillRef idx="3">
+            <a:schemeClr val="accent1"/>
+          </a:fillRef>
+          <a:effectRef idx="2">
+            <a:schemeClr val="accent1"/>
+          </a:effectRef>
+          <a:fontRef idx="minor">
+            <a:schemeClr val="lt1"/>
+          </a:fontRef>
+        </p:style>
+        <p:txBody>
+          <a:bodyPr rtlCol="0" anchor="ctr"/>
+          <a:lstStyle/>
+          <a:p>
+            <a:pPr algn="ctr"/>
+          </a:p>
+        </p:txBody>
+      </p:sp>
+      <p:sp>
+        <p:nvSpPr>
+          <p:cNvPr id="15" name="TextBox 14"/>
+          <p:cNvSpPr txBox="1"/>
+          <p:nvPr/>
+        </p:nvSpPr>
+        <p:spPr>
+          <a:xfrm>
+            <a:off x="868680" y="5111496"/>
+            <a:ext cx="4846320" cy="566928"/>
+          </a:xfrm>
+          <a:prstGeom prst="rect">
+            <a:avLst/>
+          </a:prstGeom>
+          <a:noFill/>
+        </p:spPr>
+        <p:txBody>
+          <a:bodyPr wrap="square">
+            <a:spAutoFit/>
+          </a:bodyPr>
+          <a:lstStyle/>
+          <a:p>
+            <a:pPr>
+              <a:defRPr sz="1200" b="1">
+                <a:solidFill>
+                  <a:srgbClr val="60A5FA"/>
+                </a:solidFill>
+                <a:latin typeface="Segoe UI"/>
+              </a:defRPr>
+            </a:pPr>
+            <a:r>
+              <a:t>🛍️ Retail Stores</a:t>
+            </a:r>
+          </a:p>
+          <a:p>
+            <a:pPr>
+              <a:defRPr sz="950">
+                <a:solidFill>
+                  <a:srgbClr val="94A3B8"/>
+                </a:solidFill>
+                <a:latin typeface="Segoe UI"/>
+              </a:defRPr>
+            </a:pPr>
+            <a:r>
+              <a:t>Clothing Boutiques, Shoe Stores, Optical, Jewelry, Kirana &amp; Supermarkets</a:t>
+            </a:r>
+          </a:p>
+        </p:txBody>
+      </p:sp>
+      <p:sp>
+        <p:nvSpPr>
+          <p:cNvPr id="16" name="Rounded Rectangle 15"/>
+          <p:cNvSpPr/>
+          <p:nvPr/>
+        </p:nvSpPr>
+        <p:spPr>
+          <a:xfrm>
+            <a:off x="6309360" y="1920240"/>
+            <a:ext cx="5120640" cy="658368"/>
+          </a:xfrm>
+          <a:prstGeom prst="roundRect">
+            <a:avLst/>
+          </a:prstGeom>
+          <a:solidFill>
+            <a:srgbClr val="1E293B"/>
+          </a:solidFill>
+          <a:ln>
+            <a:solidFill>
+              <a:srgbClr val="334155"/>
+            </a:solidFill>
+          </a:ln>
+        </p:spPr>
+        <p:style>
+          <a:lnRef idx="1">
+            <a:schemeClr val="accent1"/>
+          </a:lnRef>
+          <a:fillRef idx="3">
+            <a:schemeClr val="accent1"/>
+          </a:fillRef>
+          <a:effectRef idx="2">
+            <a:schemeClr val="accent1"/>
+          </a:effectRef>
+          <a:fontRef idx="minor">
+            <a:schemeClr val="lt1"/>
+          </a:fontRef>
+        </p:style>
+        <p:txBody>
+          <a:bodyPr rtlCol="0" anchor="ctr"/>
+          <a:lstStyle/>
+          <a:p>
+            <a:pPr algn="ctr"/>
+          </a:p>
+        </p:txBody>
+      </p:sp>
+      <p:sp>
+        <p:nvSpPr>
+          <p:cNvPr id="17" name="TextBox 16"/>
+          <p:cNvSpPr txBox="1"/>
+          <p:nvPr/>
+        </p:nvSpPr>
+        <p:spPr>
+          <a:xfrm>
+            <a:off x="6446520" y="1965960"/>
+            <a:ext cx="4846320" cy="566928"/>
+          </a:xfrm>
+          <a:prstGeom prst="rect">
+            <a:avLst/>
+          </a:prstGeom>
+          <a:noFill/>
+        </p:spPr>
+        <p:txBody>
+          <a:bodyPr wrap="square">
+            <a:spAutoFit/>
+          </a:bodyPr>
+          <a:lstStyle/>
+          <a:p>
+            <a:pPr>
+              <a:defRPr sz="1200" b="1">
+                <a:solidFill>
+                  <a:srgbClr val="60A5FA"/>
+                </a:solidFill>
+                <a:latin typeface="Segoe UI"/>
+              </a:defRPr>
+            </a:pPr>
+            <a:r>
+              <a:t>🚗 Automobile</a:t>
+            </a:r>
+          </a:p>
+          <a:p>
+            <a:pPr>
+              <a:defRPr sz="950">
+                <a:solidFill>
+                  <a:srgbClr val="94A3B8"/>
+                </a:solidFill>
+                <a:latin typeface="Segoe UI"/>
+              </a:defRPr>
+            </a:pPr>
+            <a:r>
+              <a:t>Multi-Brand Garages, Two-Wheeler Centers, Car Detailing &amp; PPF, Battery Shops</a:t>
+            </a:r>
+          </a:p>
+        </p:txBody>
+      </p:sp>
+      <p:sp>
+        <p:nvSpPr>
+          <p:cNvPr id="18" name="Rounded Rectangle 17"/>
+          <p:cNvSpPr/>
+          <p:nvPr/>
+        </p:nvSpPr>
+        <p:spPr>
+          <a:xfrm>
+            <a:off x="6309360" y="2706624"/>
+            <a:ext cx="5120640" cy="658368"/>
+          </a:xfrm>
+          <a:prstGeom prst="roundRect">
+            <a:avLst/>
+          </a:prstGeom>
+          <a:solidFill>
+            <a:srgbClr val="1E293B"/>
+          </a:solidFill>
+          <a:ln>
+            <a:solidFill>
+              <a:srgbClr val="334155"/>
+            </a:solidFill>
+          </a:ln>
+        </p:spPr>
+        <p:style>
+          <a:lnRef idx="1">
+            <a:schemeClr val="accent1"/>
+          </a:lnRef>
+          <a:fillRef idx="3">
+            <a:schemeClr val="accent1"/>
+          </a:fillRef>
+          <a:effectRef idx="2">
+            <a:schemeClr val="accent1"/>
+          </a:effectRef>
+          <a:fontRef idx="minor">
+            <a:schemeClr val="lt1"/>
+          </a:fontRef>
+        </p:style>
+        <p:txBody>
+          <a:bodyPr rtlCol="0" anchor="ctr"/>
+          <a:lstStyle/>
+          <a:p>
+            <a:pPr algn="ctr"/>
+          </a:p>
+        </p:txBody>
+      </p:sp>
+      <p:sp>
+        <p:nvSpPr>
+          <p:cNvPr id="19" name="TextBox 18"/>
+          <p:cNvSpPr txBox="1"/>
+          <p:nvPr/>
+        </p:nvSpPr>
+        <p:spPr>
+          <a:xfrm>
+            <a:off x="6446520" y="2752344"/>
+            <a:ext cx="4846320" cy="566928"/>
+          </a:xfrm>
+          <a:prstGeom prst="rect">
+            <a:avLst/>
+          </a:prstGeom>
+          <a:noFill/>
+        </p:spPr>
+        <p:txBody>
+          <a:bodyPr wrap="square">
+            <a:spAutoFit/>
+          </a:bodyPr>
+          <a:lstStyle/>
+          <a:p>
+            <a:pPr>
+              <a:defRPr sz="1200" b="1">
+                <a:solidFill>
+                  <a:srgbClr val="60A5FA"/>
+                </a:solidFill>
+                <a:latin typeface="Segoe UI"/>
+              </a:defRPr>
+            </a:pPr>
+            <a:r>
+              <a:t>🏋️ Fitness &amp; Gyms</a:t>
+            </a:r>
+          </a:p>
+          <a:p>
+            <a:pPr>
+              <a:defRPr sz="950">
+                <a:solidFill>
+                  <a:srgbClr val="94A3B8"/>
+                </a:solidFill>
+                <a:latin typeface="Segoe UI"/>
+              </a:defRPr>
+            </a:pPr>
+            <a:r>
+              <a:t>Gyms, Yoga &amp; Pilates Studios, CrossFit, Martial Arts, Dance Academies</a:t>
+            </a:r>
+          </a:p>
+        </p:txBody>
+      </p:sp>
+      <p:sp>
+        <p:nvSpPr>
+          <p:cNvPr id="20" name="Rounded Rectangle 19"/>
+          <p:cNvSpPr/>
+          <p:nvPr/>
+        </p:nvSpPr>
+        <p:spPr>
+          <a:xfrm>
+            <a:off x="6309360" y="3493008"/>
+            <a:ext cx="5120640" cy="658368"/>
+          </a:xfrm>
+          <a:prstGeom prst="roundRect">
+            <a:avLst/>
+          </a:prstGeom>
+          <a:solidFill>
+            <a:srgbClr val="1E293B"/>
+          </a:solidFill>
+          <a:ln>
+            <a:solidFill>
+              <a:srgbClr val="334155"/>
+            </a:solidFill>
+          </a:ln>
+        </p:spPr>
+        <p:style>
+          <a:lnRef idx="1">
+            <a:schemeClr val="accent1"/>
+          </a:lnRef>
+          <a:fillRef idx="3">
+            <a:schemeClr val="accent1"/>
+          </a:fillRef>
+          <a:effectRef idx="2">
+            <a:schemeClr val="accent1"/>
+          </a:effectRef>
+          <a:fontRef idx="minor">
+            <a:schemeClr val="lt1"/>
+          </a:fontRef>
+        </p:style>
+        <p:txBody>
+          <a:bodyPr rtlCol="0" anchor="ctr"/>
+          <a:lstStyle/>
+          <a:p>
+            <a:pPr algn="ctr"/>
+          </a:p>
+        </p:txBody>
+      </p:sp>
+      <p:sp>
+        <p:nvSpPr>
+          <p:cNvPr id="21" name="TextBox 20"/>
+          <p:cNvSpPr txBox="1"/>
+          <p:nvPr/>
+        </p:nvSpPr>
+        <p:spPr>
+          <a:xfrm>
+            <a:off x="6446520" y="3538728"/>
+            <a:ext cx="4846320" cy="566928"/>
+          </a:xfrm>
+          <a:prstGeom prst="rect">
+            <a:avLst/>
+          </a:prstGeom>
+          <a:noFill/>
+        </p:spPr>
+        <p:txBody>
+          <a:bodyPr wrap="square">
+            <a:spAutoFit/>
+          </a:bodyPr>
+          <a:lstStyle/>
+          <a:p>
+            <a:pPr>
+              <a:defRPr sz="1200" b="1">
+                <a:solidFill>
+                  <a:srgbClr val="60A5FA"/>
+                </a:solidFill>
+                <a:latin typeface="Segoe UI"/>
+              </a:defRPr>
+            </a:pPr>
+            <a:r>
+              <a:t>📚 Education</a:t>
+            </a:r>
+          </a:p>
+          <a:p>
+            <a:pPr>
+              <a:defRPr sz="950">
+                <a:solidFill>
+                  <a:srgbClr val="94A3B8"/>
+                </a:solidFill>
+                <a:latin typeface="Segoe UI"/>
+              </a:defRPr>
+            </a:pPr>
+            <a:r>
+              <a:t>Test Prep Coaching, Home Tutors, Computer Centers, Music &amp; Art Institutes</a:t>
+            </a:r>
+          </a:p>
+        </p:txBody>
+      </p:sp>
+      <p:sp>
+        <p:nvSpPr>
+          <p:cNvPr id="22" name="Rounded Rectangle 21"/>
+          <p:cNvSpPr/>
+          <p:nvPr/>
+        </p:nvSpPr>
+        <p:spPr>
+          <a:xfrm>
+            <a:off x="6309360" y="4279392"/>
+            <a:ext cx="5120640" cy="658368"/>
+          </a:xfrm>
+          <a:prstGeom prst="roundRect">
+            <a:avLst/>
+          </a:prstGeom>
+          <a:solidFill>
+            <a:srgbClr val="1E293B"/>
+          </a:solidFill>
+          <a:ln>
+            <a:solidFill>
+              <a:srgbClr val="334155"/>
+            </a:solidFill>
+          </a:ln>
+        </p:spPr>
+        <p:style>
+          <a:lnRef idx="1">
+            <a:schemeClr val="accent1"/>
+          </a:lnRef>
+          <a:fillRef idx="3">
+            <a:schemeClr val="accent1"/>
+          </a:fillRef>
+          <a:effectRef idx="2">
+            <a:schemeClr val="accent1"/>
+          </a:effectRef>
+          <a:fontRef idx="minor">
+            <a:schemeClr val="lt1"/>
+          </a:fontRef>
+        </p:style>
+        <p:txBody>
+          <a:bodyPr rtlCol="0" anchor="ctr"/>
+          <a:lstStyle/>
+          <a:p>
+            <a:pPr algn="ctr"/>
+          </a:p>
+        </p:txBody>
+      </p:sp>
+      <p:sp>
+        <p:nvSpPr>
+          <p:cNvPr id="23" name="TextBox 22"/>
+          <p:cNvSpPr txBox="1"/>
+          <p:nvPr/>
+        </p:nvSpPr>
+        <p:spPr>
+          <a:xfrm>
+            <a:off x="6446520" y="4325112"/>
+            <a:ext cx="4846320" cy="566928"/>
+          </a:xfrm>
+          <a:prstGeom prst="rect">
+            <a:avLst/>
+          </a:prstGeom>
+          <a:noFill/>
+        </p:spPr>
+        <p:txBody>
+          <a:bodyPr wrap="square">
+            <a:spAutoFit/>
+          </a:bodyPr>
+          <a:lstStyle/>
+          <a:p>
+            <a:pPr>
+              <a:defRPr sz="1200" b="1">
+                <a:solidFill>
+                  <a:srgbClr val="60A5FA"/>
+                </a:solidFill>
+                <a:latin typeface="Segoe UI"/>
+              </a:defRPr>
+            </a:pPr>
+            <a:r>
+              <a:t>🍽️ Food &amp; Cafes</a:t>
+            </a:r>
+          </a:p>
+          <a:p>
+            <a:pPr>
+              <a:defRPr sz="950">
+                <a:solidFill>
+                  <a:srgbClr val="94A3B8"/>
+                </a:solidFill>
+                <a:latin typeface="Segoe UI"/>
+              </a:defRPr>
+            </a:pPr>
+            <a:r>
+              <a:t>Specialty Cafes, Cake Bakeries, Cloud Kitchens, Event Caterers, Banquet Halls</a:t>
+            </a:r>
+          </a:p>
+        </p:txBody>
+      </p:sp>
+      <p:sp>
+        <p:nvSpPr>
+          <p:cNvPr id="24" name="Rounded Rectangle 23"/>
+          <p:cNvSpPr/>
+          <p:nvPr/>
+        </p:nvSpPr>
+        <p:spPr>
+          <a:xfrm>
+            <a:off x="6309360" y="5065776"/>
+            <a:ext cx="5120640" cy="658368"/>
+          </a:xfrm>
+          <a:prstGeom prst="roundRect">
+            <a:avLst/>
+          </a:prstGeom>
+          <a:solidFill>
+            <a:srgbClr val="1E293B"/>
+          </a:solidFill>
+          <a:ln>
+            <a:solidFill>
+              <a:srgbClr val="334155"/>
+            </a:solidFill>
+          </a:ln>
+        </p:spPr>
+        <p:style>
+          <a:lnRef idx="1">
+            <a:schemeClr val="accent1"/>
+          </a:lnRef>
+          <a:fillRef idx="3">
+            <a:schemeClr val="accent1"/>
+          </a:fillRef>
+          <a:effectRef idx="2">
+            <a:schemeClr val="accent1"/>
+          </a:effectRef>
+          <a:fontRef idx="minor">
+            <a:schemeClr val="lt1"/>
+          </a:fontRef>
+        </p:style>
+        <p:txBody>
+          <a:bodyPr rtlCol="0" anchor="ctr"/>
+          <a:lstStyle/>
+          <a:p>
+            <a:pPr algn="ctr"/>
+          </a:p>
+        </p:txBody>
+      </p:sp>
+      <p:sp>
+        <p:nvSpPr>
+          <p:cNvPr id="25" name="TextBox 24"/>
+          <p:cNvSpPr txBox="1"/>
+          <p:nvPr/>
+        </p:nvSpPr>
+        <p:spPr>
+          <a:xfrm>
+            <a:off x="6446520" y="5111496"/>
+            <a:ext cx="4846320" cy="566928"/>
+          </a:xfrm>
+          <a:prstGeom prst="rect">
+            <a:avLst/>
+          </a:prstGeom>
+          <a:noFill/>
+        </p:spPr>
+        <p:txBody>
+          <a:bodyPr wrap="square">
+            <a:spAutoFit/>
+          </a:bodyPr>
+          <a:lstStyle/>
+          <a:p>
+            <a:pPr>
+              <a:defRPr sz="1200" b="1">
+                <a:solidFill>
+                  <a:srgbClr val="60A5FA"/>
+                </a:solidFill>
+                <a:latin typeface="Segoe UI"/>
+              </a:defRPr>
+            </a:pPr>
+            <a:r>
+              <a:t>💼 Consulting</a:t>
+            </a:r>
+          </a:p>
+          <a:p>
+            <a:pPr>
+              <a:defRPr sz="950">
+                <a:solidFill>
+                  <a:srgbClr val="94A3B8"/>
+                </a:solidFill>
+                <a:latin typeface="Segoe UI"/>
+              </a:defRPr>
+            </a:pPr>
+            <a:r>
+              <a:t>CA &amp; Tax Consultants, Advocates, Interior Designers, Visa &amp; Loan Agents</a:t>
+            </a:r>
+          </a:p>
+        </p:txBody>
+      </p:sp>
+    </p:spTree>
+  </p:cSld>
+  <p:clrMapOvr>
+    <a:masterClrMapping/>
+  </p:clrMapOvr>
+</p:sld>
+</file>
+
+<file path=ppt/slides/slide9.xml><?xml version="1.0" encoding="utf-8"?>
 <p:sld xmlns:a="http://schemas.openxmlformats.org/drawingml/2006/main" xmlns:p="http://schemas.openxmlformats.org/presentationml/2006/main" xmlns:r="http://schemas.openxmlformats.org/officeDocument/2006/relationships">
   <p:cSld>
     <p:spTree>
